--- a/Desenvolvimento de Aplicações/Pedro/Aula 01 - Criando Projeto Dart/Aula Inaugural.pptx
+++ b/Desenvolvimento de Aplicações/Pedro/Aula 01 - Criando Projeto Dart/Aula Inaugural.pptx
@@ -5,10 +5,10 @@
     <p:sldMasterId id="2147483677" r:id="rId1"/>
   </p:sldMasterIdLst>
   <p:notesMasterIdLst>
-    <p:notesMasterId r:id="rId28"/>
+    <p:notesMasterId r:id="rId34"/>
   </p:notesMasterIdLst>
   <p:handoutMasterIdLst>
-    <p:handoutMasterId r:id="rId29"/>
+    <p:handoutMasterId r:id="rId35"/>
   </p:handoutMasterIdLst>
   <p:sldIdLst>
     <p:sldId id="256" r:id="rId2"/>
@@ -32,11 +32,17 @@
     <p:sldId id="345" r:id="rId20"/>
     <p:sldId id="346" r:id="rId21"/>
     <p:sldId id="347" r:id="rId22"/>
-    <p:sldId id="343" r:id="rId23"/>
-    <p:sldId id="348" r:id="rId24"/>
-    <p:sldId id="323" r:id="rId25"/>
-    <p:sldId id="324" r:id="rId26"/>
-    <p:sldId id="325" r:id="rId27"/>
+    <p:sldId id="354" r:id="rId23"/>
+    <p:sldId id="343" r:id="rId24"/>
+    <p:sldId id="348" r:id="rId25"/>
+    <p:sldId id="349" r:id="rId26"/>
+    <p:sldId id="350" r:id="rId27"/>
+    <p:sldId id="351" r:id="rId28"/>
+    <p:sldId id="352" r:id="rId29"/>
+    <p:sldId id="353" r:id="rId30"/>
+    <p:sldId id="323" r:id="rId31"/>
+    <p:sldId id="324" r:id="rId32"/>
+    <p:sldId id="325" r:id="rId33"/>
   </p:sldIdLst>
   <p:sldSz cx="12192000" cy="6858000"/>
   <p:notesSz cx="6858000" cy="9144000"/>
@@ -1312,6 +1318,9 @@
               <a:lnSpc>
                 <a:spcPct val="150000"/>
               </a:lnSpc>
+              <a:spcBef>
+                <a:spcPts val="0"/>
+              </a:spcBef>
               <a:buNone/>
               <a:defRPr sz="2000">
                 <a:latin typeface="Times New Roman" panose="02020603050405020304" pitchFamily="18" charset="0"/>
@@ -1322,6 +1331,9 @@
               <a:lnSpc>
                 <a:spcPct val="150000"/>
               </a:lnSpc>
+              <a:spcBef>
+                <a:spcPts val="0"/>
+              </a:spcBef>
               <a:defRPr sz="1600">
                 <a:latin typeface="Times New Roman" panose="02020603050405020304" pitchFamily="18" charset="0"/>
                 <a:cs typeface="Times New Roman" panose="02020603050405020304" pitchFamily="18" charset="0"/>
@@ -1331,6 +1343,9 @@
               <a:lnSpc>
                 <a:spcPct val="150000"/>
               </a:lnSpc>
+              <a:spcBef>
+                <a:spcPts val="0"/>
+              </a:spcBef>
               <a:defRPr sz="1400">
                 <a:latin typeface="Times New Roman" panose="02020603050405020304" pitchFamily="18" charset="0"/>
                 <a:cs typeface="Times New Roman" panose="02020603050405020304" pitchFamily="18" charset="0"/>
@@ -1340,6 +1355,9 @@
               <a:lnSpc>
                 <a:spcPct val="150000"/>
               </a:lnSpc>
+              <a:spcBef>
+                <a:spcPts val="0"/>
+              </a:spcBef>
               <a:defRPr sz="1200">
                 <a:latin typeface="Times New Roman" panose="02020603050405020304" pitchFamily="18" charset="0"/>
                 <a:cs typeface="Times New Roman" panose="02020603050405020304" pitchFamily="18" charset="0"/>
@@ -1349,6 +1367,9 @@
               <a:lnSpc>
                 <a:spcPct val="150000"/>
               </a:lnSpc>
+              <a:spcBef>
+                <a:spcPts val="0"/>
+              </a:spcBef>
               <a:defRPr sz="1000">
                 <a:latin typeface="Times New Roman" panose="02020603050405020304" pitchFamily="18" charset="0"/>
                 <a:cs typeface="Times New Roman" panose="02020603050405020304" pitchFamily="18" charset="0"/>
@@ -9282,6 +9303,1276 @@
           <p:cNvPr id="2" name="Título 1">
             <a:extLst>
               <a:ext uri="{FF2B5EF4-FFF2-40B4-BE49-F238E27FC236}">
+                <a16:creationId xmlns:a16="http://schemas.microsoft.com/office/drawing/2014/main" id="{9086E8F5-D014-BF5A-E4CA-F53DB5B4F755}"/>
+              </a:ext>
+            </a:extLst>
+          </p:cNvPr>
+          <p:cNvSpPr>
+            <a:spLocks noGrp="1"/>
+          </p:cNvSpPr>
+          <p:nvPr>
+            <p:ph type="title"/>
+          </p:nvPr>
+        </p:nvSpPr>
+        <p:spPr/>
+        <p:txBody>
+          <a:bodyPr/>
+          <a:lstStyle/>
+          <a:p>
+            <a:r>
+              <a:rPr lang="pt-BR" dirty="0"/>
+              <a:t>Saída de Dados no Dart</a:t>
+            </a:r>
+            <a:br>
+              <a:rPr lang="pt-BR" dirty="0"/>
+            </a:br>
+            <a:endParaRPr lang="pt-BR" dirty="0"/>
+          </a:p>
+        </p:txBody>
+      </p:sp>
+      <p:sp>
+        <p:nvSpPr>
+          <p:cNvPr id="3" name="Espaço Reservado para Conteúdo 2">
+            <a:extLst>
+              <a:ext uri="{FF2B5EF4-FFF2-40B4-BE49-F238E27FC236}">
+                <a16:creationId xmlns:a16="http://schemas.microsoft.com/office/drawing/2014/main" id="{E8BF6819-80CA-B460-94B9-E5C2687B027C}"/>
+              </a:ext>
+            </a:extLst>
+          </p:cNvPr>
+          <p:cNvSpPr>
+            <a:spLocks noGrp="1"/>
+          </p:cNvSpPr>
+          <p:nvPr>
+            <p:ph idx="1"/>
+          </p:nvPr>
+        </p:nvSpPr>
+        <p:spPr>
+          <a:xfrm>
+            <a:off x="592347" y="1844675"/>
+            <a:ext cx="11007306" cy="1117600"/>
+          </a:xfrm>
+        </p:spPr>
+        <p:txBody>
+          <a:bodyPr/>
+          <a:lstStyle/>
+          <a:p>
+            <a:r>
+              <a:rPr lang="pt-BR" dirty="0"/>
+              <a:t>A saída de dados é usada para exibir informações ao usuário, geralmente no terminal/console. No Dart, a principal função para isso é o print().</a:t>
+            </a:r>
+          </a:p>
+          <a:p>
+            <a:br>
+              <a:rPr lang="pt-BR" dirty="0"/>
+            </a:br>
+            <a:endParaRPr lang="pt-BR" dirty="0"/>
+          </a:p>
+        </p:txBody>
+      </p:sp>
+      <p:graphicFrame>
+        <p:nvGraphicFramePr>
+          <p:cNvPr id="4" name="Tabela 3">
+            <a:extLst>
+              <a:ext uri="{FF2B5EF4-FFF2-40B4-BE49-F238E27FC236}">
+                <a16:creationId xmlns:a16="http://schemas.microsoft.com/office/drawing/2014/main" id="{96E1C55F-3E76-B6C5-5D00-C9FAFDDCA37D}"/>
+              </a:ext>
+            </a:extLst>
+          </p:cNvPr>
+          <p:cNvGraphicFramePr>
+            <a:graphicFrameLocks noGrp="1"/>
+          </p:cNvGraphicFramePr>
+          <p:nvPr>
+            <p:extLst>
+              <p:ext uri="{D42A27DB-BD31-4B8C-83A1-F6EECF244321}">
+                <p14:modId xmlns:p14="http://schemas.microsoft.com/office/powerpoint/2010/main" val="25775304"/>
+              </p:ext>
+            </p:extLst>
+          </p:nvPr>
+        </p:nvGraphicFramePr>
+        <p:xfrm>
+          <a:off x="2152650" y="3361082"/>
+          <a:ext cx="7886700" cy="2880000"/>
+        </p:xfrm>
+        <a:graphic>
+          <a:graphicData uri="http://schemas.openxmlformats.org/drawingml/2006/table">
+            <a:tbl>
+              <a:tblPr/>
+              <a:tblGrid>
+                <a:gridCol w="2628900">
+                  <a:extLst>
+                    <a:ext uri="{9D8B030D-6E8A-4147-A177-3AD203B41FA5}">
+                      <a16:colId xmlns:a16="http://schemas.microsoft.com/office/drawing/2014/main" val="2285236985"/>
+                    </a:ext>
+                  </a:extLst>
+                </a:gridCol>
+                <a:gridCol w="2628900">
+                  <a:extLst>
+                    <a:ext uri="{9D8B030D-6E8A-4147-A177-3AD203B41FA5}">
+                      <a16:colId xmlns:a16="http://schemas.microsoft.com/office/drawing/2014/main" val="3290892430"/>
+                    </a:ext>
+                  </a:extLst>
+                </a:gridCol>
+                <a:gridCol w="2628900">
+                  <a:extLst>
+                    <a:ext uri="{9D8B030D-6E8A-4147-A177-3AD203B41FA5}">
+                      <a16:colId xmlns:a16="http://schemas.microsoft.com/office/drawing/2014/main" val="754328161"/>
+                    </a:ext>
+                  </a:extLst>
+                </a:gridCol>
+              </a:tblGrid>
+              <a:tr h="480000">
+                <a:tc>
+                  <a:txBody>
+                    <a:bodyPr/>
+                    <a:lstStyle/>
+                    <a:p>
+                      <a:pPr algn="ctr">
+                        <a:buNone/>
+                      </a:pPr>
+                      <a:r>
+                        <a:rPr lang="pt-BR" sz="1600" b="1" dirty="0">
+                          <a:solidFill>
+                            <a:schemeClr val="bg1"/>
+                          </a:solidFill>
+                          <a:effectLst/>
+                          <a:latin typeface="Times New Roman" panose="02020603050405020304" pitchFamily="18" charset="0"/>
+                          <a:cs typeface="Times New Roman" panose="02020603050405020304" pitchFamily="18" charset="0"/>
+                        </a:rPr>
+                        <a:t>Forma</a:t>
+                      </a:r>
+                    </a:p>
+                  </a:txBody>
+                  <a:tcPr anchor="ctr">
+                    <a:lnL w="12700" cap="flat" cmpd="sng" algn="ctr">
+                      <a:solidFill>
+                        <a:schemeClr val="tx1"/>
+                      </a:solidFill>
+                      <a:prstDash val="solid"/>
+                      <a:round/>
+                      <a:headEnd type="none" w="med" len="med"/>
+                      <a:tailEnd type="none" w="med" len="med"/>
+                    </a:lnL>
+                    <a:lnR w="12700" cap="flat" cmpd="sng" algn="ctr">
+                      <a:solidFill>
+                        <a:schemeClr val="tx1"/>
+                      </a:solidFill>
+                      <a:prstDash val="solid"/>
+                      <a:round/>
+                      <a:headEnd type="none" w="med" len="med"/>
+                      <a:tailEnd type="none" w="med" len="med"/>
+                    </a:lnR>
+                    <a:lnT w="12700" cap="flat" cmpd="sng" algn="ctr">
+                      <a:solidFill>
+                        <a:schemeClr val="tx1"/>
+                      </a:solidFill>
+                      <a:prstDash val="solid"/>
+                      <a:round/>
+                      <a:headEnd type="none" w="med" len="med"/>
+                      <a:tailEnd type="none" w="med" len="med"/>
+                    </a:lnT>
+                    <a:lnB w="12700" cap="flat" cmpd="sng" algn="ctr">
+                      <a:solidFill>
+                        <a:schemeClr val="tx1"/>
+                      </a:solidFill>
+                      <a:prstDash val="solid"/>
+                      <a:round/>
+                      <a:headEnd type="none" w="med" len="med"/>
+                      <a:tailEnd type="none" w="med" len="med"/>
+                    </a:lnB>
+                    <a:solidFill>
+                      <a:srgbClr val="292A86"/>
+                    </a:solidFill>
+                  </a:tcPr>
+                </a:tc>
+                <a:tc>
+                  <a:txBody>
+                    <a:bodyPr/>
+                    <a:lstStyle/>
+                    <a:p>
+                      <a:pPr algn="ctr">
+                        <a:buNone/>
+                      </a:pPr>
+                      <a:r>
+                        <a:rPr lang="pt-BR" sz="1600" b="1" dirty="0">
+                          <a:solidFill>
+                            <a:schemeClr val="bg1"/>
+                          </a:solidFill>
+                          <a:effectLst/>
+                          <a:latin typeface="Times New Roman" panose="02020603050405020304" pitchFamily="18" charset="0"/>
+                          <a:cs typeface="Times New Roman" panose="02020603050405020304" pitchFamily="18" charset="0"/>
+                        </a:rPr>
+                        <a:t>Sintaxe</a:t>
+                      </a:r>
+                    </a:p>
+                  </a:txBody>
+                  <a:tcPr anchor="ctr">
+                    <a:lnL w="12700" cap="flat" cmpd="sng" algn="ctr">
+                      <a:solidFill>
+                        <a:schemeClr val="tx1"/>
+                      </a:solidFill>
+                      <a:prstDash val="solid"/>
+                      <a:round/>
+                      <a:headEnd type="none" w="med" len="med"/>
+                      <a:tailEnd type="none" w="med" len="med"/>
+                    </a:lnL>
+                    <a:lnR w="12700" cap="flat" cmpd="sng" algn="ctr">
+                      <a:solidFill>
+                        <a:schemeClr val="tx1"/>
+                      </a:solidFill>
+                      <a:prstDash val="solid"/>
+                      <a:round/>
+                      <a:headEnd type="none" w="med" len="med"/>
+                      <a:tailEnd type="none" w="med" len="med"/>
+                    </a:lnR>
+                    <a:lnT w="12700" cap="flat" cmpd="sng" algn="ctr">
+                      <a:solidFill>
+                        <a:schemeClr val="tx1"/>
+                      </a:solidFill>
+                      <a:prstDash val="solid"/>
+                      <a:round/>
+                      <a:headEnd type="none" w="med" len="med"/>
+                      <a:tailEnd type="none" w="med" len="med"/>
+                    </a:lnT>
+                    <a:lnB w="12700" cap="flat" cmpd="sng" algn="ctr">
+                      <a:solidFill>
+                        <a:schemeClr val="tx1"/>
+                      </a:solidFill>
+                      <a:prstDash val="solid"/>
+                      <a:round/>
+                      <a:headEnd type="none" w="med" len="med"/>
+                      <a:tailEnd type="none" w="med" len="med"/>
+                    </a:lnB>
+                    <a:solidFill>
+                      <a:srgbClr val="292A86"/>
+                    </a:solidFill>
+                  </a:tcPr>
+                </a:tc>
+                <a:tc>
+                  <a:txBody>
+                    <a:bodyPr/>
+                    <a:lstStyle/>
+                    <a:p>
+                      <a:pPr algn="ctr">
+                        <a:buNone/>
+                      </a:pPr>
+                      <a:r>
+                        <a:rPr lang="pt-BR" sz="1600" b="1" dirty="0">
+                          <a:solidFill>
+                            <a:schemeClr val="bg1"/>
+                          </a:solidFill>
+                          <a:effectLst/>
+                          <a:latin typeface="Times New Roman" panose="02020603050405020304" pitchFamily="18" charset="0"/>
+                          <a:cs typeface="Times New Roman" panose="02020603050405020304" pitchFamily="18" charset="0"/>
+                        </a:rPr>
+                        <a:t>Exemplo</a:t>
+                      </a:r>
+                    </a:p>
+                  </a:txBody>
+                  <a:tcPr anchor="ctr">
+                    <a:lnL w="12700" cap="flat" cmpd="sng" algn="ctr">
+                      <a:solidFill>
+                        <a:schemeClr val="tx1"/>
+                      </a:solidFill>
+                      <a:prstDash val="solid"/>
+                      <a:round/>
+                      <a:headEnd type="none" w="med" len="med"/>
+                      <a:tailEnd type="none" w="med" len="med"/>
+                    </a:lnL>
+                    <a:lnR w="12700" cap="flat" cmpd="sng" algn="ctr">
+                      <a:solidFill>
+                        <a:schemeClr val="tx1"/>
+                      </a:solidFill>
+                      <a:prstDash val="solid"/>
+                      <a:round/>
+                      <a:headEnd type="none" w="med" len="med"/>
+                      <a:tailEnd type="none" w="med" len="med"/>
+                    </a:lnR>
+                    <a:lnT w="12700" cap="flat" cmpd="sng" algn="ctr">
+                      <a:solidFill>
+                        <a:schemeClr val="tx1"/>
+                      </a:solidFill>
+                      <a:prstDash val="solid"/>
+                      <a:round/>
+                      <a:headEnd type="none" w="med" len="med"/>
+                      <a:tailEnd type="none" w="med" len="med"/>
+                    </a:lnT>
+                    <a:lnB w="12700" cap="flat" cmpd="sng" algn="ctr">
+                      <a:solidFill>
+                        <a:schemeClr val="tx1"/>
+                      </a:solidFill>
+                      <a:prstDash val="solid"/>
+                      <a:round/>
+                      <a:headEnd type="none" w="med" len="med"/>
+                      <a:tailEnd type="none" w="med" len="med"/>
+                    </a:lnB>
+                    <a:solidFill>
+                      <a:srgbClr val="292A86"/>
+                    </a:solidFill>
+                  </a:tcPr>
+                </a:tc>
+                <a:extLst>
+                  <a:ext uri="{0D108BD9-81ED-4DB2-BD59-A6C34878D82A}">
+                    <a16:rowId xmlns:a16="http://schemas.microsoft.com/office/drawing/2014/main" val="1579323719"/>
+                  </a:ext>
+                </a:extLst>
+              </a:tr>
+              <a:tr h="480000">
+                <a:tc>
+                  <a:txBody>
+                    <a:bodyPr/>
+                    <a:lstStyle/>
+                    <a:p>
+                      <a:pPr algn="ctr">
+                        <a:buNone/>
+                      </a:pPr>
+                      <a:r>
+                        <a:rPr lang="pt-BR" sz="1600" dirty="0">
+                          <a:effectLst/>
+                          <a:latin typeface="Times New Roman" panose="02020603050405020304" pitchFamily="18" charset="0"/>
+                          <a:cs typeface="Times New Roman" panose="02020603050405020304" pitchFamily="18" charset="0"/>
+                        </a:rPr>
+                        <a:t>Direta</a:t>
+                      </a:r>
+                    </a:p>
+                  </a:txBody>
+                  <a:tcPr anchor="ctr">
+                    <a:lnL w="12700" cap="flat" cmpd="sng" algn="ctr">
+                      <a:solidFill>
+                        <a:schemeClr val="tx1"/>
+                      </a:solidFill>
+                      <a:prstDash val="solid"/>
+                      <a:round/>
+                      <a:headEnd type="none" w="med" len="med"/>
+                      <a:tailEnd type="none" w="med" len="med"/>
+                    </a:lnL>
+                    <a:lnR w="12700" cap="flat" cmpd="sng" algn="ctr">
+                      <a:solidFill>
+                        <a:schemeClr val="tx1"/>
+                      </a:solidFill>
+                      <a:prstDash val="solid"/>
+                      <a:round/>
+                      <a:headEnd type="none" w="med" len="med"/>
+                      <a:tailEnd type="none" w="med" len="med"/>
+                    </a:lnR>
+                    <a:lnT w="12700" cap="flat" cmpd="sng" algn="ctr">
+                      <a:solidFill>
+                        <a:schemeClr val="tx1"/>
+                      </a:solidFill>
+                      <a:prstDash val="solid"/>
+                      <a:round/>
+                      <a:headEnd type="none" w="med" len="med"/>
+                      <a:tailEnd type="none" w="med" len="med"/>
+                    </a:lnT>
+                    <a:lnB w="12700" cap="flat" cmpd="sng" algn="ctr">
+                      <a:solidFill>
+                        <a:schemeClr val="tx1"/>
+                      </a:solidFill>
+                      <a:prstDash val="solid"/>
+                      <a:round/>
+                      <a:headEnd type="none" w="med" len="med"/>
+                      <a:tailEnd type="none" w="med" len="med"/>
+                    </a:lnB>
+                    <a:noFill/>
+                  </a:tcPr>
+                </a:tc>
+                <a:tc>
+                  <a:txBody>
+                    <a:bodyPr/>
+                    <a:lstStyle/>
+                    <a:p>
+                      <a:pPr algn="ctr">
+                        <a:buNone/>
+                      </a:pPr>
+                      <a:r>
+                        <a:rPr lang="pt-BR" sz="1600">
+                          <a:effectLst/>
+                          <a:latin typeface="Times New Roman" panose="02020603050405020304" pitchFamily="18" charset="0"/>
+                          <a:cs typeface="Times New Roman" panose="02020603050405020304" pitchFamily="18" charset="0"/>
+                        </a:rPr>
+                        <a:t>print('texto')</a:t>
+                      </a:r>
+                    </a:p>
+                  </a:txBody>
+                  <a:tcPr anchor="ctr">
+                    <a:lnL w="12700" cap="flat" cmpd="sng" algn="ctr">
+                      <a:solidFill>
+                        <a:schemeClr val="tx1"/>
+                      </a:solidFill>
+                      <a:prstDash val="solid"/>
+                      <a:round/>
+                      <a:headEnd type="none" w="med" len="med"/>
+                      <a:tailEnd type="none" w="med" len="med"/>
+                    </a:lnL>
+                    <a:lnR w="12700" cap="flat" cmpd="sng" algn="ctr">
+                      <a:solidFill>
+                        <a:schemeClr val="tx1"/>
+                      </a:solidFill>
+                      <a:prstDash val="solid"/>
+                      <a:round/>
+                      <a:headEnd type="none" w="med" len="med"/>
+                      <a:tailEnd type="none" w="med" len="med"/>
+                    </a:lnR>
+                    <a:lnT w="12700" cap="flat" cmpd="sng" algn="ctr">
+                      <a:solidFill>
+                        <a:schemeClr val="tx1"/>
+                      </a:solidFill>
+                      <a:prstDash val="solid"/>
+                      <a:round/>
+                      <a:headEnd type="none" w="med" len="med"/>
+                      <a:tailEnd type="none" w="med" len="med"/>
+                    </a:lnT>
+                    <a:lnB w="12700" cap="flat" cmpd="sng" algn="ctr">
+                      <a:solidFill>
+                        <a:schemeClr val="tx1"/>
+                      </a:solidFill>
+                      <a:prstDash val="solid"/>
+                      <a:round/>
+                      <a:headEnd type="none" w="med" len="med"/>
+                      <a:tailEnd type="none" w="med" len="med"/>
+                    </a:lnB>
+                    <a:noFill/>
+                  </a:tcPr>
+                </a:tc>
+                <a:tc>
+                  <a:txBody>
+                    <a:bodyPr/>
+                    <a:lstStyle/>
+                    <a:p>
+                      <a:pPr algn="ctr">
+                        <a:buNone/>
+                      </a:pPr>
+                      <a:r>
+                        <a:rPr lang="pt-BR" sz="1600">
+                          <a:effectLst/>
+                          <a:latin typeface="Times New Roman" panose="02020603050405020304" pitchFamily="18" charset="0"/>
+                          <a:cs typeface="Times New Roman" panose="02020603050405020304" pitchFamily="18" charset="0"/>
+                        </a:rPr>
+                        <a:t>print('Olá!')</a:t>
+                      </a:r>
+                    </a:p>
+                  </a:txBody>
+                  <a:tcPr anchor="ctr">
+                    <a:lnL w="12700" cap="flat" cmpd="sng" algn="ctr">
+                      <a:solidFill>
+                        <a:schemeClr val="tx1"/>
+                      </a:solidFill>
+                      <a:prstDash val="solid"/>
+                      <a:round/>
+                      <a:headEnd type="none" w="med" len="med"/>
+                      <a:tailEnd type="none" w="med" len="med"/>
+                    </a:lnL>
+                    <a:lnR w="12700" cap="flat" cmpd="sng" algn="ctr">
+                      <a:solidFill>
+                        <a:schemeClr val="tx1"/>
+                      </a:solidFill>
+                      <a:prstDash val="solid"/>
+                      <a:round/>
+                      <a:headEnd type="none" w="med" len="med"/>
+                      <a:tailEnd type="none" w="med" len="med"/>
+                    </a:lnR>
+                    <a:lnT w="12700" cap="flat" cmpd="sng" algn="ctr">
+                      <a:solidFill>
+                        <a:schemeClr val="tx1"/>
+                      </a:solidFill>
+                      <a:prstDash val="solid"/>
+                      <a:round/>
+                      <a:headEnd type="none" w="med" len="med"/>
+                      <a:tailEnd type="none" w="med" len="med"/>
+                    </a:lnT>
+                    <a:lnB w="12700" cap="flat" cmpd="sng" algn="ctr">
+                      <a:solidFill>
+                        <a:schemeClr val="tx1"/>
+                      </a:solidFill>
+                      <a:prstDash val="solid"/>
+                      <a:round/>
+                      <a:headEnd type="none" w="med" len="med"/>
+                      <a:tailEnd type="none" w="med" len="med"/>
+                    </a:lnB>
+                    <a:noFill/>
+                  </a:tcPr>
+                </a:tc>
+                <a:extLst>
+                  <a:ext uri="{0D108BD9-81ED-4DB2-BD59-A6C34878D82A}">
+                    <a16:rowId xmlns:a16="http://schemas.microsoft.com/office/drawing/2014/main" val="3464368753"/>
+                  </a:ext>
+                </a:extLst>
+              </a:tr>
+              <a:tr h="480000">
+                <a:tc>
+                  <a:txBody>
+                    <a:bodyPr/>
+                    <a:lstStyle/>
+                    <a:p>
+                      <a:pPr algn="ctr">
+                        <a:buNone/>
+                      </a:pPr>
+                      <a:r>
+                        <a:rPr lang="pt-BR" sz="1600">
+                          <a:effectLst/>
+                          <a:latin typeface="Times New Roman" panose="02020603050405020304" pitchFamily="18" charset="0"/>
+                          <a:cs typeface="Times New Roman" panose="02020603050405020304" pitchFamily="18" charset="0"/>
+                        </a:rPr>
+                        <a:t>Interpolação simples</a:t>
+                      </a:r>
+                    </a:p>
+                  </a:txBody>
+                  <a:tcPr anchor="ctr">
+                    <a:lnL w="12700" cap="flat" cmpd="sng" algn="ctr">
+                      <a:solidFill>
+                        <a:schemeClr val="tx1"/>
+                      </a:solidFill>
+                      <a:prstDash val="solid"/>
+                      <a:round/>
+                      <a:headEnd type="none" w="med" len="med"/>
+                      <a:tailEnd type="none" w="med" len="med"/>
+                    </a:lnL>
+                    <a:lnR w="12700" cap="flat" cmpd="sng" algn="ctr">
+                      <a:solidFill>
+                        <a:schemeClr val="tx1"/>
+                      </a:solidFill>
+                      <a:prstDash val="solid"/>
+                      <a:round/>
+                      <a:headEnd type="none" w="med" len="med"/>
+                      <a:tailEnd type="none" w="med" len="med"/>
+                    </a:lnR>
+                    <a:lnT w="12700" cap="flat" cmpd="sng" algn="ctr">
+                      <a:solidFill>
+                        <a:schemeClr val="tx1"/>
+                      </a:solidFill>
+                      <a:prstDash val="solid"/>
+                      <a:round/>
+                      <a:headEnd type="none" w="med" len="med"/>
+                      <a:tailEnd type="none" w="med" len="med"/>
+                    </a:lnT>
+                    <a:lnB w="12700" cap="flat" cmpd="sng" algn="ctr">
+                      <a:solidFill>
+                        <a:schemeClr val="tx1"/>
+                      </a:solidFill>
+                      <a:prstDash val="solid"/>
+                      <a:round/>
+                      <a:headEnd type="none" w="med" len="med"/>
+                      <a:tailEnd type="none" w="med" len="med"/>
+                    </a:lnB>
+                    <a:noFill/>
+                  </a:tcPr>
+                </a:tc>
+                <a:tc>
+                  <a:txBody>
+                    <a:bodyPr/>
+                    <a:lstStyle/>
+                    <a:p>
+                      <a:pPr algn="ctr">
+                        <a:buNone/>
+                      </a:pPr>
+                      <a:r>
+                        <a:rPr lang="pt-BR" sz="1600" dirty="0">
+                          <a:effectLst/>
+                          <a:latin typeface="Times New Roman" panose="02020603050405020304" pitchFamily="18" charset="0"/>
+                          <a:cs typeface="Times New Roman" panose="02020603050405020304" pitchFamily="18" charset="0"/>
+                        </a:rPr>
+                        <a:t>$</a:t>
+                      </a:r>
+                      <a:r>
+                        <a:rPr lang="pt-BR" sz="1600" dirty="0" err="1">
+                          <a:effectLst/>
+                          <a:latin typeface="Times New Roman" panose="02020603050405020304" pitchFamily="18" charset="0"/>
+                          <a:cs typeface="Times New Roman" panose="02020603050405020304" pitchFamily="18" charset="0"/>
+                        </a:rPr>
+                        <a:t>variavel</a:t>
+                      </a:r>
+                      <a:endParaRPr lang="pt-BR" sz="1600" dirty="0">
+                        <a:effectLst/>
+                        <a:latin typeface="Times New Roman" panose="02020603050405020304" pitchFamily="18" charset="0"/>
+                        <a:cs typeface="Times New Roman" panose="02020603050405020304" pitchFamily="18" charset="0"/>
+                      </a:endParaRPr>
+                    </a:p>
+                  </a:txBody>
+                  <a:tcPr anchor="ctr">
+                    <a:lnL w="12700" cap="flat" cmpd="sng" algn="ctr">
+                      <a:solidFill>
+                        <a:schemeClr val="tx1"/>
+                      </a:solidFill>
+                      <a:prstDash val="solid"/>
+                      <a:round/>
+                      <a:headEnd type="none" w="med" len="med"/>
+                      <a:tailEnd type="none" w="med" len="med"/>
+                    </a:lnL>
+                    <a:lnR w="12700" cap="flat" cmpd="sng" algn="ctr">
+                      <a:solidFill>
+                        <a:schemeClr val="tx1"/>
+                      </a:solidFill>
+                      <a:prstDash val="solid"/>
+                      <a:round/>
+                      <a:headEnd type="none" w="med" len="med"/>
+                      <a:tailEnd type="none" w="med" len="med"/>
+                    </a:lnR>
+                    <a:lnT w="12700" cap="flat" cmpd="sng" algn="ctr">
+                      <a:solidFill>
+                        <a:schemeClr val="tx1"/>
+                      </a:solidFill>
+                      <a:prstDash val="solid"/>
+                      <a:round/>
+                      <a:headEnd type="none" w="med" len="med"/>
+                      <a:tailEnd type="none" w="med" len="med"/>
+                    </a:lnT>
+                    <a:lnB w="12700" cap="flat" cmpd="sng" algn="ctr">
+                      <a:solidFill>
+                        <a:schemeClr val="tx1"/>
+                      </a:solidFill>
+                      <a:prstDash val="solid"/>
+                      <a:round/>
+                      <a:headEnd type="none" w="med" len="med"/>
+                      <a:tailEnd type="none" w="med" len="med"/>
+                    </a:lnB>
+                    <a:noFill/>
+                  </a:tcPr>
+                </a:tc>
+                <a:tc>
+                  <a:txBody>
+                    <a:bodyPr/>
+                    <a:lstStyle/>
+                    <a:p>
+                      <a:pPr algn="ctr">
+                        <a:buNone/>
+                      </a:pPr>
+                      <a:r>
+                        <a:rPr lang="pt-BR" sz="1600">
+                          <a:effectLst/>
+                          <a:latin typeface="Times New Roman" panose="02020603050405020304" pitchFamily="18" charset="0"/>
+                          <a:cs typeface="Times New Roman" panose="02020603050405020304" pitchFamily="18" charset="0"/>
+                        </a:rPr>
+                        <a:t>print('$nome')</a:t>
+                      </a:r>
+                    </a:p>
+                  </a:txBody>
+                  <a:tcPr anchor="ctr">
+                    <a:lnL w="12700" cap="flat" cmpd="sng" algn="ctr">
+                      <a:solidFill>
+                        <a:schemeClr val="tx1"/>
+                      </a:solidFill>
+                      <a:prstDash val="solid"/>
+                      <a:round/>
+                      <a:headEnd type="none" w="med" len="med"/>
+                      <a:tailEnd type="none" w="med" len="med"/>
+                    </a:lnL>
+                    <a:lnR w="12700" cap="flat" cmpd="sng" algn="ctr">
+                      <a:solidFill>
+                        <a:schemeClr val="tx1"/>
+                      </a:solidFill>
+                      <a:prstDash val="solid"/>
+                      <a:round/>
+                      <a:headEnd type="none" w="med" len="med"/>
+                      <a:tailEnd type="none" w="med" len="med"/>
+                    </a:lnR>
+                    <a:lnT w="12700" cap="flat" cmpd="sng" algn="ctr">
+                      <a:solidFill>
+                        <a:schemeClr val="tx1"/>
+                      </a:solidFill>
+                      <a:prstDash val="solid"/>
+                      <a:round/>
+                      <a:headEnd type="none" w="med" len="med"/>
+                      <a:tailEnd type="none" w="med" len="med"/>
+                    </a:lnT>
+                    <a:lnB w="12700" cap="flat" cmpd="sng" algn="ctr">
+                      <a:solidFill>
+                        <a:schemeClr val="tx1"/>
+                      </a:solidFill>
+                      <a:prstDash val="solid"/>
+                      <a:round/>
+                      <a:headEnd type="none" w="med" len="med"/>
+                      <a:tailEnd type="none" w="med" len="med"/>
+                    </a:lnB>
+                    <a:noFill/>
+                  </a:tcPr>
+                </a:tc>
+                <a:extLst>
+                  <a:ext uri="{0D108BD9-81ED-4DB2-BD59-A6C34878D82A}">
+                    <a16:rowId xmlns:a16="http://schemas.microsoft.com/office/drawing/2014/main" val="2562235445"/>
+                  </a:ext>
+                </a:extLst>
+              </a:tr>
+              <a:tr h="480000">
+                <a:tc>
+                  <a:txBody>
+                    <a:bodyPr/>
+                    <a:lstStyle/>
+                    <a:p>
+                      <a:pPr algn="ctr">
+                        <a:buNone/>
+                      </a:pPr>
+                      <a:r>
+                        <a:rPr lang="pt-BR" sz="1600">
+                          <a:effectLst/>
+                          <a:latin typeface="Times New Roman" panose="02020603050405020304" pitchFamily="18" charset="0"/>
+                          <a:cs typeface="Times New Roman" panose="02020603050405020304" pitchFamily="18" charset="0"/>
+                        </a:rPr>
+                        <a:t>Interpolação com expressão</a:t>
+                      </a:r>
+                    </a:p>
+                  </a:txBody>
+                  <a:tcPr anchor="ctr">
+                    <a:lnL w="12700" cap="flat" cmpd="sng" algn="ctr">
+                      <a:solidFill>
+                        <a:schemeClr val="tx1"/>
+                      </a:solidFill>
+                      <a:prstDash val="solid"/>
+                      <a:round/>
+                      <a:headEnd type="none" w="med" len="med"/>
+                      <a:tailEnd type="none" w="med" len="med"/>
+                    </a:lnL>
+                    <a:lnR w="12700" cap="flat" cmpd="sng" algn="ctr">
+                      <a:solidFill>
+                        <a:schemeClr val="tx1"/>
+                      </a:solidFill>
+                      <a:prstDash val="solid"/>
+                      <a:round/>
+                      <a:headEnd type="none" w="med" len="med"/>
+                      <a:tailEnd type="none" w="med" len="med"/>
+                    </a:lnR>
+                    <a:lnT w="12700" cap="flat" cmpd="sng" algn="ctr">
+                      <a:solidFill>
+                        <a:schemeClr val="tx1"/>
+                      </a:solidFill>
+                      <a:prstDash val="solid"/>
+                      <a:round/>
+                      <a:headEnd type="none" w="med" len="med"/>
+                      <a:tailEnd type="none" w="med" len="med"/>
+                    </a:lnT>
+                    <a:lnB w="12700" cap="flat" cmpd="sng" algn="ctr">
+                      <a:solidFill>
+                        <a:schemeClr val="tx1"/>
+                      </a:solidFill>
+                      <a:prstDash val="solid"/>
+                      <a:round/>
+                      <a:headEnd type="none" w="med" len="med"/>
+                      <a:tailEnd type="none" w="med" len="med"/>
+                    </a:lnB>
+                    <a:noFill/>
+                  </a:tcPr>
+                </a:tc>
+                <a:tc>
+                  <a:txBody>
+                    <a:bodyPr/>
+                    <a:lstStyle/>
+                    <a:p>
+                      <a:pPr algn="ctr">
+                        <a:buNone/>
+                      </a:pPr>
+                      <a:r>
+                        <a:rPr lang="pt-BR" sz="1600">
+                          <a:effectLst/>
+                          <a:latin typeface="Times New Roman" panose="02020603050405020304" pitchFamily="18" charset="0"/>
+                          <a:cs typeface="Times New Roman" panose="02020603050405020304" pitchFamily="18" charset="0"/>
+                        </a:rPr>
+                        <a:t>${expressao}</a:t>
+                      </a:r>
+                    </a:p>
+                  </a:txBody>
+                  <a:tcPr anchor="ctr">
+                    <a:lnL w="12700" cap="flat" cmpd="sng" algn="ctr">
+                      <a:solidFill>
+                        <a:schemeClr val="tx1"/>
+                      </a:solidFill>
+                      <a:prstDash val="solid"/>
+                      <a:round/>
+                      <a:headEnd type="none" w="med" len="med"/>
+                      <a:tailEnd type="none" w="med" len="med"/>
+                    </a:lnL>
+                    <a:lnR w="12700" cap="flat" cmpd="sng" algn="ctr">
+                      <a:solidFill>
+                        <a:schemeClr val="tx1"/>
+                      </a:solidFill>
+                      <a:prstDash val="solid"/>
+                      <a:round/>
+                      <a:headEnd type="none" w="med" len="med"/>
+                      <a:tailEnd type="none" w="med" len="med"/>
+                    </a:lnR>
+                    <a:lnT w="12700" cap="flat" cmpd="sng" algn="ctr">
+                      <a:solidFill>
+                        <a:schemeClr val="tx1"/>
+                      </a:solidFill>
+                      <a:prstDash val="solid"/>
+                      <a:round/>
+                      <a:headEnd type="none" w="med" len="med"/>
+                      <a:tailEnd type="none" w="med" len="med"/>
+                    </a:lnT>
+                    <a:lnB w="12700" cap="flat" cmpd="sng" algn="ctr">
+                      <a:solidFill>
+                        <a:schemeClr val="tx1"/>
+                      </a:solidFill>
+                      <a:prstDash val="solid"/>
+                      <a:round/>
+                      <a:headEnd type="none" w="med" len="med"/>
+                      <a:tailEnd type="none" w="med" len="med"/>
+                    </a:lnB>
+                    <a:noFill/>
+                  </a:tcPr>
+                </a:tc>
+                <a:tc>
+                  <a:txBody>
+                    <a:bodyPr/>
+                    <a:lstStyle/>
+                    <a:p>
+                      <a:pPr algn="ctr">
+                        <a:buNone/>
+                      </a:pPr>
+                      <a:r>
+                        <a:rPr lang="pt-BR" sz="1600" dirty="0">
+                          <a:effectLst/>
+                          <a:latin typeface="Times New Roman" panose="02020603050405020304" pitchFamily="18" charset="0"/>
+                          <a:cs typeface="Times New Roman" panose="02020603050405020304" pitchFamily="18" charset="0"/>
+                        </a:rPr>
+                        <a:t>print('${a + b}')</a:t>
+                      </a:r>
+                    </a:p>
+                  </a:txBody>
+                  <a:tcPr anchor="ctr">
+                    <a:lnL w="12700" cap="flat" cmpd="sng" algn="ctr">
+                      <a:solidFill>
+                        <a:schemeClr val="tx1"/>
+                      </a:solidFill>
+                      <a:prstDash val="solid"/>
+                      <a:round/>
+                      <a:headEnd type="none" w="med" len="med"/>
+                      <a:tailEnd type="none" w="med" len="med"/>
+                    </a:lnL>
+                    <a:lnR w="12700" cap="flat" cmpd="sng" algn="ctr">
+                      <a:solidFill>
+                        <a:schemeClr val="tx1"/>
+                      </a:solidFill>
+                      <a:prstDash val="solid"/>
+                      <a:round/>
+                      <a:headEnd type="none" w="med" len="med"/>
+                      <a:tailEnd type="none" w="med" len="med"/>
+                    </a:lnR>
+                    <a:lnT w="12700" cap="flat" cmpd="sng" algn="ctr">
+                      <a:solidFill>
+                        <a:schemeClr val="tx1"/>
+                      </a:solidFill>
+                      <a:prstDash val="solid"/>
+                      <a:round/>
+                      <a:headEnd type="none" w="med" len="med"/>
+                      <a:tailEnd type="none" w="med" len="med"/>
+                    </a:lnT>
+                    <a:lnB w="12700" cap="flat" cmpd="sng" algn="ctr">
+                      <a:solidFill>
+                        <a:schemeClr val="tx1"/>
+                      </a:solidFill>
+                      <a:prstDash val="solid"/>
+                      <a:round/>
+                      <a:headEnd type="none" w="med" len="med"/>
+                      <a:tailEnd type="none" w="med" len="med"/>
+                    </a:lnB>
+                    <a:noFill/>
+                  </a:tcPr>
+                </a:tc>
+                <a:extLst>
+                  <a:ext uri="{0D108BD9-81ED-4DB2-BD59-A6C34878D82A}">
+                    <a16:rowId xmlns:a16="http://schemas.microsoft.com/office/drawing/2014/main" val="836628391"/>
+                  </a:ext>
+                </a:extLst>
+              </a:tr>
+              <a:tr h="480000">
+                <a:tc>
+                  <a:txBody>
+                    <a:bodyPr/>
+                    <a:lstStyle/>
+                    <a:p>
+                      <a:pPr algn="ctr">
+                        <a:buNone/>
+                      </a:pPr>
+                      <a:r>
+                        <a:rPr lang="pt-BR" sz="1600">
+                          <a:effectLst/>
+                          <a:latin typeface="Times New Roman" panose="02020603050405020304" pitchFamily="18" charset="0"/>
+                          <a:cs typeface="Times New Roman" panose="02020603050405020304" pitchFamily="18" charset="0"/>
+                        </a:rPr>
+                        <a:t>Concatenação</a:t>
+                      </a:r>
+                    </a:p>
+                  </a:txBody>
+                  <a:tcPr anchor="ctr">
+                    <a:lnL w="12700" cap="flat" cmpd="sng" algn="ctr">
+                      <a:solidFill>
+                        <a:schemeClr val="tx1"/>
+                      </a:solidFill>
+                      <a:prstDash val="solid"/>
+                      <a:round/>
+                      <a:headEnd type="none" w="med" len="med"/>
+                      <a:tailEnd type="none" w="med" len="med"/>
+                    </a:lnL>
+                    <a:lnR w="12700" cap="flat" cmpd="sng" algn="ctr">
+                      <a:solidFill>
+                        <a:schemeClr val="tx1"/>
+                      </a:solidFill>
+                      <a:prstDash val="solid"/>
+                      <a:round/>
+                      <a:headEnd type="none" w="med" len="med"/>
+                      <a:tailEnd type="none" w="med" len="med"/>
+                    </a:lnR>
+                    <a:lnT w="12700" cap="flat" cmpd="sng" algn="ctr">
+                      <a:solidFill>
+                        <a:schemeClr val="tx1"/>
+                      </a:solidFill>
+                      <a:prstDash val="solid"/>
+                      <a:round/>
+                      <a:headEnd type="none" w="med" len="med"/>
+                      <a:tailEnd type="none" w="med" len="med"/>
+                    </a:lnT>
+                    <a:lnB w="12700" cap="flat" cmpd="sng" algn="ctr">
+                      <a:solidFill>
+                        <a:schemeClr val="tx1"/>
+                      </a:solidFill>
+                      <a:prstDash val="solid"/>
+                      <a:round/>
+                      <a:headEnd type="none" w="med" len="med"/>
+                      <a:tailEnd type="none" w="med" len="med"/>
+                    </a:lnB>
+                    <a:noFill/>
+                  </a:tcPr>
+                </a:tc>
+                <a:tc>
+                  <a:txBody>
+                    <a:bodyPr/>
+                    <a:lstStyle/>
+                    <a:p>
+                      <a:pPr algn="ctr">
+                        <a:buNone/>
+                      </a:pPr>
+                      <a:r>
+                        <a:rPr lang="pt-BR" sz="1600">
+                          <a:effectLst/>
+                          <a:latin typeface="Times New Roman" panose="02020603050405020304" pitchFamily="18" charset="0"/>
+                          <a:cs typeface="Times New Roman" panose="02020603050405020304" pitchFamily="18" charset="0"/>
+                        </a:rPr>
+                        <a:t>+</a:t>
+                      </a:r>
+                    </a:p>
+                  </a:txBody>
+                  <a:tcPr anchor="ctr">
+                    <a:lnL w="12700" cap="flat" cmpd="sng" algn="ctr">
+                      <a:solidFill>
+                        <a:schemeClr val="tx1"/>
+                      </a:solidFill>
+                      <a:prstDash val="solid"/>
+                      <a:round/>
+                      <a:headEnd type="none" w="med" len="med"/>
+                      <a:tailEnd type="none" w="med" len="med"/>
+                    </a:lnL>
+                    <a:lnR w="12700" cap="flat" cmpd="sng" algn="ctr">
+                      <a:solidFill>
+                        <a:schemeClr val="tx1"/>
+                      </a:solidFill>
+                      <a:prstDash val="solid"/>
+                      <a:round/>
+                      <a:headEnd type="none" w="med" len="med"/>
+                      <a:tailEnd type="none" w="med" len="med"/>
+                    </a:lnR>
+                    <a:lnT w="12700" cap="flat" cmpd="sng" algn="ctr">
+                      <a:solidFill>
+                        <a:schemeClr val="tx1"/>
+                      </a:solidFill>
+                      <a:prstDash val="solid"/>
+                      <a:round/>
+                      <a:headEnd type="none" w="med" len="med"/>
+                      <a:tailEnd type="none" w="med" len="med"/>
+                    </a:lnT>
+                    <a:lnB w="12700" cap="flat" cmpd="sng" algn="ctr">
+                      <a:solidFill>
+                        <a:schemeClr val="tx1"/>
+                      </a:solidFill>
+                      <a:prstDash val="solid"/>
+                      <a:round/>
+                      <a:headEnd type="none" w="med" len="med"/>
+                      <a:tailEnd type="none" w="med" len="med"/>
+                    </a:lnB>
+                    <a:noFill/>
+                  </a:tcPr>
+                </a:tc>
+                <a:tc>
+                  <a:txBody>
+                    <a:bodyPr/>
+                    <a:lstStyle/>
+                    <a:p>
+                      <a:pPr algn="ctr">
+                        <a:buNone/>
+                      </a:pPr>
+                      <a:r>
+                        <a:rPr lang="pt-BR" sz="1600" dirty="0">
+                          <a:effectLst/>
+                          <a:latin typeface="Times New Roman" panose="02020603050405020304" pitchFamily="18" charset="0"/>
+                          <a:cs typeface="Times New Roman" panose="02020603050405020304" pitchFamily="18" charset="0"/>
+                        </a:rPr>
+                        <a:t>print('Nome: ' + nome)</a:t>
+                      </a:r>
+                    </a:p>
+                  </a:txBody>
+                  <a:tcPr anchor="ctr">
+                    <a:lnL w="12700" cap="flat" cmpd="sng" algn="ctr">
+                      <a:solidFill>
+                        <a:schemeClr val="tx1"/>
+                      </a:solidFill>
+                      <a:prstDash val="solid"/>
+                      <a:round/>
+                      <a:headEnd type="none" w="med" len="med"/>
+                      <a:tailEnd type="none" w="med" len="med"/>
+                    </a:lnL>
+                    <a:lnR w="12700" cap="flat" cmpd="sng" algn="ctr">
+                      <a:solidFill>
+                        <a:schemeClr val="tx1"/>
+                      </a:solidFill>
+                      <a:prstDash val="solid"/>
+                      <a:round/>
+                      <a:headEnd type="none" w="med" len="med"/>
+                      <a:tailEnd type="none" w="med" len="med"/>
+                    </a:lnR>
+                    <a:lnT w="12700" cap="flat" cmpd="sng" algn="ctr">
+                      <a:solidFill>
+                        <a:schemeClr val="tx1"/>
+                      </a:solidFill>
+                      <a:prstDash val="solid"/>
+                      <a:round/>
+                      <a:headEnd type="none" w="med" len="med"/>
+                      <a:tailEnd type="none" w="med" len="med"/>
+                    </a:lnT>
+                    <a:lnB w="12700" cap="flat" cmpd="sng" algn="ctr">
+                      <a:solidFill>
+                        <a:schemeClr val="tx1"/>
+                      </a:solidFill>
+                      <a:prstDash val="solid"/>
+                      <a:round/>
+                      <a:headEnd type="none" w="med" len="med"/>
+                      <a:tailEnd type="none" w="med" len="med"/>
+                    </a:lnB>
+                    <a:noFill/>
+                  </a:tcPr>
+                </a:tc>
+                <a:extLst>
+                  <a:ext uri="{0D108BD9-81ED-4DB2-BD59-A6C34878D82A}">
+                    <a16:rowId xmlns:a16="http://schemas.microsoft.com/office/drawing/2014/main" val="1367642329"/>
+                  </a:ext>
+                </a:extLst>
+              </a:tr>
+              <a:tr h="480000">
+                <a:tc>
+                  <a:txBody>
+                    <a:bodyPr/>
+                    <a:lstStyle/>
+                    <a:p>
+                      <a:pPr algn="ctr">
+                        <a:buNone/>
+                      </a:pPr>
+                      <a:r>
+                        <a:rPr lang="pt-BR" sz="1600">
+                          <a:effectLst/>
+                          <a:latin typeface="Times New Roman" panose="02020603050405020304" pitchFamily="18" charset="0"/>
+                          <a:cs typeface="Times New Roman" panose="02020603050405020304" pitchFamily="18" charset="0"/>
+                        </a:rPr>
+                        <a:t>Multi-linha</a:t>
+                      </a:r>
+                    </a:p>
+                  </a:txBody>
+                  <a:tcPr anchor="ctr">
+                    <a:lnL w="12700" cap="flat" cmpd="sng" algn="ctr">
+                      <a:solidFill>
+                        <a:schemeClr val="tx1"/>
+                      </a:solidFill>
+                      <a:prstDash val="solid"/>
+                      <a:round/>
+                      <a:headEnd type="none" w="med" len="med"/>
+                      <a:tailEnd type="none" w="med" len="med"/>
+                    </a:lnL>
+                    <a:lnR w="12700" cap="flat" cmpd="sng" algn="ctr">
+                      <a:solidFill>
+                        <a:schemeClr val="tx1"/>
+                      </a:solidFill>
+                      <a:prstDash val="solid"/>
+                      <a:round/>
+                      <a:headEnd type="none" w="med" len="med"/>
+                      <a:tailEnd type="none" w="med" len="med"/>
+                    </a:lnR>
+                    <a:lnT w="12700" cap="flat" cmpd="sng" algn="ctr">
+                      <a:solidFill>
+                        <a:schemeClr val="tx1"/>
+                      </a:solidFill>
+                      <a:prstDash val="solid"/>
+                      <a:round/>
+                      <a:headEnd type="none" w="med" len="med"/>
+                      <a:tailEnd type="none" w="med" len="med"/>
+                    </a:lnT>
+                    <a:lnB w="12700" cap="flat" cmpd="sng" algn="ctr">
+                      <a:solidFill>
+                        <a:schemeClr val="tx1"/>
+                      </a:solidFill>
+                      <a:prstDash val="solid"/>
+                      <a:round/>
+                      <a:headEnd type="none" w="med" len="med"/>
+                      <a:tailEnd type="none" w="med" len="med"/>
+                    </a:lnB>
+                    <a:noFill/>
+                  </a:tcPr>
+                </a:tc>
+                <a:tc>
+                  <a:txBody>
+                    <a:bodyPr/>
+                    <a:lstStyle/>
+                    <a:p>
+                      <a:pPr algn="ctr">
+                        <a:buNone/>
+                      </a:pPr>
+                      <a:r>
+                        <a:rPr lang="pt-BR" sz="1600">
+                          <a:effectLst/>
+                          <a:latin typeface="Times New Roman" panose="02020603050405020304" pitchFamily="18" charset="0"/>
+                          <a:cs typeface="Times New Roman" panose="02020603050405020304" pitchFamily="18" charset="0"/>
+                        </a:rPr>
+                        <a:t>'''texto'''</a:t>
+                      </a:r>
+                    </a:p>
+                  </a:txBody>
+                  <a:tcPr anchor="ctr">
+                    <a:lnL w="12700" cap="flat" cmpd="sng" algn="ctr">
+                      <a:solidFill>
+                        <a:schemeClr val="tx1"/>
+                      </a:solidFill>
+                      <a:prstDash val="solid"/>
+                      <a:round/>
+                      <a:headEnd type="none" w="med" len="med"/>
+                      <a:tailEnd type="none" w="med" len="med"/>
+                    </a:lnL>
+                    <a:lnR w="12700" cap="flat" cmpd="sng" algn="ctr">
+                      <a:solidFill>
+                        <a:schemeClr val="tx1"/>
+                      </a:solidFill>
+                      <a:prstDash val="solid"/>
+                      <a:round/>
+                      <a:headEnd type="none" w="med" len="med"/>
+                      <a:tailEnd type="none" w="med" len="med"/>
+                    </a:lnR>
+                    <a:lnT w="12700" cap="flat" cmpd="sng" algn="ctr">
+                      <a:solidFill>
+                        <a:schemeClr val="tx1"/>
+                      </a:solidFill>
+                      <a:prstDash val="solid"/>
+                      <a:round/>
+                      <a:headEnd type="none" w="med" len="med"/>
+                      <a:tailEnd type="none" w="med" len="med"/>
+                    </a:lnT>
+                    <a:lnB w="12700" cap="flat" cmpd="sng" algn="ctr">
+                      <a:solidFill>
+                        <a:schemeClr val="tx1"/>
+                      </a:solidFill>
+                      <a:prstDash val="solid"/>
+                      <a:round/>
+                      <a:headEnd type="none" w="med" len="med"/>
+                      <a:tailEnd type="none" w="med" len="med"/>
+                    </a:lnB>
+                    <a:noFill/>
+                  </a:tcPr>
+                </a:tc>
+                <a:tc>
+                  <a:txBody>
+                    <a:bodyPr/>
+                    <a:lstStyle/>
+                    <a:p>
+                      <a:pPr algn="ctr">
+                        <a:buNone/>
+                      </a:pPr>
+                      <a:r>
+                        <a:rPr lang="pt-BR" sz="1600" dirty="0">
+                          <a:effectLst/>
+                          <a:latin typeface="Times New Roman" panose="02020603050405020304" pitchFamily="18" charset="0"/>
+                          <a:cs typeface="Times New Roman" panose="02020603050405020304" pitchFamily="18" charset="0"/>
+                        </a:rPr>
+                        <a:t>print('''linha1\nlinha2''')</a:t>
+                      </a:r>
+                    </a:p>
+                  </a:txBody>
+                  <a:tcPr anchor="ctr">
+                    <a:lnL w="12700" cap="flat" cmpd="sng" algn="ctr">
+                      <a:solidFill>
+                        <a:schemeClr val="tx1"/>
+                      </a:solidFill>
+                      <a:prstDash val="solid"/>
+                      <a:round/>
+                      <a:headEnd type="none" w="med" len="med"/>
+                      <a:tailEnd type="none" w="med" len="med"/>
+                    </a:lnL>
+                    <a:lnR w="12700" cap="flat" cmpd="sng" algn="ctr">
+                      <a:solidFill>
+                        <a:schemeClr val="tx1"/>
+                      </a:solidFill>
+                      <a:prstDash val="solid"/>
+                      <a:round/>
+                      <a:headEnd type="none" w="med" len="med"/>
+                      <a:tailEnd type="none" w="med" len="med"/>
+                    </a:lnR>
+                    <a:lnT w="12700" cap="flat" cmpd="sng" algn="ctr">
+                      <a:solidFill>
+                        <a:schemeClr val="tx1"/>
+                      </a:solidFill>
+                      <a:prstDash val="solid"/>
+                      <a:round/>
+                      <a:headEnd type="none" w="med" len="med"/>
+                      <a:tailEnd type="none" w="med" len="med"/>
+                    </a:lnT>
+                    <a:lnB w="12700" cap="flat" cmpd="sng" algn="ctr">
+                      <a:solidFill>
+                        <a:schemeClr val="tx1"/>
+                      </a:solidFill>
+                      <a:prstDash val="solid"/>
+                      <a:round/>
+                      <a:headEnd type="none" w="med" len="med"/>
+                      <a:tailEnd type="none" w="med" len="med"/>
+                    </a:lnB>
+                    <a:noFill/>
+                  </a:tcPr>
+                </a:tc>
+                <a:extLst>
+                  <a:ext uri="{0D108BD9-81ED-4DB2-BD59-A6C34878D82A}">
+                    <a16:rowId xmlns:a16="http://schemas.microsoft.com/office/drawing/2014/main" val="4263569281"/>
+                  </a:ext>
+                </a:extLst>
+              </a:tr>
+            </a:tbl>
+          </a:graphicData>
+        </a:graphic>
+      </p:graphicFrame>
+    </p:spTree>
+    <p:extLst>
+      <p:ext uri="{BB962C8B-B14F-4D97-AF65-F5344CB8AC3E}">
+        <p14:creationId xmlns:p14="http://schemas.microsoft.com/office/powerpoint/2010/main" val="3459745045"/>
+      </p:ext>
+    </p:extLst>
+  </p:cSld>
+  <p:clrMapOvr>
+    <a:masterClrMapping/>
+  </p:clrMapOvr>
+</p:sld>
+</file>
+
+<file path=ppt/slides/slide23.xml><?xml version="1.0" encoding="utf-8"?>
+<p:sld xmlns:a="http://schemas.openxmlformats.org/drawingml/2006/main" xmlns:r="http://schemas.openxmlformats.org/officeDocument/2006/relationships" xmlns:p="http://schemas.openxmlformats.org/presentationml/2006/main">
+  <p:cSld>
+    <p:spTree>
+      <p:nvGrpSpPr>
+        <p:cNvPr id="1" name=""/>
+        <p:cNvGrpSpPr/>
+        <p:nvPr/>
+      </p:nvGrpSpPr>
+      <p:grpSpPr>
+        <a:xfrm>
+          <a:off x="0" y="0"/>
+          <a:ext cx="0" cy="0"/>
+          <a:chOff x="0" y="0"/>
+          <a:chExt cx="0" cy="0"/>
+        </a:xfrm>
+      </p:grpSpPr>
+      <p:sp>
+        <p:nvSpPr>
+          <p:cNvPr id="2" name="Título 1">
+            <a:extLst>
+              <a:ext uri="{FF2B5EF4-FFF2-40B4-BE49-F238E27FC236}">
                 <a16:creationId xmlns:a16="http://schemas.microsoft.com/office/drawing/2014/main" id="{8A31D5AB-F0C9-D5F4-79A9-9ACD670242A0}"/>
               </a:ext>
             </a:extLst>
@@ -9589,7 +10880,7 @@
 </p:sld>
 </file>
 
-<file path=ppt/slides/slide23.xml><?xml version="1.0" encoding="utf-8"?>
+<file path=ppt/slides/slide24.xml><?xml version="1.0" encoding="utf-8"?>
 <p:sld xmlns:a="http://schemas.openxmlformats.org/drawingml/2006/main" xmlns:r="http://schemas.openxmlformats.org/officeDocument/2006/relationships" xmlns:p="http://schemas.openxmlformats.org/presentationml/2006/main">
   <p:cSld>
     <p:spTree>
@@ -9628,10 +10919,9 @@
           <a:lstStyle/>
           <a:p>
             <a:r>
-              <a:rPr lang="pt-BR" b="1" dirty="0"/>
+              <a:rPr lang="pt-BR" dirty="0"/>
               <a:t>O que são ! e ? no Dart</a:t>
             </a:r>
-            <a:endParaRPr lang="pt-BR" dirty="0"/>
           </a:p>
         </p:txBody>
       </p:sp>
@@ -9837,7 +11127,4044 @@
 </p:sld>
 </file>
 
-<file path=ppt/slides/slide24.xml><?xml version="1.0" encoding="utf-8"?>
+<file path=ppt/slides/slide25.xml><?xml version="1.0" encoding="utf-8"?>
+<p:sld xmlns:a="http://schemas.openxmlformats.org/drawingml/2006/main" xmlns:r="http://schemas.openxmlformats.org/officeDocument/2006/relationships" xmlns:p="http://schemas.openxmlformats.org/presentationml/2006/main">
+  <p:cSld>
+    <p:spTree>
+      <p:nvGrpSpPr>
+        <p:cNvPr id="1" name=""/>
+        <p:cNvGrpSpPr/>
+        <p:nvPr/>
+      </p:nvGrpSpPr>
+      <p:grpSpPr>
+        <a:xfrm>
+          <a:off x="0" y="0"/>
+          <a:ext cx="0" cy="0"/>
+          <a:chOff x="0" y="0"/>
+          <a:chExt cx="0" cy="0"/>
+        </a:xfrm>
+      </p:grpSpPr>
+      <p:sp>
+        <p:nvSpPr>
+          <p:cNvPr id="2" name="Título 1">
+            <a:extLst>
+              <a:ext uri="{FF2B5EF4-FFF2-40B4-BE49-F238E27FC236}">
+                <a16:creationId xmlns:a16="http://schemas.microsoft.com/office/drawing/2014/main" id="{7A8C2D89-607A-221C-4A64-EDEFF77DE683}"/>
+              </a:ext>
+            </a:extLst>
+          </p:cNvPr>
+          <p:cNvSpPr>
+            <a:spLocks noGrp="1"/>
+          </p:cNvSpPr>
+          <p:nvPr>
+            <p:ph type="title"/>
+          </p:nvPr>
+        </p:nvSpPr>
+        <p:spPr/>
+        <p:txBody>
+          <a:bodyPr/>
+          <a:lstStyle/>
+          <a:p>
+            <a:r>
+              <a:rPr lang="pt-BR" dirty="0"/>
+              <a:t>O que são ! e ? no Dart</a:t>
+            </a:r>
+          </a:p>
+        </p:txBody>
+      </p:sp>
+      <p:sp>
+        <p:nvSpPr>
+          <p:cNvPr id="3" name="Espaço Reservado para Conteúdo 2">
+            <a:extLst>
+              <a:ext uri="{FF2B5EF4-FFF2-40B4-BE49-F238E27FC236}">
+                <a16:creationId xmlns:a16="http://schemas.microsoft.com/office/drawing/2014/main" id="{B668EF42-3595-9626-618B-33056BDC17CE}"/>
+              </a:ext>
+            </a:extLst>
+          </p:cNvPr>
+          <p:cNvSpPr>
+            <a:spLocks noGrp="1"/>
+          </p:cNvSpPr>
+          <p:nvPr>
+            <p:ph idx="1"/>
+          </p:nvPr>
+        </p:nvSpPr>
+        <p:spPr/>
+        <p:txBody>
+          <a:bodyPr/>
+          <a:lstStyle/>
+          <a:p>
+            <a:r>
+              <a:rPr lang="pt-BR" b="1" dirty="0"/>
+              <a:t>! — Operador de asserção não-nula</a:t>
+            </a:r>
+          </a:p>
+          <a:p>
+            <a:pPr marL="457200" lvl="1" indent="0">
+              <a:buNone/>
+            </a:pPr>
+            <a:r>
+              <a:rPr lang="pt-BR" dirty="0"/>
+              <a:t>Usado para </a:t>
+            </a:r>
+            <a:r>
+              <a:rPr lang="pt-BR" b="1" dirty="0"/>
+              <a:t>afirmar ao compilador</a:t>
+            </a:r>
+            <a:r>
+              <a:rPr lang="pt-BR" dirty="0"/>
+              <a:t> que, naquele momento, o valor </a:t>
+            </a:r>
+            <a:r>
+              <a:rPr lang="pt-BR" b="1" dirty="0"/>
+              <a:t>não é nulo</a:t>
+            </a:r>
+            <a:r>
+              <a:rPr lang="pt-BR" dirty="0"/>
+              <a:t>, mesmo que o tipo seja </a:t>
+            </a:r>
+            <a:r>
+              <a:rPr lang="pt-BR" dirty="0" err="1"/>
+              <a:t>String</a:t>
+            </a:r>
+            <a:r>
+              <a:rPr lang="pt-BR" dirty="0"/>
+              <a:t>?:</a:t>
+            </a:r>
+            <a:endParaRPr lang="pt-BR" b="1" dirty="0"/>
+          </a:p>
+          <a:p>
+            <a:pPr marL="914400" lvl="2" indent="0">
+              <a:buNone/>
+            </a:pPr>
+            <a:r>
+              <a:rPr lang="pt-BR" dirty="0" err="1"/>
+              <a:t>String</a:t>
+            </a:r>
+            <a:r>
+              <a:rPr lang="pt-BR" dirty="0"/>
+              <a:t>? entrada = </a:t>
+            </a:r>
+            <a:r>
+              <a:rPr lang="pt-BR" dirty="0" err="1"/>
+              <a:t>stdin.readLineSync</a:t>
+            </a:r>
+            <a:r>
+              <a:rPr lang="pt-BR" dirty="0"/>
+              <a:t>();</a:t>
+            </a:r>
+          </a:p>
+          <a:p>
+            <a:pPr marL="914400" lvl="2" indent="0">
+              <a:buNone/>
+            </a:pPr>
+            <a:r>
+              <a:rPr lang="pt-BR" dirty="0" err="1"/>
+              <a:t>int</a:t>
+            </a:r>
+            <a:r>
+              <a:rPr lang="pt-BR" dirty="0"/>
+              <a:t> numero = </a:t>
+            </a:r>
+            <a:r>
+              <a:rPr lang="pt-BR" dirty="0" err="1"/>
+              <a:t>int.parse</a:t>
+            </a:r>
+            <a:r>
+              <a:rPr lang="pt-BR" dirty="0"/>
+              <a:t>(entrada!); // "eu garanto que entrada não é </a:t>
+            </a:r>
+            <a:r>
+              <a:rPr lang="pt-BR" dirty="0" err="1"/>
+              <a:t>null</a:t>
+            </a:r>
+            <a:r>
+              <a:rPr lang="pt-BR" dirty="0"/>
+              <a:t>"</a:t>
+            </a:r>
+          </a:p>
+          <a:p>
+            <a:pPr>
+              <a:spcBef>
+                <a:spcPts val="0"/>
+              </a:spcBef>
+            </a:pPr>
+            <a:endParaRPr lang="pt-BR" b="1" dirty="0"/>
+          </a:p>
+        </p:txBody>
+      </p:sp>
+    </p:spTree>
+    <p:extLst>
+      <p:ext uri="{BB962C8B-B14F-4D97-AF65-F5344CB8AC3E}">
+        <p14:creationId xmlns:p14="http://schemas.microsoft.com/office/powerpoint/2010/main" val="1051314161"/>
+      </p:ext>
+    </p:extLst>
+  </p:cSld>
+  <p:clrMapOvr>
+    <a:masterClrMapping/>
+  </p:clrMapOvr>
+</p:sld>
+</file>
+
+<file path=ppt/slides/slide26.xml><?xml version="1.0" encoding="utf-8"?>
+<p:sld xmlns:a="http://schemas.openxmlformats.org/drawingml/2006/main" xmlns:r="http://schemas.openxmlformats.org/officeDocument/2006/relationships" xmlns:p="http://schemas.openxmlformats.org/presentationml/2006/main">
+  <p:cSld>
+    <p:spTree>
+      <p:nvGrpSpPr>
+        <p:cNvPr id="1" name=""/>
+        <p:cNvGrpSpPr/>
+        <p:nvPr/>
+      </p:nvGrpSpPr>
+      <p:grpSpPr>
+        <a:xfrm>
+          <a:off x="0" y="0"/>
+          <a:ext cx="0" cy="0"/>
+          <a:chOff x="0" y="0"/>
+          <a:chExt cx="0" cy="0"/>
+        </a:xfrm>
+      </p:grpSpPr>
+      <p:sp>
+        <p:nvSpPr>
+          <p:cNvPr id="2" name="Título 1">
+            <a:extLst>
+              <a:ext uri="{FF2B5EF4-FFF2-40B4-BE49-F238E27FC236}">
+                <a16:creationId xmlns:a16="http://schemas.microsoft.com/office/drawing/2014/main" id="{7DAA6A3D-DD7A-9DA5-BACF-BC5DEF3BD3CE}"/>
+              </a:ext>
+            </a:extLst>
+          </p:cNvPr>
+          <p:cNvSpPr>
+            <a:spLocks noGrp="1"/>
+          </p:cNvSpPr>
+          <p:nvPr>
+            <p:ph type="title"/>
+          </p:nvPr>
+        </p:nvSpPr>
+        <p:spPr/>
+        <p:txBody>
+          <a:bodyPr/>
+          <a:lstStyle/>
+          <a:p>
+            <a:r>
+              <a:rPr lang="pt-BR" b="1" dirty="0"/>
+              <a:t>Conversões de Tipos no Dart</a:t>
+            </a:r>
+            <a:endParaRPr lang="pt-BR" dirty="0"/>
+          </a:p>
+        </p:txBody>
+      </p:sp>
+      <p:sp>
+        <p:nvSpPr>
+          <p:cNvPr id="3" name="Espaço Reservado para Conteúdo 2">
+            <a:extLst>
+              <a:ext uri="{FF2B5EF4-FFF2-40B4-BE49-F238E27FC236}">
+                <a16:creationId xmlns:a16="http://schemas.microsoft.com/office/drawing/2014/main" id="{EC57B8E7-6997-B02E-1EEB-C174612F281D}"/>
+              </a:ext>
+            </a:extLst>
+          </p:cNvPr>
+          <p:cNvSpPr>
+            <a:spLocks noGrp="1"/>
+          </p:cNvSpPr>
+          <p:nvPr>
+            <p:ph idx="1"/>
+          </p:nvPr>
+        </p:nvSpPr>
+        <p:spPr/>
+        <p:txBody>
+          <a:bodyPr/>
+          <a:lstStyle/>
+          <a:p>
+            <a:r>
+              <a:rPr lang="pt-BR" dirty="0"/>
+              <a:t>No Dart, é comum precisar converter valores entre diferentes tipos de dados. Vamos ver as principais conversões.</a:t>
+            </a:r>
+          </a:p>
+          <a:p>
+            <a:r>
+              <a:rPr lang="pt-BR" b="1" dirty="0" err="1"/>
+              <a:t>String</a:t>
+            </a:r>
+            <a:r>
+              <a:rPr lang="pt-BR" b="1" dirty="0"/>
+              <a:t> → </a:t>
+            </a:r>
+            <a:r>
+              <a:rPr lang="pt-BR" b="1" dirty="0" err="1"/>
+              <a:t>int</a:t>
+            </a:r>
+            <a:endParaRPr lang="pt-BR" b="1" dirty="0"/>
+          </a:p>
+          <a:p>
+            <a:pPr marL="457200" lvl="1" indent="0">
+              <a:buNone/>
+            </a:pPr>
+            <a:r>
+              <a:rPr lang="pt-BR" dirty="0"/>
+              <a:t> </a:t>
+            </a:r>
+            <a:r>
+              <a:rPr lang="pt-BR" dirty="0" err="1"/>
+              <a:t>String</a:t>
+            </a:r>
+            <a:r>
+              <a:rPr lang="pt-BR" dirty="0"/>
+              <a:t> texto1 = '10';</a:t>
+            </a:r>
+          </a:p>
+          <a:p>
+            <a:pPr marL="457200" lvl="1" indent="0">
+              <a:buNone/>
+            </a:pPr>
+            <a:r>
+              <a:rPr lang="pt-BR" dirty="0"/>
+              <a:t> </a:t>
+            </a:r>
+            <a:r>
+              <a:rPr lang="pt-BR" dirty="0" err="1"/>
+              <a:t>int</a:t>
+            </a:r>
+            <a:r>
+              <a:rPr lang="pt-BR" dirty="0"/>
+              <a:t> numero1 = </a:t>
+            </a:r>
+            <a:r>
+              <a:rPr lang="pt-BR" dirty="0" err="1"/>
+              <a:t>int.parse</a:t>
+            </a:r>
+            <a:r>
+              <a:rPr lang="pt-BR" dirty="0"/>
+              <a:t>(texto1);</a:t>
+            </a:r>
+          </a:p>
+          <a:p>
+            <a:pPr marL="457200" lvl="1" indent="0">
+              <a:buNone/>
+            </a:pPr>
+            <a:r>
+              <a:rPr lang="pt-BR" dirty="0"/>
+              <a:t> print('</a:t>
+            </a:r>
+            <a:r>
+              <a:rPr lang="pt-BR" dirty="0" err="1"/>
+              <a:t>String</a:t>
+            </a:r>
+            <a:r>
+              <a:rPr lang="pt-BR" dirty="0"/>
+              <a:t> → </a:t>
+            </a:r>
+            <a:r>
+              <a:rPr lang="pt-BR" dirty="0" err="1"/>
+              <a:t>int</a:t>
+            </a:r>
+            <a:r>
+              <a:rPr lang="pt-BR" dirty="0"/>
+              <a:t>: $numero1');</a:t>
+            </a:r>
+          </a:p>
+          <a:p>
+            <a:r>
+              <a:rPr lang="pt-BR" b="1" dirty="0" err="1"/>
+              <a:t>String</a:t>
+            </a:r>
+            <a:r>
+              <a:rPr lang="pt-BR" b="1" dirty="0"/>
+              <a:t> → </a:t>
+            </a:r>
+            <a:r>
+              <a:rPr lang="pt-BR" b="1" dirty="0" err="1"/>
+              <a:t>double</a:t>
+            </a:r>
+            <a:endParaRPr lang="pt-BR" b="1" dirty="0"/>
+          </a:p>
+          <a:p>
+            <a:pPr marL="457200" lvl="1" indent="0">
+              <a:buNone/>
+            </a:pPr>
+            <a:r>
+              <a:rPr lang="pt-BR" dirty="0"/>
+              <a:t> </a:t>
+            </a:r>
+            <a:r>
+              <a:rPr lang="pt-BR" dirty="0" err="1"/>
+              <a:t>String</a:t>
+            </a:r>
+            <a:r>
+              <a:rPr lang="pt-BR" dirty="0"/>
+              <a:t> texto2 = '10.5';</a:t>
+            </a:r>
+          </a:p>
+          <a:p>
+            <a:pPr marL="457200" lvl="1" indent="0">
+              <a:buNone/>
+            </a:pPr>
+            <a:r>
+              <a:rPr lang="pt-BR" dirty="0"/>
+              <a:t> </a:t>
+            </a:r>
+            <a:r>
+              <a:rPr lang="pt-BR" dirty="0" err="1"/>
+              <a:t>double</a:t>
+            </a:r>
+            <a:r>
+              <a:rPr lang="pt-BR" dirty="0"/>
+              <a:t> numero2 = </a:t>
+            </a:r>
+            <a:r>
+              <a:rPr lang="pt-BR" dirty="0" err="1"/>
+              <a:t>double.parse</a:t>
+            </a:r>
+            <a:r>
+              <a:rPr lang="pt-BR" dirty="0"/>
+              <a:t>(texto2);</a:t>
+            </a:r>
+          </a:p>
+          <a:p>
+            <a:pPr marL="457200" lvl="1" indent="0">
+              <a:buNone/>
+            </a:pPr>
+            <a:r>
+              <a:rPr lang="pt-BR" dirty="0"/>
+              <a:t> print('</a:t>
+            </a:r>
+            <a:r>
+              <a:rPr lang="pt-BR" dirty="0" err="1"/>
+              <a:t>String</a:t>
+            </a:r>
+            <a:r>
+              <a:rPr lang="pt-BR" dirty="0"/>
+              <a:t> → </a:t>
+            </a:r>
+            <a:r>
+              <a:rPr lang="pt-BR" dirty="0" err="1"/>
+              <a:t>double</a:t>
+            </a:r>
+            <a:r>
+              <a:rPr lang="pt-BR" dirty="0"/>
+              <a:t>: $numero2');</a:t>
+            </a:r>
+          </a:p>
+          <a:p>
+            <a:endParaRPr lang="pt-BR" b="1" dirty="0"/>
+          </a:p>
+          <a:p>
+            <a:endParaRPr lang="pt-BR" dirty="0"/>
+          </a:p>
+          <a:p>
+            <a:endParaRPr lang="pt-BR" dirty="0"/>
+          </a:p>
+        </p:txBody>
+      </p:sp>
+    </p:spTree>
+    <p:extLst>
+      <p:ext uri="{BB962C8B-B14F-4D97-AF65-F5344CB8AC3E}">
+        <p14:creationId xmlns:p14="http://schemas.microsoft.com/office/powerpoint/2010/main" val="3024374470"/>
+      </p:ext>
+    </p:extLst>
+  </p:cSld>
+  <p:clrMapOvr>
+    <a:masterClrMapping/>
+  </p:clrMapOvr>
+</p:sld>
+</file>
+
+<file path=ppt/slides/slide27.xml><?xml version="1.0" encoding="utf-8"?>
+<p:sld xmlns:a="http://schemas.openxmlformats.org/drawingml/2006/main" xmlns:r="http://schemas.openxmlformats.org/officeDocument/2006/relationships" xmlns:p="http://schemas.openxmlformats.org/presentationml/2006/main">
+  <p:cSld>
+    <p:spTree>
+      <p:nvGrpSpPr>
+        <p:cNvPr id="1" name="">
+          <a:extLst>
+            <a:ext uri="{FF2B5EF4-FFF2-40B4-BE49-F238E27FC236}">
+              <a16:creationId xmlns:a16="http://schemas.microsoft.com/office/drawing/2014/main" id="{17F97A02-F3DB-59FB-F489-BB998A77A9EB}"/>
+            </a:ext>
+          </a:extLst>
+        </p:cNvPr>
+        <p:cNvGrpSpPr/>
+        <p:nvPr/>
+      </p:nvGrpSpPr>
+      <p:grpSpPr>
+        <a:xfrm>
+          <a:off x="0" y="0"/>
+          <a:ext cx="0" cy="0"/>
+          <a:chOff x="0" y="0"/>
+          <a:chExt cx="0" cy="0"/>
+        </a:xfrm>
+      </p:grpSpPr>
+      <p:sp>
+        <p:nvSpPr>
+          <p:cNvPr id="2" name="Título 1">
+            <a:extLst>
+              <a:ext uri="{FF2B5EF4-FFF2-40B4-BE49-F238E27FC236}">
+                <a16:creationId xmlns:a16="http://schemas.microsoft.com/office/drawing/2014/main" id="{A841A038-5A25-CDA2-0B63-A5322250E9B2}"/>
+              </a:ext>
+            </a:extLst>
+          </p:cNvPr>
+          <p:cNvSpPr>
+            <a:spLocks noGrp="1"/>
+          </p:cNvSpPr>
+          <p:nvPr>
+            <p:ph type="title"/>
+          </p:nvPr>
+        </p:nvSpPr>
+        <p:spPr/>
+        <p:txBody>
+          <a:bodyPr/>
+          <a:lstStyle/>
+          <a:p>
+            <a:r>
+              <a:rPr lang="pt-BR" b="1" dirty="0"/>
+              <a:t>Conversões de Tipos no Dart</a:t>
+            </a:r>
+            <a:endParaRPr lang="pt-BR" dirty="0"/>
+          </a:p>
+        </p:txBody>
+      </p:sp>
+      <p:sp>
+        <p:nvSpPr>
+          <p:cNvPr id="3" name="Espaço Reservado para Conteúdo 2">
+            <a:extLst>
+              <a:ext uri="{FF2B5EF4-FFF2-40B4-BE49-F238E27FC236}">
+                <a16:creationId xmlns:a16="http://schemas.microsoft.com/office/drawing/2014/main" id="{07955D79-ECC5-59A9-4966-F408FA01B5E5}"/>
+              </a:ext>
+            </a:extLst>
+          </p:cNvPr>
+          <p:cNvSpPr>
+            <a:spLocks noGrp="1"/>
+          </p:cNvSpPr>
+          <p:nvPr>
+            <p:ph idx="1"/>
+          </p:nvPr>
+        </p:nvSpPr>
+        <p:spPr/>
+        <p:txBody>
+          <a:bodyPr/>
+          <a:lstStyle/>
+          <a:p>
+            <a:r>
+              <a:rPr lang="pt-BR" dirty="0"/>
+              <a:t>No Dart, é comum precisar converter valores entre diferentes tipos de dados. Vamos ver as principais conversões.</a:t>
+            </a:r>
+          </a:p>
+          <a:p>
+            <a:r>
+              <a:rPr lang="pt-BR" b="1" dirty="0" err="1"/>
+              <a:t>int</a:t>
+            </a:r>
+            <a:r>
+              <a:rPr lang="pt-BR" b="1" dirty="0"/>
+              <a:t> → </a:t>
+            </a:r>
+            <a:r>
+              <a:rPr lang="pt-BR" b="1" dirty="0" err="1"/>
+              <a:t>String</a:t>
+            </a:r>
+            <a:endParaRPr lang="pt-BR" b="1" dirty="0"/>
+          </a:p>
+          <a:p>
+            <a:pPr lvl="1" indent="0">
+              <a:buNone/>
+            </a:pPr>
+            <a:r>
+              <a:rPr lang="pt-BR" dirty="0" err="1"/>
+              <a:t>int</a:t>
+            </a:r>
+            <a:r>
+              <a:rPr lang="pt-BR" dirty="0"/>
+              <a:t> numero3 = 10;</a:t>
+            </a:r>
+          </a:p>
+          <a:p>
+            <a:pPr lvl="1" indent="0">
+              <a:buNone/>
+            </a:pPr>
+            <a:r>
+              <a:rPr lang="pt-BR" dirty="0" err="1"/>
+              <a:t>String</a:t>
+            </a:r>
+            <a:r>
+              <a:rPr lang="pt-BR" dirty="0"/>
+              <a:t> texto3 = numero3.toString();</a:t>
+            </a:r>
+          </a:p>
+          <a:p>
+            <a:pPr lvl="1" indent="0">
+              <a:buNone/>
+            </a:pPr>
+            <a:r>
+              <a:rPr lang="pt-BR" dirty="0"/>
+              <a:t>print('</a:t>
+            </a:r>
+            <a:r>
+              <a:rPr lang="pt-BR" dirty="0" err="1"/>
+              <a:t>int</a:t>
+            </a:r>
+            <a:r>
+              <a:rPr lang="pt-BR" dirty="0"/>
+              <a:t> → </a:t>
+            </a:r>
+            <a:r>
+              <a:rPr lang="pt-BR" dirty="0" err="1"/>
+              <a:t>String</a:t>
+            </a:r>
+            <a:r>
+              <a:rPr lang="pt-BR" dirty="0"/>
+              <a:t>: $texto3');</a:t>
+            </a:r>
+          </a:p>
+          <a:p>
+            <a:r>
+              <a:rPr lang="pt-BR" b="1" dirty="0" err="1"/>
+              <a:t>double</a:t>
+            </a:r>
+            <a:r>
+              <a:rPr lang="pt-BR" b="1" dirty="0"/>
+              <a:t> → </a:t>
+            </a:r>
+            <a:r>
+              <a:rPr lang="pt-BR" b="1" dirty="0" err="1"/>
+              <a:t>String</a:t>
+            </a:r>
+            <a:endParaRPr lang="pt-BR" b="1" dirty="0"/>
+          </a:p>
+          <a:p>
+            <a:pPr lvl="1" indent="0">
+              <a:buNone/>
+            </a:pPr>
+            <a:r>
+              <a:rPr lang="pt-BR" dirty="0" err="1"/>
+              <a:t>double</a:t>
+            </a:r>
+            <a:r>
+              <a:rPr lang="pt-BR" dirty="0"/>
+              <a:t> numero4 = 10.5;</a:t>
+            </a:r>
+          </a:p>
+          <a:p>
+            <a:pPr lvl="1" indent="0">
+              <a:buNone/>
+            </a:pPr>
+            <a:r>
+              <a:rPr lang="pt-BR" dirty="0" err="1"/>
+              <a:t>String</a:t>
+            </a:r>
+            <a:r>
+              <a:rPr lang="pt-BR" dirty="0"/>
+              <a:t> texto4 = numero4.toString();</a:t>
+            </a:r>
+          </a:p>
+          <a:p>
+            <a:pPr lvl="1" indent="0">
+              <a:buNone/>
+            </a:pPr>
+            <a:r>
+              <a:rPr lang="pt-BR" dirty="0"/>
+              <a:t>print('</a:t>
+            </a:r>
+            <a:r>
+              <a:rPr lang="pt-BR" dirty="0" err="1"/>
+              <a:t>double</a:t>
+            </a:r>
+            <a:r>
+              <a:rPr lang="pt-BR" dirty="0"/>
+              <a:t> → </a:t>
+            </a:r>
+            <a:r>
+              <a:rPr lang="pt-BR" dirty="0" err="1"/>
+              <a:t>String</a:t>
+            </a:r>
+            <a:r>
+              <a:rPr lang="pt-BR" dirty="0"/>
+              <a:t>: $texto4');</a:t>
+            </a:r>
+          </a:p>
+          <a:p>
+            <a:endParaRPr lang="pt-BR" dirty="0"/>
+          </a:p>
+          <a:p>
+            <a:endParaRPr lang="pt-BR" dirty="0"/>
+          </a:p>
+        </p:txBody>
+      </p:sp>
+    </p:spTree>
+    <p:extLst>
+      <p:ext uri="{BB962C8B-B14F-4D97-AF65-F5344CB8AC3E}">
+        <p14:creationId xmlns:p14="http://schemas.microsoft.com/office/powerpoint/2010/main" val="1867094946"/>
+      </p:ext>
+    </p:extLst>
+  </p:cSld>
+  <p:clrMapOvr>
+    <a:masterClrMapping/>
+  </p:clrMapOvr>
+</p:sld>
+</file>
+
+<file path=ppt/slides/slide28.xml><?xml version="1.0" encoding="utf-8"?>
+<p:sld xmlns:a="http://schemas.openxmlformats.org/drawingml/2006/main" xmlns:r="http://schemas.openxmlformats.org/officeDocument/2006/relationships" xmlns:p="http://schemas.openxmlformats.org/presentationml/2006/main">
+  <p:cSld>
+    <p:spTree>
+      <p:nvGrpSpPr>
+        <p:cNvPr id="1" name="">
+          <a:extLst>
+            <a:ext uri="{FF2B5EF4-FFF2-40B4-BE49-F238E27FC236}">
+              <a16:creationId xmlns:a16="http://schemas.microsoft.com/office/drawing/2014/main" id="{B06D55B5-6BB8-6588-F7D0-9E29D71E2357}"/>
+            </a:ext>
+          </a:extLst>
+        </p:cNvPr>
+        <p:cNvGrpSpPr/>
+        <p:nvPr/>
+      </p:nvGrpSpPr>
+      <p:grpSpPr>
+        <a:xfrm>
+          <a:off x="0" y="0"/>
+          <a:ext cx="0" cy="0"/>
+          <a:chOff x="0" y="0"/>
+          <a:chExt cx="0" cy="0"/>
+        </a:xfrm>
+      </p:grpSpPr>
+      <p:sp>
+        <p:nvSpPr>
+          <p:cNvPr id="2" name="Título 1">
+            <a:extLst>
+              <a:ext uri="{FF2B5EF4-FFF2-40B4-BE49-F238E27FC236}">
+                <a16:creationId xmlns:a16="http://schemas.microsoft.com/office/drawing/2014/main" id="{75BCBA43-4405-806C-91B2-FEECB58E0536}"/>
+              </a:ext>
+            </a:extLst>
+          </p:cNvPr>
+          <p:cNvSpPr>
+            <a:spLocks noGrp="1"/>
+          </p:cNvSpPr>
+          <p:nvPr>
+            <p:ph type="title"/>
+          </p:nvPr>
+        </p:nvSpPr>
+        <p:spPr/>
+        <p:txBody>
+          <a:bodyPr/>
+          <a:lstStyle/>
+          <a:p>
+            <a:r>
+              <a:rPr lang="pt-BR" b="1" dirty="0"/>
+              <a:t>Conversões de Tipos no Dart</a:t>
+            </a:r>
+            <a:endParaRPr lang="pt-BR" dirty="0"/>
+          </a:p>
+        </p:txBody>
+      </p:sp>
+      <p:sp>
+        <p:nvSpPr>
+          <p:cNvPr id="3" name="Espaço Reservado para Conteúdo 2">
+            <a:extLst>
+              <a:ext uri="{FF2B5EF4-FFF2-40B4-BE49-F238E27FC236}">
+                <a16:creationId xmlns:a16="http://schemas.microsoft.com/office/drawing/2014/main" id="{2EA0BB89-993E-079B-B8ED-0942E3CBD6CA}"/>
+              </a:ext>
+            </a:extLst>
+          </p:cNvPr>
+          <p:cNvSpPr>
+            <a:spLocks noGrp="1"/>
+          </p:cNvSpPr>
+          <p:nvPr>
+            <p:ph idx="1"/>
+          </p:nvPr>
+        </p:nvSpPr>
+        <p:spPr/>
+        <p:txBody>
+          <a:bodyPr/>
+          <a:lstStyle/>
+          <a:p>
+            <a:r>
+              <a:rPr lang="pt-BR" dirty="0"/>
+              <a:t>No Dart, é comum precisar converter valores entre diferentes tipos de dados. Vamos ver as principais conversões.</a:t>
+            </a:r>
+          </a:p>
+          <a:p>
+            <a:r>
+              <a:rPr lang="pt-BR" b="1" dirty="0" err="1"/>
+              <a:t>int</a:t>
+            </a:r>
+            <a:r>
+              <a:rPr lang="pt-BR" b="1" dirty="0"/>
+              <a:t> → </a:t>
+            </a:r>
+            <a:r>
+              <a:rPr lang="pt-BR" b="1" dirty="0" err="1"/>
+              <a:t>double</a:t>
+            </a:r>
+            <a:endParaRPr lang="pt-BR" b="1" dirty="0"/>
+          </a:p>
+          <a:p>
+            <a:pPr marL="457200" lvl="1" indent="0">
+              <a:buNone/>
+            </a:pPr>
+            <a:r>
+              <a:rPr lang="pt-BR" dirty="0" err="1"/>
+              <a:t>int</a:t>
+            </a:r>
+            <a:r>
+              <a:rPr lang="pt-BR" dirty="0"/>
+              <a:t> numero5 = 10;</a:t>
+            </a:r>
+          </a:p>
+          <a:p>
+            <a:pPr marL="457200" lvl="1" indent="0">
+              <a:buNone/>
+            </a:pPr>
+            <a:r>
+              <a:rPr lang="pt-BR" dirty="0" err="1"/>
+              <a:t>double</a:t>
+            </a:r>
+            <a:r>
+              <a:rPr lang="pt-BR" dirty="0"/>
+              <a:t> resultado5 = numero5.toDouble();</a:t>
+            </a:r>
+          </a:p>
+          <a:p>
+            <a:pPr marL="457200" lvl="1" indent="0">
+              <a:buNone/>
+            </a:pPr>
+            <a:r>
+              <a:rPr lang="pt-BR" dirty="0"/>
+              <a:t>print('</a:t>
+            </a:r>
+            <a:r>
+              <a:rPr lang="pt-BR" dirty="0" err="1"/>
+              <a:t>int</a:t>
+            </a:r>
+            <a:r>
+              <a:rPr lang="pt-BR" dirty="0"/>
+              <a:t> → </a:t>
+            </a:r>
+            <a:r>
+              <a:rPr lang="pt-BR" dirty="0" err="1"/>
+              <a:t>double</a:t>
+            </a:r>
+            <a:r>
+              <a:rPr lang="pt-BR" dirty="0"/>
+              <a:t>: $resultado5’);</a:t>
+            </a:r>
+          </a:p>
+          <a:p>
+            <a:pPr marL="0" lvl="1" indent="0">
+              <a:buNone/>
+            </a:pPr>
+            <a:r>
+              <a:rPr lang="pt-BR" sz="2000" b="1" dirty="0" err="1"/>
+              <a:t>double</a:t>
+            </a:r>
+            <a:r>
+              <a:rPr lang="pt-BR" sz="2000" b="1" dirty="0"/>
+              <a:t> → </a:t>
+            </a:r>
+            <a:r>
+              <a:rPr lang="pt-BR" sz="2000" b="1" dirty="0" err="1"/>
+              <a:t>int</a:t>
+            </a:r>
+            <a:endParaRPr lang="pt-BR" sz="2000" b="1" dirty="0"/>
+          </a:p>
+          <a:p>
+            <a:pPr marL="457200" lvl="1" indent="0">
+              <a:buNone/>
+            </a:pPr>
+            <a:r>
+              <a:rPr lang="pt-BR" dirty="0" err="1"/>
+              <a:t>double</a:t>
+            </a:r>
+            <a:r>
+              <a:rPr lang="pt-BR" dirty="0"/>
+              <a:t> numero6 = 10.5;</a:t>
+            </a:r>
+          </a:p>
+          <a:p>
+            <a:pPr marL="457200" lvl="1" indent="0">
+              <a:buNone/>
+            </a:pPr>
+            <a:r>
+              <a:rPr lang="pt-BR" dirty="0" err="1"/>
+              <a:t>int</a:t>
+            </a:r>
+            <a:r>
+              <a:rPr lang="pt-BR" dirty="0"/>
+              <a:t> resultado6 = numero6.toInt();</a:t>
+            </a:r>
+          </a:p>
+          <a:p>
+            <a:pPr marL="457200" lvl="1" indent="0">
+              <a:buNone/>
+            </a:pPr>
+            <a:r>
+              <a:rPr lang="pt-BR" dirty="0"/>
+              <a:t>print('</a:t>
+            </a:r>
+            <a:r>
+              <a:rPr lang="pt-BR" dirty="0" err="1"/>
+              <a:t>double</a:t>
+            </a:r>
+            <a:r>
+              <a:rPr lang="pt-BR" dirty="0"/>
+              <a:t> → </a:t>
+            </a:r>
+            <a:r>
+              <a:rPr lang="pt-BR" dirty="0" err="1"/>
+              <a:t>int</a:t>
+            </a:r>
+            <a:r>
+              <a:rPr lang="pt-BR" dirty="0"/>
+              <a:t> (</a:t>
+            </a:r>
+            <a:r>
+              <a:rPr lang="pt-BR" dirty="0" err="1"/>
+              <a:t>toInt</a:t>
+            </a:r>
+            <a:r>
+              <a:rPr lang="pt-BR" dirty="0"/>
+              <a:t>): $resultado6');</a:t>
+            </a:r>
+          </a:p>
+          <a:p>
+            <a:endParaRPr lang="pt-BR" dirty="0"/>
+          </a:p>
+          <a:p>
+            <a:endParaRPr lang="pt-BR" dirty="0"/>
+          </a:p>
+        </p:txBody>
+      </p:sp>
+    </p:spTree>
+    <p:extLst>
+      <p:ext uri="{BB962C8B-B14F-4D97-AF65-F5344CB8AC3E}">
+        <p14:creationId xmlns:p14="http://schemas.microsoft.com/office/powerpoint/2010/main" val="610394685"/>
+      </p:ext>
+    </p:extLst>
+  </p:cSld>
+  <p:clrMapOvr>
+    <a:masterClrMapping/>
+  </p:clrMapOvr>
+</p:sld>
+</file>
+
+<file path=ppt/slides/slide29.xml><?xml version="1.0" encoding="utf-8"?>
+<p:sld xmlns:a="http://schemas.openxmlformats.org/drawingml/2006/main" xmlns:r="http://schemas.openxmlformats.org/officeDocument/2006/relationships" xmlns:p="http://schemas.openxmlformats.org/presentationml/2006/main">
+  <p:cSld>
+    <p:spTree>
+      <p:nvGrpSpPr>
+        <p:cNvPr id="1" name=""/>
+        <p:cNvGrpSpPr/>
+        <p:nvPr/>
+      </p:nvGrpSpPr>
+      <p:grpSpPr>
+        <a:xfrm>
+          <a:off x="0" y="0"/>
+          <a:ext cx="0" cy="0"/>
+          <a:chOff x="0" y="0"/>
+          <a:chExt cx="0" cy="0"/>
+        </a:xfrm>
+      </p:grpSpPr>
+      <p:sp>
+        <p:nvSpPr>
+          <p:cNvPr id="2" name="Título 1">
+            <a:extLst>
+              <a:ext uri="{FF2B5EF4-FFF2-40B4-BE49-F238E27FC236}">
+                <a16:creationId xmlns:a16="http://schemas.microsoft.com/office/drawing/2014/main" id="{D6FB606B-8B8E-65AD-8163-709876420629}"/>
+              </a:ext>
+            </a:extLst>
+          </p:cNvPr>
+          <p:cNvSpPr>
+            <a:spLocks noGrp="1"/>
+          </p:cNvSpPr>
+          <p:nvPr>
+            <p:ph type="title"/>
+          </p:nvPr>
+        </p:nvSpPr>
+        <p:spPr/>
+        <p:txBody>
+          <a:bodyPr/>
+          <a:lstStyle/>
+          <a:p>
+            <a:r>
+              <a:rPr lang="pt-BR" b="1" dirty="0"/>
+              <a:t>Operadores Aritméticos no Dart</a:t>
+            </a:r>
+            <a:endParaRPr lang="pt-BR" dirty="0"/>
+          </a:p>
+        </p:txBody>
+      </p:sp>
+      <p:sp>
+        <p:nvSpPr>
+          <p:cNvPr id="3" name="Espaço Reservado para Conteúdo 2">
+            <a:extLst>
+              <a:ext uri="{FF2B5EF4-FFF2-40B4-BE49-F238E27FC236}">
+                <a16:creationId xmlns:a16="http://schemas.microsoft.com/office/drawing/2014/main" id="{86B00003-0C93-3F6F-52D1-3925C80CE4F3}"/>
+              </a:ext>
+            </a:extLst>
+          </p:cNvPr>
+          <p:cNvSpPr>
+            <a:spLocks noGrp="1"/>
+          </p:cNvSpPr>
+          <p:nvPr>
+            <p:ph idx="1"/>
+          </p:nvPr>
+        </p:nvSpPr>
+        <p:spPr>
+          <a:xfrm>
+            <a:off x="592347" y="1844675"/>
+            <a:ext cx="11007306" cy="993416"/>
+          </a:xfrm>
+        </p:spPr>
+        <p:txBody>
+          <a:bodyPr/>
+          <a:lstStyle/>
+          <a:p>
+            <a:r>
+              <a:rPr lang="pt-BR" dirty="0"/>
+              <a:t>Os operadores aritméticos são usados para realizar cálculos matemáticos entre valores numéricos (</a:t>
+            </a:r>
+            <a:r>
+              <a:rPr lang="pt-BR" dirty="0" err="1"/>
+              <a:t>int</a:t>
+            </a:r>
+            <a:r>
+              <a:rPr lang="pt-BR" dirty="0"/>
+              <a:t>, </a:t>
+            </a:r>
+            <a:r>
+              <a:rPr lang="pt-BR" dirty="0" err="1"/>
+              <a:t>double</a:t>
+            </a:r>
+            <a:r>
+              <a:rPr lang="pt-BR" dirty="0"/>
+              <a:t> ou num).</a:t>
+            </a:r>
+          </a:p>
+        </p:txBody>
+      </p:sp>
+      <p:graphicFrame>
+        <p:nvGraphicFramePr>
+          <p:cNvPr id="4" name="Tabela 3">
+            <a:extLst>
+              <a:ext uri="{FF2B5EF4-FFF2-40B4-BE49-F238E27FC236}">
+                <a16:creationId xmlns:a16="http://schemas.microsoft.com/office/drawing/2014/main" id="{B36B1C20-F058-7535-3E3D-A646F12B16F3}"/>
+              </a:ext>
+            </a:extLst>
+          </p:cNvPr>
+          <p:cNvGraphicFramePr>
+            <a:graphicFrameLocks noGrp="1"/>
+          </p:cNvGraphicFramePr>
+          <p:nvPr>
+            <p:extLst>
+              <p:ext uri="{D42A27DB-BD31-4B8C-83A1-F6EECF244321}">
+                <p14:modId xmlns:p14="http://schemas.microsoft.com/office/powerpoint/2010/main" val="2880792365"/>
+              </p:ext>
+            </p:extLst>
+          </p:nvPr>
+        </p:nvGraphicFramePr>
+        <p:xfrm>
+          <a:off x="1706492" y="3035300"/>
+          <a:ext cx="8779015" cy="3085668"/>
+        </p:xfrm>
+        <a:graphic>
+          <a:graphicData uri="http://schemas.openxmlformats.org/drawingml/2006/table">
+            <a:tbl>
+              <a:tblPr/>
+              <a:tblGrid>
+                <a:gridCol w="1417708">
+                  <a:extLst>
+                    <a:ext uri="{9D8B030D-6E8A-4147-A177-3AD203B41FA5}">
+                      <a16:colId xmlns:a16="http://schemas.microsoft.com/office/drawing/2014/main" val="637719656"/>
+                    </a:ext>
+                  </a:extLst>
+                </a:gridCol>
+                <a:gridCol w="1562100">
+                  <a:extLst>
+                    <a:ext uri="{9D8B030D-6E8A-4147-A177-3AD203B41FA5}">
+                      <a16:colId xmlns:a16="http://schemas.microsoft.com/office/drawing/2014/main" val="3308824722"/>
+                    </a:ext>
+                  </a:extLst>
+                </a:gridCol>
+                <a:gridCol w="2933700">
+                  <a:extLst>
+                    <a:ext uri="{9D8B030D-6E8A-4147-A177-3AD203B41FA5}">
+                      <a16:colId xmlns:a16="http://schemas.microsoft.com/office/drawing/2014/main" val="1505675117"/>
+                    </a:ext>
+                  </a:extLst>
+                </a:gridCol>
+                <a:gridCol w="1476375">
+                  <a:extLst>
+                    <a:ext uri="{9D8B030D-6E8A-4147-A177-3AD203B41FA5}">
+                      <a16:colId xmlns:a16="http://schemas.microsoft.com/office/drawing/2014/main" val="1108441981"/>
+                    </a:ext>
+                  </a:extLst>
+                </a:gridCol>
+                <a:gridCol w="1389132">
+                  <a:extLst>
+                    <a:ext uri="{9D8B030D-6E8A-4147-A177-3AD203B41FA5}">
+                      <a16:colId xmlns:a16="http://schemas.microsoft.com/office/drawing/2014/main" val="37474399"/>
+                    </a:ext>
+                  </a:extLst>
+                </a:gridCol>
+              </a:tblGrid>
+              <a:tr h="224190">
+                <a:tc>
+                  <a:txBody>
+                    <a:bodyPr/>
+                    <a:lstStyle/>
+                    <a:p>
+                      <a:pPr algn="ctr">
+                        <a:buNone/>
+                      </a:pPr>
+                      <a:r>
+                        <a:rPr lang="pt-BR" sz="1500" b="1" dirty="0">
+                          <a:solidFill>
+                            <a:schemeClr val="bg1"/>
+                          </a:solidFill>
+                          <a:effectLst/>
+                          <a:latin typeface="Times New Roman" panose="02020603050405020304" pitchFamily="18" charset="0"/>
+                          <a:cs typeface="Times New Roman" panose="02020603050405020304" pitchFamily="18" charset="0"/>
+                        </a:rPr>
+                        <a:t>Operador</a:t>
+                      </a:r>
+                    </a:p>
+                  </a:txBody>
+                  <a:tcPr marL="76339" marR="76339" marT="38170" marB="38170" anchor="ctr">
+                    <a:lnL w="12700" cap="flat" cmpd="sng" algn="ctr">
+                      <a:solidFill>
+                        <a:schemeClr val="tx1"/>
+                      </a:solidFill>
+                      <a:prstDash val="solid"/>
+                      <a:round/>
+                      <a:headEnd type="none" w="med" len="med"/>
+                      <a:tailEnd type="none" w="med" len="med"/>
+                    </a:lnL>
+                    <a:lnR w="12700" cap="flat" cmpd="sng" algn="ctr">
+                      <a:solidFill>
+                        <a:schemeClr val="tx1"/>
+                      </a:solidFill>
+                      <a:prstDash val="solid"/>
+                      <a:round/>
+                      <a:headEnd type="none" w="med" len="med"/>
+                      <a:tailEnd type="none" w="med" len="med"/>
+                    </a:lnR>
+                    <a:lnT w="12700" cap="flat" cmpd="sng" algn="ctr">
+                      <a:solidFill>
+                        <a:schemeClr val="tx1"/>
+                      </a:solidFill>
+                      <a:prstDash val="solid"/>
+                      <a:round/>
+                      <a:headEnd type="none" w="med" len="med"/>
+                      <a:tailEnd type="none" w="med" len="med"/>
+                    </a:lnT>
+                    <a:lnB w="12700" cap="flat" cmpd="sng" algn="ctr">
+                      <a:solidFill>
+                        <a:schemeClr val="tx1"/>
+                      </a:solidFill>
+                      <a:prstDash val="solid"/>
+                      <a:round/>
+                      <a:headEnd type="none" w="med" len="med"/>
+                      <a:tailEnd type="none" w="med" len="med"/>
+                    </a:lnB>
+                    <a:solidFill>
+                      <a:srgbClr val="292A86"/>
+                    </a:solidFill>
+                  </a:tcPr>
+                </a:tc>
+                <a:tc>
+                  <a:txBody>
+                    <a:bodyPr/>
+                    <a:lstStyle/>
+                    <a:p>
+                      <a:pPr algn="ctr">
+                        <a:buNone/>
+                      </a:pPr>
+                      <a:r>
+                        <a:rPr lang="pt-BR" sz="1500" b="1" dirty="0">
+                          <a:solidFill>
+                            <a:schemeClr val="bg1"/>
+                          </a:solidFill>
+                          <a:effectLst/>
+                          <a:latin typeface="Times New Roman" panose="02020603050405020304" pitchFamily="18" charset="0"/>
+                          <a:cs typeface="Times New Roman" panose="02020603050405020304" pitchFamily="18" charset="0"/>
+                        </a:rPr>
+                        <a:t>Nome</a:t>
+                      </a:r>
+                    </a:p>
+                  </a:txBody>
+                  <a:tcPr marL="76339" marR="76339" marT="38170" marB="38170" anchor="ctr">
+                    <a:lnL w="12700" cap="flat" cmpd="sng" algn="ctr">
+                      <a:solidFill>
+                        <a:schemeClr val="tx1"/>
+                      </a:solidFill>
+                      <a:prstDash val="solid"/>
+                      <a:round/>
+                      <a:headEnd type="none" w="med" len="med"/>
+                      <a:tailEnd type="none" w="med" len="med"/>
+                    </a:lnL>
+                    <a:lnR w="12700" cap="flat" cmpd="sng" algn="ctr">
+                      <a:solidFill>
+                        <a:schemeClr val="tx1"/>
+                      </a:solidFill>
+                      <a:prstDash val="solid"/>
+                      <a:round/>
+                      <a:headEnd type="none" w="med" len="med"/>
+                      <a:tailEnd type="none" w="med" len="med"/>
+                    </a:lnR>
+                    <a:lnT w="12700" cap="flat" cmpd="sng" algn="ctr">
+                      <a:solidFill>
+                        <a:schemeClr val="tx1"/>
+                      </a:solidFill>
+                      <a:prstDash val="solid"/>
+                      <a:round/>
+                      <a:headEnd type="none" w="med" len="med"/>
+                      <a:tailEnd type="none" w="med" len="med"/>
+                    </a:lnT>
+                    <a:lnB w="12700" cap="flat" cmpd="sng" algn="ctr">
+                      <a:solidFill>
+                        <a:schemeClr val="tx1"/>
+                      </a:solidFill>
+                      <a:prstDash val="solid"/>
+                      <a:round/>
+                      <a:headEnd type="none" w="med" len="med"/>
+                      <a:tailEnd type="none" w="med" len="med"/>
+                    </a:lnB>
+                    <a:solidFill>
+                      <a:srgbClr val="292A86"/>
+                    </a:solidFill>
+                  </a:tcPr>
+                </a:tc>
+                <a:tc>
+                  <a:txBody>
+                    <a:bodyPr/>
+                    <a:lstStyle/>
+                    <a:p>
+                      <a:pPr algn="ctr">
+                        <a:buNone/>
+                      </a:pPr>
+                      <a:r>
+                        <a:rPr lang="pt-BR" sz="1500" b="1" dirty="0">
+                          <a:solidFill>
+                            <a:schemeClr val="bg1"/>
+                          </a:solidFill>
+                          <a:effectLst/>
+                          <a:latin typeface="Times New Roman" panose="02020603050405020304" pitchFamily="18" charset="0"/>
+                          <a:cs typeface="Times New Roman" panose="02020603050405020304" pitchFamily="18" charset="0"/>
+                        </a:rPr>
+                        <a:t>O que faz</a:t>
+                      </a:r>
+                    </a:p>
+                  </a:txBody>
+                  <a:tcPr marL="76339" marR="76339" marT="38170" marB="38170" anchor="ctr">
+                    <a:lnL w="12700" cap="flat" cmpd="sng" algn="ctr">
+                      <a:solidFill>
+                        <a:schemeClr val="tx1"/>
+                      </a:solidFill>
+                      <a:prstDash val="solid"/>
+                      <a:round/>
+                      <a:headEnd type="none" w="med" len="med"/>
+                      <a:tailEnd type="none" w="med" len="med"/>
+                    </a:lnL>
+                    <a:lnR w="12700" cap="flat" cmpd="sng" algn="ctr">
+                      <a:solidFill>
+                        <a:schemeClr val="tx1"/>
+                      </a:solidFill>
+                      <a:prstDash val="solid"/>
+                      <a:round/>
+                      <a:headEnd type="none" w="med" len="med"/>
+                      <a:tailEnd type="none" w="med" len="med"/>
+                    </a:lnR>
+                    <a:lnT w="12700" cap="flat" cmpd="sng" algn="ctr">
+                      <a:solidFill>
+                        <a:schemeClr val="tx1"/>
+                      </a:solidFill>
+                      <a:prstDash val="solid"/>
+                      <a:round/>
+                      <a:headEnd type="none" w="med" len="med"/>
+                      <a:tailEnd type="none" w="med" len="med"/>
+                    </a:lnT>
+                    <a:lnB w="12700" cap="flat" cmpd="sng" algn="ctr">
+                      <a:solidFill>
+                        <a:schemeClr val="tx1"/>
+                      </a:solidFill>
+                      <a:prstDash val="solid"/>
+                      <a:round/>
+                      <a:headEnd type="none" w="med" len="med"/>
+                      <a:tailEnd type="none" w="med" len="med"/>
+                    </a:lnB>
+                    <a:solidFill>
+                      <a:srgbClr val="292A86"/>
+                    </a:solidFill>
+                  </a:tcPr>
+                </a:tc>
+                <a:tc>
+                  <a:txBody>
+                    <a:bodyPr/>
+                    <a:lstStyle/>
+                    <a:p>
+                      <a:pPr algn="ctr">
+                        <a:buNone/>
+                      </a:pPr>
+                      <a:r>
+                        <a:rPr lang="pt-BR" sz="1500" b="1" dirty="0">
+                          <a:solidFill>
+                            <a:schemeClr val="bg1"/>
+                          </a:solidFill>
+                          <a:effectLst/>
+                          <a:latin typeface="Times New Roman" panose="02020603050405020304" pitchFamily="18" charset="0"/>
+                          <a:cs typeface="Times New Roman" panose="02020603050405020304" pitchFamily="18" charset="0"/>
+                        </a:rPr>
+                        <a:t>Exemplo</a:t>
+                      </a:r>
+                    </a:p>
+                  </a:txBody>
+                  <a:tcPr marL="76339" marR="76339" marT="38170" marB="38170" anchor="ctr">
+                    <a:lnL w="12700" cap="flat" cmpd="sng" algn="ctr">
+                      <a:solidFill>
+                        <a:schemeClr val="tx1"/>
+                      </a:solidFill>
+                      <a:prstDash val="solid"/>
+                      <a:round/>
+                      <a:headEnd type="none" w="med" len="med"/>
+                      <a:tailEnd type="none" w="med" len="med"/>
+                    </a:lnL>
+                    <a:lnR w="12700" cap="flat" cmpd="sng" algn="ctr">
+                      <a:solidFill>
+                        <a:schemeClr val="tx1"/>
+                      </a:solidFill>
+                      <a:prstDash val="solid"/>
+                      <a:round/>
+                      <a:headEnd type="none" w="med" len="med"/>
+                      <a:tailEnd type="none" w="med" len="med"/>
+                    </a:lnR>
+                    <a:lnT w="12700" cap="flat" cmpd="sng" algn="ctr">
+                      <a:solidFill>
+                        <a:schemeClr val="tx1"/>
+                      </a:solidFill>
+                      <a:prstDash val="solid"/>
+                      <a:round/>
+                      <a:headEnd type="none" w="med" len="med"/>
+                      <a:tailEnd type="none" w="med" len="med"/>
+                    </a:lnT>
+                    <a:lnB w="12700" cap="flat" cmpd="sng" algn="ctr">
+                      <a:solidFill>
+                        <a:schemeClr val="tx1"/>
+                      </a:solidFill>
+                      <a:prstDash val="solid"/>
+                      <a:round/>
+                      <a:headEnd type="none" w="med" len="med"/>
+                      <a:tailEnd type="none" w="med" len="med"/>
+                    </a:lnB>
+                    <a:solidFill>
+                      <a:srgbClr val="292A86"/>
+                    </a:solidFill>
+                  </a:tcPr>
+                </a:tc>
+                <a:tc>
+                  <a:txBody>
+                    <a:bodyPr/>
+                    <a:lstStyle/>
+                    <a:p>
+                      <a:pPr algn="ctr">
+                        <a:buNone/>
+                      </a:pPr>
+                      <a:r>
+                        <a:rPr lang="pt-BR" sz="1500" b="1" dirty="0">
+                          <a:solidFill>
+                            <a:schemeClr val="bg1"/>
+                          </a:solidFill>
+                          <a:effectLst/>
+                          <a:latin typeface="Times New Roman" panose="02020603050405020304" pitchFamily="18" charset="0"/>
+                          <a:cs typeface="Times New Roman" panose="02020603050405020304" pitchFamily="18" charset="0"/>
+                        </a:rPr>
+                        <a:t>Resultado</a:t>
+                      </a:r>
+                    </a:p>
+                  </a:txBody>
+                  <a:tcPr marL="76339" marR="76339" marT="38170" marB="38170" anchor="ctr">
+                    <a:lnL w="12700" cap="flat" cmpd="sng" algn="ctr">
+                      <a:solidFill>
+                        <a:schemeClr val="tx1"/>
+                      </a:solidFill>
+                      <a:prstDash val="solid"/>
+                      <a:round/>
+                      <a:headEnd type="none" w="med" len="med"/>
+                      <a:tailEnd type="none" w="med" len="med"/>
+                    </a:lnL>
+                    <a:lnR w="12700" cap="flat" cmpd="sng" algn="ctr">
+                      <a:solidFill>
+                        <a:schemeClr val="tx1"/>
+                      </a:solidFill>
+                      <a:prstDash val="solid"/>
+                      <a:round/>
+                      <a:headEnd type="none" w="med" len="med"/>
+                      <a:tailEnd type="none" w="med" len="med"/>
+                    </a:lnR>
+                    <a:lnT w="12700" cap="flat" cmpd="sng" algn="ctr">
+                      <a:solidFill>
+                        <a:schemeClr val="tx1"/>
+                      </a:solidFill>
+                      <a:prstDash val="solid"/>
+                      <a:round/>
+                      <a:headEnd type="none" w="med" len="med"/>
+                      <a:tailEnd type="none" w="med" len="med"/>
+                    </a:lnT>
+                    <a:lnB w="12700" cap="flat" cmpd="sng" algn="ctr">
+                      <a:solidFill>
+                        <a:schemeClr val="tx1"/>
+                      </a:solidFill>
+                      <a:prstDash val="solid"/>
+                      <a:round/>
+                      <a:headEnd type="none" w="med" len="med"/>
+                      <a:tailEnd type="none" w="med" len="med"/>
+                    </a:lnB>
+                    <a:solidFill>
+                      <a:srgbClr val="292A86"/>
+                    </a:solidFill>
+                  </a:tcPr>
+                </a:tc>
+                <a:extLst>
+                  <a:ext uri="{0D108BD9-81ED-4DB2-BD59-A6C34878D82A}">
+                    <a16:rowId xmlns:a16="http://schemas.microsoft.com/office/drawing/2014/main" val="3600989835"/>
+                  </a:ext>
+                </a:extLst>
+              </a:tr>
+              <a:tr h="202105">
+                <a:tc>
+                  <a:txBody>
+                    <a:bodyPr/>
+                    <a:lstStyle/>
+                    <a:p>
+                      <a:pPr algn="ctr">
+                        <a:buNone/>
+                      </a:pPr>
+                      <a:r>
+                        <a:rPr lang="pt-BR" sz="1500" dirty="0">
+                          <a:effectLst/>
+                          <a:latin typeface="Times New Roman" panose="02020603050405020304" pitchFamily="18" charset="0"/>
+                          <a:cs typeface="Times New Roman" panose="02020603050405020304" pitchFamily="18" charset="0"/>
+                        </a:rPr>
+                        <a:t>+</a:t>
+                      </a:r>
+                    </a:p>
+                  </a:txBody>
+                  <a:tcPr marL="76339" marR="76339" marT="38170" marB="38170" anchor="ctr">
+                    <a:lnL w="12700" cap="flat" cmpd="sng" algn="ctr">
+                      <a:solidFill>
+                        <a:schemeClr val="tx1"/>
+                      </a:solidFill>
+                      <a:prstDash val="solid"/>
+                      <a:round/>
+                      <a:headEnd type="none" w="med" len="med"/>
+                      <a:tailEnd type="none" w="med" len="med"/>
+                    </a:lnL>
+                    <a:lnR w="12700" cap="flat" cmpd="sng" algn="ctr">
+                      <a:solidFill>
+                        <a:schemeClr val="tx1"/>
+                      </a:solidFill>
+                      <a:prstDash val="solid"/>
+                      <a:round/>
+                      <a:headEnd type="none" w="med" len="med"/>
+                      <a:tailEnd type="none" w="med" len="med"/>
+                    </a:lnR>
+                    <a:lnT w="12700" cap="flat" cmpd="sng" algn="ctr">
+                      <a:solidFill>
+                        <a:schemeClr val="tx1"/>
+                      </a:solidFill>
+                      <a:prstDash val="solid"/>
+                      <a:round/>
+                      <a:headEnd type="none" w="med" len="med"/>
+                      <a:tailEnd type="none" w="med" len="med"/>
+                    </a:lnT>
+                    <a:lnB w="12700" cap="flat" cmpd="sng" algn="ctr">
+                      <a:solidFill>
+                        <a:schemeClr val="tx1"/>
+                      </a:solidFill>
+                      <a:prstDash val="solid"/>
+                      <a:round/>
+                      <a:headEnd type="none" w="med" len="med"/>
+                      <a:tailEnd type="none" w="med" len="med"/>
+                    </a:lnB>
+                    <a:noFill/>
+                  </a:tcPr>
+                </a:tc>
+                <a:tc>
+                  <a:txBody>
+                    <a:bodyPr/>
+                    <a:lstStyle/>
+                    <a:p>
+                      <a:pPr algn="ctr">
+                        <a:buNone/>
+                      </a:pPr>
+                      <a:r>
+                        <a:rPr lang="pt-BR" sz="1500" dirty="0">
+                          <a:effectLst/>
+                          <a:latin typeface="Times New Roman" panose="02020603050405020304" pitchFamily="18" charset="0"/>
+                          <a:cs typeface="Times New Roman" panose="02020603050405020304" pitchFamily="18" charset="0"/>
+                        </a:rPr>
+                        <a:t>Adição</a:t>
+                      </a:r>
+                    </a:p>
+                  </a:txBody>
+                  <a:tcPr marL="76339" marR="76339" marT="38170" marB="38170" anchor="ctr">
+                    <a:lnL w="12700" cap="flat" cmpd="sng" algn="ctr">
+                      <a:solidFill>
+                        <a:schemeClr val="tx1"/>
+                      </a:solidFill>
+                      <a:prstDash val="solid"/>
+                      <a:round/>
+                      <a:headEnd type="none" w="med" len="med"/>
+                      <a:tailEnd type="none" w="med" len="med"/>
+                    </a:lnL>
+                    <a:lnR w="12700" cap="flat" cmpd="sng" algn="ctr">
+                      <a:solidFill>
+                        <a:schemeClr val="tx1"/>
+                      </a:solidFill>
+                      <a:prstDash val="solid"/>
+                      <a:round/>
+                      <a:headEnd type="none" w="med" len="med"/>
+                      <a:tailEnd type="none" w="med" len="med"/>
+                    </a:lnR>
+                    <a:lnT w="12700" cap="flat" cmpd="sng" algn="ctr">
+                      <a:solidFill>
+                        <a:schemeClr val="tx1"/>
+                      </a:solidFill>
+                      <a:prstDash val="solid"/>
+                      <a:round/>
+                      <a:headEnd type="none" w="med" len="med"/>
+                      <a:tailEnd type="none" w="med" len="med"/>
+                    </a:lnT>
+                    <a:lnB w="12700" cap="flat" cmpd="sng" algn="ctr">
+                      <a:solidFill>
+                        <a:schemeClr val="tx1"/>
+                      </a:solidFill>
+                      <a:prstDash val="solid"/>
+                      <a:round/>
+                      <a:headEnd type="none" w="med" len="med"/>
+                      <a:tailEnd type="none" w="med" len="med"/>
+                    </a:lnB>
+                    <a:noFill/>
+                  </a:tcPr>
+                </a:tc>
+                <a:tc>
+                  <a:txBody>
+                    <a:bodyPr/>
+                    <a:lstStyle/>
+                    <a:p>
+                      <a:pPr algn="ctr">
+                        <a:buNone/>
+                      </a:pPr>
+                      <a:r>
+                        <a:rPr lang="pt-BR" sz="1500" dirty="0">
+                          <a:effectLst/>
+                          <a:latin typeface="Times New Roman" panose="02020603050405020304" pitchFamily="18" charset="0"/>
+                          <a:cs typeface="Times New Roman" panose="02020603050405020304" pitchFamily="18" charset="0"/>
+                        </a:rPr>
+                        <a:t>Soma dois valores</a:t>
+                      </a:r>
+                    </a:p>
+                  </a:txBody>
+                  <a:tcPr marL="76339" marR="76339" marT="38170" marB="38170" anchor="ctr">
+                    <a:lnL w="12700" cap="flat" cmpd="sng" algn="ctr">
+                      <a:solidFill>
+                        <a:schemeClr val="tx1"/>
+                      </a:solidFill>
+                      <a:prstDash val="solid"/>
+                      <a:round/>
+                      <a:headEnd type="none" w="med" len="med"/>
+                      <a:tailEnd type="none" w="med" len="med"/>
+                    </a:lnL>
+                    <a:lnR w="12700" cap="flat" cmpd="sng" algn="ctr">
+                      <a:solidFill>
+                        <a:schemeClr val="tx1"/>
+                      </a:solidFill>
+                      <a:prstDash val="solid"/>
+                      <a:round/>
+                      <a:headEnd type="none" w="med" len="med"/>
+                      <a:tailEnd type="none" w="med" len="med"/>
+                    </a:lnR>
+                    <a:lnT w="12700" cap="flat" cmpd="sng" algn="ctr">
+                      <a:solidFill>
+                        <a:schemeClr val="tx1"/>
+                      </a:solidFill>
+                      <a:prstDash val="solid"/>
+                      <a:round/>
+                      <a:headEnd type="none" w="med" len="med"/>
+                      <a:tailEnd type="none" w="med" len="med"/>
+                    </a:lnT>
+                    <a:lnB w="12700" cap="flat" cmpd="sng" algn="ctr">
+                      <a:solidFill>
+                        <a:schemeClr val="tx1"/>
+                      </a:solidFill>
+                      <a:prstDash val="solid"/>
+                      <a:round/>
+                      <a:headEnd type="none" w="med" len="med"/>
+                      <a:tailEnd type="none" w="med" len="med"/>
+                    </a:lnB>
+                    <a:noFill/>
+                  </a:tcPr>
+                </a:tc>
+                <a:tc>
+                  <a:txBody>
+                    <a:bodyPr/>
+                    <a:lstStyle/>
+                    <a:p>
+                      <a:pPr algn="ctr">
+                        <a:buNone/>
+                      </a:pPr>
+                      <a:r>
+                        <a:rPr lang="pt-BR" sz="1500">
+                          <a:effectLst/>
+                          <a:latin typeface="Times New Roman" panose="02020603050405020304" pitchFamily="18" charset="0"/>
+                          <a:cs typeface="Times New Roman" panose="02020603050405020304" pitchFamily="18" charset="0"/>
+                        </a:rPr>
+                        <a:t>10 + 3</a:t>
+                      </a:r>
+                    </a:p>
+                  </a:txBody>
+                  <a:tcPr marL="76339" marR="76339" marT="38170" marB="38170" anchor="ctr">
+                    <a:lnL w="12700" cap="flat" cmpd="sng" algn="ctr">
+                      <a:solidFill>
+                        <a:schemeClr val="tx1"/>
+                      </a:solidFill>
+                      <a:prstDash val="solid"/>
+                      <a:round/>
+                      <a:headEnd type="none" w="med" len="med"/>
+                      <a:tailEnd type="none" w="med" len="med"/>
+                    </a:lnL>
+                    <a:lnR w="12700" cap="flat" cmpd="sng" algn="ctr">
+                      <a:solidFill>
+                        <a:schemeClr val="tx1"/>
+                      </a:solidFill>
+                      <a:prstDash val="solid"/>
+                      <a:round/>
+                      <a:headEnd type="none" w="med" len="med"/>
+                      <a:tailEnd type="none" w="med" len="med"/>
+                    </a:lnR>
+                    <a:lnT w="12700" cap="flat" cmpd="sng" algn="ctr">
+                      <a:solidFill>
+                        <a:schemeClr val="tx1"/>
+                      </a:solidFill>
+                      <a:prstDash val="solid"/>
+                      <a:round/>
+                      <a:headEnd type="none" w="med" len="med"/>
+                      <a:tailEnd type="none" w="med" len="med"/>
+                    </a:lnT>
+                    <a:lnB w="12700" cap="flat" cmpd="sng" algn="ctr">
+                      <a:solidFill>
+                        <a:schemeClr val="tx1"/>
+                      </a:solidFill>
+                      <a:prstDash val="solid"/>
+                      <a:round/>
+                      <a:headEnd type="none" w="med" len="med"/>
+                      <a:tailEnd type="none" w="med" len="med"/>
+                    </a:lnB>
+                    <a:noFill/>
+                  </a:tcPr>
+                </a:tc>
+                <a:tc>
+                  <a:txBody>
+                    <a:bodyPr/>
+                    <a:lstStyle/>
+                    <a:p>
+                      <a:pPr algn="ctr">
+                        <a:buNone/>
+                      </a:pPr>
+                      <a:r>
+                        <a:rPr lang="pt-BR" sz="1500" dirty="0">
+                          <a:effectLst/>
+                          <a:latin typeface="Times New Roman" panose="02020603050405020304" pitchFamily="18" charset="0"/>
+                          <a:cs typeface="Times New Roman" panose="02020603050405020304" pitchFamily="18" charset="0"/>
+                        </a:rPr>
+                        <a:t>13</a:t>
+                      </a:r>
+                    </a:p>
+                  </a:txBody>
+                  <a:tcPr marL="76339" marR="76339" marT="38170" marB="38170" anchor="ctr">
+                    <a:lnL w="12700" cap="flat" cmpd="sng" algn="ctr">
+                      <a:solidFill>
+                        <a:schemeClr val="tx1"/>
+                      </a:solidFill>
+                      <a:prstDash val="solid"/>
+                      <a:round/>
+                      <a:headEnd type="none" w="med" len="med"/>
+                      <a:tailEnd type="none" w="med" len="med"/>
+                    </a:lnL>
+                    <a:lnR w="12700" cap="flat" cmpd="sng" algn="ctr">
+                      <a:solidFill>
+                        <a:schemeClr val="tx1"/>
+                      </a:solidFill>
+                      <a:prstDash val="solid"/>
+                      <a:round/>
+                      <a:headEnd type="none" w="med" len="med"/>
+                      <a:tailEnd type="none" w="med" len="med"/>
+                    </a:lnR>
+                    <a:lnT w="12700" cap="flat" cmpd="sng" algn="ctr">
+                      <a:solidFill>
+                        <a:schemeClr val="tx1"/>
+                      </a:solidFill>
+                      <a:prstDash val="solid"/>
+                      <a:round/>
+                      <a:headEnd type="none" w="med" len="med"/>
+                      <a:tailEnd type="none" w="med" len="med"/>
+                    </a:lnT>
+                    <a:lnB w="12700" cap="flat" cmpd="sng" algn="ctr">
+                      <a:solidFill>
+                        <a:schemeClr val="tx1"/>
+                      </a:solidFill>
+                      <a:prstDash val="solid"/>
+                      <a:round/>
+                      <a:headEnd type="none" w="med" len="med"/>
+                      <a:tailEnd type="none" w="med" len="med"/>
+                    </a:lnB>
+                    <a:noFill/>
+                  </a:tcPr>
+                </a:tc>
+                <a:extLst>
+                  <a:ext uri="{0D108BD9-81ED-4DB2-BD59-A6C34878D82A}">
+                    <a16:rowId xmlns:a16="http://schemas.microsoft.com/office/drawing/2014/main" val="737509777"/>
+                  </a:ext>
+                </a:extLst>
+              </a:tr>
+              <a:tr h="353684">
+                <a:tc>
+                  <a:txBody>
+                    <a:bodyPr/>
+                    <a:lstStyle/>
+                    <a:p>
+                      <a:pPr algn="ctr">
+                        <a:buNone/>
+                      </a:pPr>
+                      <a:r>
+                        <a:rPr lang="pt-BR" sz="1500">
+                          <a:effectLst/>
+                          <a:latin typeface="Times New Roman" panose="02020603050405020304" pitchFamily="18" charset="0"/>
+                          <a:cs typeface="Times New Roman" panose="02020603050405020304" pitchFamily="18" charset="0"/>
+                        </a:rPr>
+                        <a:t>-</a:t>
+                      </a:r>
+                    </a:p>
+                  </a:txBody>
+                  <a:tcPr marL="76339" marR="76339" marT="38170" marB="38170" anchor="ctr">
+                    <a:lnL w="12700" cap="flat" cmpd="sng" algn="ctr">
+                      <a:solidFill>
+                        <a:schemeClr val="tx1"/>
+                      </a:solidFill>
+                      <a:prstDash val="solid"/>
+                      <a:round/>
+                      <a:headEnd type="none" w="med" len="med"/>
+                      <a:tailEnd type="none" w="med" len="med"/>
+                    </a:lnL>
+                    <a:lnR w="12700" cap="flat" cmpd="sng" algn="ctr">
+                      <a:solidFill>
+                        <a:schemeClr val="tx1"/>
+                      </a:solidFill>
+                      <a:prstDash val="solid"/>
+                      <a:round/>
+                      <a:headEnd type="none" w="med" len="med"/>
+                      <a:tailEnd type="none" w="med" len="med"/>
+                    </a:lnR>
+                    <a:lnT w="12700" cap="flat" cmpd="sng" algn="ctr">
+                      <a:solidFill>
+                        <a:schemeClr val="tx1"/>
+                      </a:solidFill>
+                      <a:prstDash val="solid"/>
+                      <a:round/>
+                      <a:headEnd type="none" w="med" len="med"/>
+                      <a:tailEnd type="none" w="med" len="med"/>
+                    </a:lnT>
+                    <a:lnB w="12700" cap="flat" cmpd="sng" algn="ctr">
+                      <a:solidFill>
+                        <a:schemeClr val="tx1"/>
+                      </a:solidFill>
+                      <a:prstDash val="solid"/>
+                      <a:round/>
+                      <a:headEnd type="none" w="med" len="med"/>
+                      <a:tailEnd type="none" w="med" len="med"/>
+                    </a:lnB>
+                    <a:noFill/>
+                  </a:tcPr>
+                </a:tc>
+                <a:tc>
+                  <a:txBody>
+                    <a:bodyPr/>
+                    <a:lstStyle/>
+                    <a:p>
+                      <a:pPr algn="ctr">
+                        <a:buNone/>
+                      </a:pPr>
+                      <a:r>
+                        <a:rPr lang="pt-BR" sz="1500" dirty="0">
+                          <a:effectLst/>
+                          <a:latin typeface="Times New Roman" panose="02020603050405020304" pitchFamily="18" charset="0"/>
+                          <a:cs typeface="Times New Roman" panose="02020603050405020304" pitchFamily="18" charset="0"/>
+                        </a:rPr>
+                        <a:t>Subtração</a:t>
+                      </a:r>
+                    </a:p>
+                  </a:txBody>
+                  <a:tcPr marL="76339" marR="76339" marT="38170" marB="38170" anchor="ctr">
+                    <a:lnL w="12700" cap="flat" cmpd="sng" algn="ctr">
+                      <a:solidFill>
+                        <a:schemeClr val="tx1"/>
+                      </a:solidFill>
+                      <a:prstDash val="solid"/>
+                      <a:round/>
+                      <a:headEnd type="none" w="med" len="med"/>
+                      <a:tailEnd type="none" w="med" len="med"/>
+                    </a:lnL>
+                    <a:lnR w="12700" cap="flat" cmpd="sng" algn="ctr">
+                      <a:solidFill>
+                        <a:schemeClr val="tx1"/>
+                      </a:solidFill>
+                      <a:prstDash val="solid"/>
+                      <a:round/>
+                      <a:headEnd type="none" w="med" len="med"/>
+                      <a:tailEnd type="none" w="med" len="med"/>
+                    </a:lnR>
+                    <a:lnT w="12700" cap="flat" cmpd="sng" algn="ctr">
+                      <a:solidFill>
+                        <a:schemeClr val="tx1"/>
+                      </a:solidFill>
+                      <a:prstDash val="solid"/>
+                      <a:round/>
+                      <a:headEnd type="none" w="med" len="med"/>
+                      <a:tailEnd type="none" w="med" len="med"/>
+                    </a:lnT>
+                    <a:lnB w="12700" cap="flat" cmpd="sng" algn="ctr">
+                      <a:solidFill>
+                        <a:schemeClr val="tx1"/>
+                      </a:solidFill>
+                      <a:prstDash val="solid"/>
+                      <a:round/>
+                      <a:headEnd type="none" w="med" len="med"/>
+                      <a:tailEnd type="none" w="med" len="med"/>
+                    </a:lnB>
+                    <a:noFill/>
+                  </a:tcPr>
+                </a:tc>
+                <a:tc>
+                  <a:txBody>
+                    <a:bodyPr/>
+                    <a:lstStyle/>
+                    <a:p>
+                      <a:pPr algn="ctr">
+                        <a:buNone/>
+                      </a:pPr>
+                      <a:r>
+                        <a:rPr lang="pt-BR" sz="1500" dirty="0">
+                          <a:effectLst/>
+                          <a:latin typeface="Times New Roman" panose="02020603050405020304" pitchFamily="18" charset="0"/>
+                          <a:cs typeface="Times New Roman" panose="02020603050405020304" pitchFamily="18" charset="0"/>
+                        </a:rPr>
+                        <a:t>Subtrai um valor do outro</a:t>
+                      </a:r>
+                    </a:p>
+                  </a:txBody>
+                  <a:tcPr marL="76339" marR="76339" marT="38170" marB="38170" anchor="ctr">
+                    <a:lnL w="12700" cap="flat" cmpd="sng" algn="ctr">
+                      <a:solidFill>
+                        <a:schemeClr val="tx1"/>
+                      </a:solidFill>
+                      <a:prstDash val="solid"/>
+                      <a:round/>
+                      <a:headEnd type="none" w="med" len="med"/>
+                      <a:tailEnd type="none" w="med" len="med"/>
+                    </a:lnL>
+                    <a:lnR w="12700" cap="flat" cmpd="sng" algn="ctr">
+                      <a:solidFill>
+                        <a:schemeClr val="tx1"/>
+                      </a:solidFill>
+                      <a:prstDash val="solid"/>
+                      <a:round/>
+                      <a:headEnd type="none" w="med" len="med"/>
+                      <a:tailEnd type="none" w="med" len="med"/>
+                    </a:lnR>
+                    <a:lnT w="12700" cap="flat" cmpd="sng" algn="ctr">
+                      <a:solidFill>
+                        <a:schemeClr val="tx1"/>
+                      </a:solidFill>
+                      <a:prstDash val="solid"/>
+                      <a:round/>
+                      <a:headEnd type="none" w="med" len="med"/>
+                      <a:tailEnd type="none" w="med" len="med"/>
+                    </a:lnT>
+                    <a:lnB w="12700" cap="flat" cmpd="sng" algn="ctr">
+                      <a:solidFill>
+                        <a:schemeClr val="tx1"/>
+                      </a:solidFill>
+                      <a:prstDash val="solid"/>
+                      <a:round/>
+                      <a:headEnd type="none" w="med" len="med"/>
+                      <a:tailEnd type="none" w="med" len="med"/>
+                    </a:lnB>
+                    <a:noFill/>
+                  </a:tcPr>
+                </a:tc>
+                <a:tc>
+                  <a:txBody>
+                    <a:bodyPr/>
+                    <a:lstStyle/>
+                    <a:p>
+                      <a:pPr algn="ctr">
+                        <a:buNone/>
+                      </a:pPr>
+                      <a:r>
+                        <a:rPr lang="pt-BR" sz="1500" dirty="0">
+                          <a:effectLst/>
+                          <a:latin typeface="Times New Roman" panose="02020603050405020304" pitchFamily="18" charset="0"/>
+                          <a:cs typeface="Times New Roman" panose="02020603050405020304" pitchFamily="18" charset="0"/>
+                        </a:rPr>
+                        <a:t>10 - 3</a:t>
+                      </a:r>
+                    </a:p>
+                  </a:txBody>
+                  <a:tcPr marL="76339" marR="76339" marT="38170" marB="38170" anchor="ctr">
+                    <a:lnL w="12700" cap="flat" cmpd="sng" algn="ctr">
+                      <a:solidFill>
+                        <a:schemeClr val="tx1"/>
+                      </a:solidFill>
+                      <a:prstDash val="solid"/>
+                      <a:round/>
+                      <a:headEnd type="none" w="med" len="med"/>
+                      <a:tailEnd type="none" w="med" len="med"/>
+                    </a:lnL>
+                    <a:lnR w="12700" cap="flat" cmpd="sng" algn="ctr">
+                      <a:solidFill>
+                        <a:schemeClr val="tx1"/>
+                      </a:solidFill>
+                      <a:prstDash val="solid"/>
+                      <a:round/>
+                      <a:headEnd type="none" w="med" len="med"/>
+                      <a:tailEnd type="none" w="med" len="med"/>
+                    </a:lnR>
+                    <a:lnT w="12700" cap="flat" cmpd="sng" algn="ctr">
+                      <a:solidFill>
+                        <a:schemeClr val="tx1"/>
+                      </a:solidFill>
+                      <a:prstDash val="solid"/>
+                      <a:round/>
+                      <a:headEnd type="none" w="med" len="med"/>
+                      <a:tailEnd type="none" w="med" len="med"/>
+                    </a:lnT>
+                    <a:lnB w="12700" cap="flat" cmpd="sng" algn="ctr">
+                      <a:solidFill>
+                        <a:schemeClr val="tx1"/>
+                      </a:solidFill>
+                      <a:prstDash val="solid"/>
+                      <a:round/>
+                      <a:headEnd type="none" w="med" len="med"/>
+                      <a:tailEnd type="none" w="med" len="med"/>
+                    </a:lnB>
+                    <a:noFill/>
+                  </a:tcPr>
+                </a:tc>
+                <a:tc>
+                  <a:txBody>
+                    <a:bodyPr/>
+                    <a:lstStyle/>
+                    <a:p>
+                      <a:pPr algn="ctr">
+                        <a:buNone/>
+                      </a:pPr>
+                      <a:r>
+                        <a:rPr lang="pt-BR" sz="1500" dirty="0">
+                          <a:effectLst/>
+                          <a:latin typeface="Times New Roman" panose="02020603050405020304" pitchFamily="18" charset="0"/>
+                          <a:cs typeface="Times New Roman" panose="02020603050405020304" pitchFamily="18" charset="0"/>
+                        </a:rPr>
+                        <a:t>7</a:t>
+                      </a:r>
+                    </a:p>
+                  </a:txBody>
+                  <a:tcPr marL="76339" marR="76339" marT="38170" marB="38170" anchor="ctr">
+                    <a:lnL w="12700" cap="flat" cmpd="sng" algn="ctr">
+                      <a:solidFill>
+                        <a:schemeClr val="tx1"/>
+                      </a:solidFill>
+                      <a:prstDash val="solid"/>
+                      <a:round/>
+                      <a:headEnd type="none" w="med" len="med"/>
+                      <a:tailEnd type="none" w="med" len="med"/>
+                    </a:lnL>
+                    <a:lnR w="12700" cap="flat" cmpd="sng" algn="ctr">
+                      <a:solidFill>
+                        <a:schemeClr val="tx1"/>
+                      </a:solidFill>
+                      <a:prstDash val="solid"/>
+                      <a:round/>
+                      <a:headEnd type="none" w="med" len="med"/>
+                      <a:tailEnd type="none" w="med" len="med"/>
+                    </a:lnR>
+                    <a:lnT w="12700" cap="flat" cmpd="sng" algn="ctr">
+                      <a:solidFill>
+                        <a:schemeClr val="tx1"/>
+                      </a:solidFill>
+                      <a:prstDash val="solid"/>
+                      <a:round/>
+                      <a:headEnd type="none" w="med" len="med"/>
+                      <a:tailEnd type="none" w="med" len="med"/>
+                    </a:lnT>
+                    <a:lnB w="12700" cap="flat" cmpd="sng" algn="ctr">
+                      <a:solidFill>
+                        <a:schemeClr val="tx1"/>
+                      </a:solidFill>
+                      <a:prstDash val="solid"/>
+                      <a:round/>
+                      <a:headEnd type="none" w="med" len="med"/>
+                      <a:tailEnd type="none" w="med" len="med"/>
+                    </a:lnB>
+                    <a:noFill/>
+                  </a:tcPr>
+                </a:tc>
+                <a:extLst>
+                  <a:ext uri="{0D108BD9-81ED-4DB2-BD59-A6C34878D82A}">
+                    <a16:rowId xmlns:a16="http://schemas.microsoft.com/office/drawing/2014/main" val="3430295874"/>
+                  </a:ext>
+                </a:extLst>
+              </a:tr>
+              <a:tr h="353684">
+                <a:tc>
+                  <a:txBody>
+                    <a:bodyPr/>
+                    <a:lstStyle/>
+                    <a:p>
+                      <a:pPr algn="ctr">
+                        <a:buNone/>
+                      </a:pPr>
+                      <a:r>
+                        <a:rPr lang="pt-BR" sz="1500">
+                          <a:effectLst/>
+                          <a:latin typeface="Times New Roman" panose="02020603050405020304" pitchFamily="18" charset="0"/>
+                          <a:cs typeface="Times New Roman" panose="02020603050405020304" pitchFamily="18" charset="0"/>
+                        </a:rPr>
+                        <a:t>*</a:t>
+                      </a:r>
+                    </a:p>
+                  </a:txBody>
+                  <a:tcPr marL="76339" marR="76339" marT="38170" marB="38170" anchor="ctr">
+                    <a:lnL w="12700" cap="flat" cmpd="sng" algn="ctr">
+                      <a:solidFill>
+                        <a:schemeClr val="tx1"/>
+                      </a:solidFill>
+                      <a:prstDash val="solid"/>
+                      <a:round/>
+                      <a:headEnd type="none" w="med" len="med"/>
+                      <a:tailEnd type="none" w="med" len="med"/>
+                    </a:lnL>
+                    <a:lnR w="12700" cap="flat" cmpd="sng" algn="ctr">
+                      <a:solidFill>
+                        <a:schemeClr val="tx1"/>
+                      </a:solidFill>
+                      <a:prstDash val="solid"/>
+                      <a:round/>
+                      <a:headEnd type="none" w="med" len="med"/>
+                      <a:tailEnd type="none" w="med" len="med"/>
+                    </a:lnR>
+                    <a:lnT w="12700" cap="flat" cmpd="sng" algn="ctr">
+                      <a:solidFill>
+                        <a:schemeClr val="tx1"/>
+                      </a:solidFill>
+                      <a:prstDash val="solid"/>
+                      <a:round/>
+                      <a:headEnd type="none" w="med" len="med"/>
+                      <a:tailEnd type="none" w="med" len="med"/>
+                    </a:lnT>
+                    <a:lnB w="12700" cap="flat" cmpd="sng" algn="ctr">
+                      <a:solidFill>
+                        <a:schemeClr val="tx1"/>
+                      </a:solidFill>
+                      <a:prstDash val="solid"/>
+                      <a:round/>
+                      <a:headEnd type="none" w="med" len="med"/>
+                      <a:tailEnd type="none" w="med" len="med"/>
+                    </a:lnB>
+                    <a:noFill/>
+                  </a:tcPr>
+                </a:tc>
+                <a:tc>
+                  <a:txBody>
+                    <a:bodyPr/>
+                    <a:lstStyle/>
+                    <a:p>
+                      <a:pPr algn="ctr">
+                        <a:buNone/>
+                      </a:pPr>
+                      <a:r>
+                        <a:rPr lang="pt-BR" sz="1500">
+                          <a:effectLst/>
+                          <a:latin typeface="Times New Roman" panose="02020603050405020304" pitchFamily="18" charset="0"/>
+                          <a:cs typeface="Times New Roman" panose="02020603050405020304" pitchFamily="18" charset="0"/>
+                        </a:rPr>
+                        <a:t>Multiplicação</a:t>
+                      </a:r>
+                    </a:p>
+                  </a:txBody>
+                  <a:tcPr marL="76339" marR="76339" marT="38170" marB="38170" anchor="ctr">
+                    <a:lnL w="12700" cap="flat" cmpd="sng" algn="ctr">
+                      <a:solidFill>
+                        <a:schemeClr val="tx1"/>
+                      </a:solidFill>
+                      <a:prstDash val="solid"/>
+                      <a:round/>
+                      <a:headEnd type="none" w="med" len="med"/>
+                      <a:tailEnd type="none" w="med" len="med"/>
+                    </a:lnL>
+                    <a:lnR w="12700" cap="flat" cmpd="sng" algn="ctr">
+                      <a:solidFill>
+                        <a:schemeClr val="tx1"/>
+                      </a:solidFill>
+                      <a:prstDash val="solid"/>
+                      <a:round/>
+                      <a:headEnd type="none" w="med" len="med"/>
+                      <a:tailEnd type="none" w="med" len="med"/>
+                    </a:lnR>
+                    <a:lnT w="12700" cap="flat" cmpd="sng" algn="ctr">
+                      <a:solidFill>
+                        <a:schemeClr val="tx1"/>
+                      </a:solidFill>
+                      <a:prstDash val="solid"/>
+                      <a:round/>
+                      <a:headEnd type="none" w="med" len="med"/>
+                      <a:tailEnd type="none" w="med" len="med"/>
+                    </a:lnT>
+                    <a:lnB w="12700" cap="flat" cmpd="sng" algn="ctr">
+                      <a:solidFill>
+                        <a:schemeClr val="tx1"/>
+                      </a:solidFill>
+                      <a:prstDash val="solid"/>
+                      <a:round/>
+                      <a:headEnd type="none" w="med" len="med"/>
+                      <a:tailEnd type="none" w="med" len="med"/>
+                    </a:lnB>
+                    <a:noFill/>
+                  </a:tcPr>
+                </a:tc>
+                <a:tc>
+                  <a:txBody>
+                    <a:bodyPr/>
+                    <a:lstStyle/>
+                    <a:p>
+                      <a:pPr algn="ctr">
+                        <a:buNone/>
+                      </a:pPr>
+                      <a:r>
+                        <a:rPr lang="pt-BR" sz="1500">
+                          <a:effectLst/>
+                          <a:latin typeface="Times New Roman" panose="02020603050405020304" pitchFamily="18" charset="0"/>
+                          <a:cs typeface="Times New Roman" panose="02020603050405020304" pitchFamily="18" charset="0"/>
+                        </a:rPr>
+                        <a:t>Multiplica dois valores</a:t>
+                      </a:r>
+                    </a:p>
+                  </a:txBody>
+                  <a:tcPr marL="76339" marR="76339" marT="38170" marB="38170" anchor="ctr">
+                    <a:lnL w="12700" cap="flat" cmpd="sng" algn="ctr">
+                      <a:solidFill>
+                        <a:schemeClr val="tx1"/>
+                      </a:solidFill>
+                      <a:prstDash val="solid"/>
+                      <a:round/>
+                      <a:headEnd type="none" w="med" len="med"/>
+                      <a:tailEnd type="none" w="med" len="med"/>
+                    </a:lnL>
+                    <a:lnR w="12700" cap="flat" cmpd="sng" algn="ctr">
+                      <a:solidFill>
+                        <a:schemeClr val="tx1"/>
+                      </a:solidFill>
+                      <a:prstDash val="solid"/>
+                      <a:round/>
+                      <a:headEnd type="none" w="med" len="med"/>
+                      <a:tailEnd type="none" w="med" len="med"/>
+                    </a:lnR>
+                    <a:lnT w="12700" cap="flat" cmpd="sng" algn="ctr">
+                      <a:solidFill>
+                        <a:schemeClr val="tx1"/>
+                      </a:solidFill>
+                      <a:prstDash val="solid"/>
+                      <a:round/>
+                      <a:headEnd type="none" w="med" len="med"/>
+                      <a:tailEnd type="none" w="med" len="med"/>
+                    </a:lnT>
+                    <a:lnB w="12700" cap="flat" cmpd="sng" algn="ctr">
+                      <a:solidFill>
+                        <a:schemeClr val="tx1"/>
+                      </a:solidFill>
+                      <a:prstDash val="solid"/>
+                      <a:round/>
+                      <a:headEnd type="none" w="med" len="med"/>
+                      <a:tailEnd type="none" w="med" len="med"/>
+                    </a:lnB>
+                    <a:noFill/>
+                  </a:tcPr>
+                </a:tc>
+                <a:tc>
+                  <a:txBody>
+                    <a:bodyPr/>
+                    <a:lstStyle/>
+                    <a:p>
+                      <a:pPr algn="ctr">
+                        <a:buNone/>
+                      </a:pPr>
+                      <a:r>
+                        <a:rPr lang="pt-BR" sz="1500" dirty="0">
+                          <a:effectLst/>
+                          <a:latin typeface="Times New Roman" panose="02020603050405020304" pitchFamily="18" charset="0"/>
+                          <a:cs typeface="Times New Roman" panose="02020603050405020304" pitchFamily="18" charset="0"/>
+                        </a:rPr>
+                        <a:t>10 * 3</a:t>
+                      </a:r>
+                    </a:p>
+                  </a:txBody>
+                  <a:tcPr marL="76339" marR="76339" marT="38170" marB="38170" anchor="ctr">
+                    <a:lnL w="12700" cap="flat" cmpd="sng" algn="ctr">
+                      <a:solidFill>
+                        <a:schemeClr val="tx1"/>
+                      </a:solidFill>
+                      <a:prstDash val="solid"/>
+                      <a:round/>
+                      <a:headEnd type="none" w="med" len="med"/>
+                      <a:tailEnd type="none" w="med" len="med"/>
+                    </a:lnL>
+                    <a:lnR w="12700" cap="flat" cmpd="sng" algn="ctr">
+                      <a:solidFill>
+                        <a:schemeClr val="tx1"/>
+                      </a:solidFill>
+                      <a:prstDash val="solid"/>
+                      <a:round/>
+                      <a:headEnd type="none" w="med" len="med"/>
+                      <a:tailEnd type="none" w="med" len="med"/>
+                    </a:lnR>
+                    <a:lnT w="12700" cap="flat" cmpd="sng" algn="ctr">
+                      <a:solidFill>
+                        <a:schemeClr val="tx1"/>
+                      </a:solidFill>
+                      <a:prstDash val="solid"/>
+                      <a:round/>
+                      <a:headEnd type="none" w="med" len="med"/>
+                      <a:tailEnd type="none" w="med" len="med"/>
+                    </a:lnT>
+                    <a:lnB w="12700" cap="flat" cmpd="sng" algn="ctr">
+                      <a:solidFill>
+                        <a:schemeClr val="tx1"/>
+                      </a:solidFill>
+                      <a:prstDash val="solid"/>
+                      <a:round/>
+                      <a:headEnd type="none" w="med" len="med"/>
+                      <a:tailEnd type="none" w="med" len="med"/>
+                    </a:lnB>
+                    <a:noFill/>
+                  </a:tcPr>
+                </a:tc>
+                <a:tc>
+                  <a:txBody>
+                    <a:bodyPr/>
+                    <a:lstStyle/>
+                    <a:p>
+                      <a:pPr algn="ctr">
+                        <a:buNone/>
+                      </a:pPr>
+                      <a:r>
+                        <a:rPr lang="pt-BR" sz="1500">
+                          <a:effectLst/>
+                          <a:latin typeface="Times New Roman" panose="02020603050405020304" pitchFamily="18" charset="0"/>
+                          <a:cs typeface="Times New Roman" panose="02020603050405020304" pitchFamily="18" charset="0"/>
+                        </a:rPr>
+                        <a:t>30</a:t>
+                      </a:r>
+                    </a:p>
+                  </a:txBody>
+                  <a:tcPr marL="76339" marR="76339" marT="38170" marB="38170" anchor="ctr">
+                    <a:lnL w="12700" cap="flat" cmpd="sng" algn="ctr">
+                      <a:solidFill>
+                        <a:schemeClr val="tx1"/>
+                      </a:solidFill>
+                      <a:prstDash val="solid"/>
+                      <a:round/>
+                      <a:headEnd type="none" w="med" len="med"/>
+                      <a:tailEnd type="none" w="med" len="med"/>
+                    </a:lnL>
+                    <a:lnR w="12700" cap="flat" cmpd="sng" algn="ctr">
+                      <a:solidFill>
+                        <a:schemeClr val="tx1"/>
+                      </a:solidFill>
+                      <a:prstDash val="solid"/>
+                      <a:round/>
+                      <a:headEnd type="none" w="med" len="med"/>
+                      <a:tailEnd type="none" w="med" len="med"/>
+                    </a:lnR>
+                    <a:lnT w="12700" cap="flat" cmpd="sng" algn="ctr">
+                      <a:solidFill>
+                        <a:schemeClr val="tx1"/>
+                      </a:solidFill>
+                      <a:prstDash val="solid"/>
+                      <a:round/>
+                      <a:headEnd type="none" w="med" len="med"/>
+                      <a:tailEnd type="none" w="med" len="med"/>
+                    </a:lnT>
+                    <a:lnB w="12700" cap="flat" cmpd="sng" algn="ctr">
+                      <a:solidFill>
+                        <a:schemeClr val="tx1"/>
+                      </a:solidFill>
+                      <a:prstDash val="solid"/>
+                      <a:round/>
+                      <a:headEnd type="none" w="med" len="med"/>
+                      <a:tailEnd type="none" w="med" len="med"/>
+                    </a:lnB>
+                    <a:noFill/>
+                  </a:tcPr>
+                </a:tc>
+                <a:extLst>
+                  <a:ext uri="{0D108BD9-81ED-4DB2-BD59-A6C34878D82A}">
+                    <a16:rowId xmlns:a16="http://schemas.microsoft.com/office/drawing/2014/main" val="513525763"/>
+                  </a:ext>
+                </a:extLst>
+              </a:tr>
+              <a:tr h="353684">
+                <a:tc>
+                  <a:txBody>
+                    <a:bodyPr/>
+                    <a:lstStyle/>
+                    <a:p>
+                      <a:pPr algn="ctr">
+                        <a:buNone/>
+                      </a:pPr>
+                      <a:r>
+                        <a:rPr lang="pt-BR" sz="1500">
+                          <a:effectLst/>
+                          <a:latin typeface="Times New Roman" panose="02020603050405020304" pitchFamily="18" charset="0"/>
+                          <a:cs typeface="Times New Roman" panose="02020603050405020304" pitchFamily="18" charset="0"/>
+                        </a:rPr>
+                        <a:t>/</a:t>
+                      </a:r>
+                    </a:p>
+                  </a:txBody>
+                  <a:tcPr marL="76339" marR="76339" marT="38170" marB="38170" anchor="ctr">
+                    <a:lnL w="12700" cap="flat" cmpd="sng" algn="ctr">
+                      <a:solidFill>
+                        <a:schemeClr val="tx1"/>
+                      </a:solidFill>
+                      <a:prstDash val="solid"/>
+                      <a:round/>
+                      <a:headEnd type="none" w="med" len="med"/>
+                      <a:tailEnd type="none" w="med" len="med"/>
+                    </a:lnL>
+                    <a:lnR w="12700" cap="flat" cmpd="sng" algn="ctr">
+                      <a:solidFill>
+                        <a:schemeClr val="tx1"/>
+                      </a:solidFill>
+                      <a:prstDash val="solid"/>
+                      <a:round/>
+                      <a:headEnd type="none" w="med" len="med"/>
+                      <a:tailEnd type="none" w="med" len="med"/>
+                    </a:lnR>
+                    <a:lnT w="12700" cap="flat" cmpd="sng" algn="ctr">
+                      <a:solidFill>
+                        <a:schemeClr val="tx1"/>
+                      </a:solidFill>
+                      <a:prstDash val="solid"/>
+                      <a:round/>
+                      <a:headEnd type="none" w="med" len="med"/>
+                      <a:tailEnd type="none" w="med" len="med"/>
+                    </a:lnT>
+                    <a:lnB w="12700" cap="flat" cmpd="sng" algn="ctr">
+                      <a:solidFill>
+                        <a:schemeClr val="tx1"/>
+                      </a:solidFill>
+                      <a:prstDash val="solid"/>
+                      <a:round/>
+                      <a:headEnd type="none" w="med" len="med"/>
+                      <a:tailEnd type="none" w="med" len="med"/>
+                    </a:lnB>
+                    <a:noFill/>
+                  </a:tcPr>
+                </a:tc>
+                <a:tc>
+                  <a:txBody>
+                    <a:bodyPr/>
+                    <a:lstStyle/>
+                    <a:p>
+                      <a:pPr algn="ctr">
+                        <a:buNone/>
+                      </a:pPr>
+                      <a:r>
+                        <a:rPr lang="pt-BR" sz="1500">
+                          <a:effectLst/>
+                          <a:latin typeface="Times New Roman" panose="02020603050405020304" pitchFamily="18" charset="0"/>
+                          <a:cs typeface="Times New Roman" panose="02020603050405020304" pitchFamily="18" charset="0"/>
+                        </a:rPr>
+                        <a:t>Divisão</a:t>
+                      </a:r>
+                    </a:p>
+                  </a:txBody>
+                  <a:tcPr marL="76339" marR="76339" marT="38170" marB="38170" anchor="ctr">
+                    <a:lnL w="12700" cap="flat" cmpd="sng" algn="ctr">
+                      <a:solidFill>
+                        <a:schemeClr val="tx1"/>
+                      </a:solidFill>
+                      <a:prstDash val="solid"/>
+                      <a:round/>
+                      <a:headEnd type="none" w="med" len="med"/>
+                      <a:tailEnd type="none" w="med" len="med"/>
+                    </a:lnL>
+                    <a:lnR w="12700" cap="flat" cmpd="sng" algn="ctr">
+                      <a:solidFill>
+                        <a:schemeClr val="tx1"/>
+                      </a:solidFill>
+                      <a:prstDash val="solid"/>
+                      <a:round/>
+                      <a:headEnd type="none" w="med" len="med"/>
+                      <a:tailEnd type="none" w="med" len="med"/>
+                    </a:lnR>
+                    <a:lnT w="12700" cap="flat" cmpd="sng" algn="ctr">
+                      <a:solidFill>
+                        <a:schemeClr val="tx1"/>
+                      </a:solidFill>
+                      <a:prstDash val="solid"/>
+                      <a:round/>
+                      <a:headEnd type="none" w="med" len="med"/>
+                      <a:tailEnd type="none" w="med" len="med"/>
+                    </a:lnT>
+                    <a:lnB w="12700" cap="flat" cmpd="sng" algn="ctr">
+                      <a:solidFill>
+                        <a:schemeClr val="tx1"/>
+                      </a:solidFill>
+                      <a:prstDash val="solid"/>
+                      <a:round/>
+                      <a:headEnd type="none" w="med" len="med"/>
+                      <a:tailEnd type="none" w="med" len="med"/>
+                    </a:lnB>
+                    <a:noFill/>
+                  </a:tcPr>
+                </a:tc>
+                <a:tc>
+                  <a:txBody>
+                    <a:bodyPr/>
+                    <a:lstStyle/>
+                    <a:p>
+                      <a:pPr algn="ctr">
+                        <a:buNone/>
+                      </a:pPr>
+                      <a:r>
+                        <a:rPr lang="pt-BR" sz="1500" dirty="0">
+                          <a:effectLst/>
+                          <a:latin typeface="Times New Roman" panose="02020603050405020304" pitchFamily="18" charset="0"/>
+                          <a:cs typeface="Times New Roman" panose="02020603050405020304" pitchFamily="18" charset="0"/>
+                        </a:rPr>
+                        <a:t>Divide e </a:t>
+                      </a:r>
+                      <a:r>
+                        <a:rPr lang="pt-BR" sz="1500" b="1" dirty="0">
+                          <a:effectLst/>
+                          <a:latin typeface="Times New Roman" panose="02020603050405020304" pitchFamily="18" charset="0"/>
+                          <a:cs typeface="Times New Roman" panose="02020603050405020304" pitchFamily="18" charset="0"/>
+                        </a:rPr>
+                        <a:t>sempre retorna </a:t>
+                      </a:r>
+                      <a:r>
+                        <a:rPr lang="pt-BR" sz="1500" b="1" dirty="0" err="1">
+                          <a:effectLst/>
+                          <a:latin typeface="Times New Roman" panose="02020603050405020304" pitchFamily="18" charset="0"/>
+                          <a:cs typeface="Times New Roman" panose="02020603050405020304" pitchFamily="18" charset="0"/>
+                        </a:rPr>
+                        <a:t>double</a:t>
+                      </a:r>
+                      <a:endParaRPr lang="pt-BR" sz="1500" dirty="0">
+                        <a:effectLst/>
+                        <a:latin typeface="Times New Roman" panose="02020603050405020304" pitchFamily="18" charset="0"/>
+                        <a:cs typeface="Times New Roman" panose="02020603050405020304" pitchFamily="18" charset="0"/>
+                      </a:endParaRPr>
+                    </a:p>
+                  </a:txBody>
+                  <a:tcPr marL="76339" marR="76339" marT="38170" marB="38170" anchor="ctr">
+                    <a:lnL w="12700" cap="flat" cmpd="sng" algn="ctr">
+                      <a:solidFill>
+                        <a:schemeClr val="tx1"/>
+                      </a:solidFill>
+                      <a:prstDash val="solid"/>
+                      <a:round/>
+                      <a:headEnd type="none" w="med" len="med"/>
+                      <a:tailEnd type="none" w="med" len="med"/>
+                    </a:lnL>
+                    <a:lnR w="12700" cap="flat" cmpd="sng" algn="ctr">
+                      <a:solidFill>
+                        <a:schemeClr val="tx1"/>
+                      </a:solidFill>
+                      <a:prstDash val="solid"/>
+                      <a:round/>
+                      <a:headEnd type="none" w="med" len="med"/>
+                      <a:tailEnd type="none" w="med" len="med"/>
+                    </a:lnR>
+                    <a:lnT w="12700" cap="flat" cmpd="sng" algn="ctr">
+                      <a:solidFill>
+                        <a:schemeClr val="tx1"/>
+                      </a:solidFill>
+                      <a:prstDash val="solid"/>
+                      <a:round/>
+                      <a:headEnd type="none" w="med" len="med"/>
+                      <a:tailEnd type="none" w="med" len="med"/>
+                    </a:lnT>
+                    <a:lnB w="12700" cap="flat" cmpd="sng" algn="ctr">
+                      <a:solidFill>
+                        <a:schemeClr val="tx1"/>
+                      </a:solidFill>
+                      <a:prstDash val="solid"/>
+                      <a:round/>
+                      <a:headEnd type="none" w="med" len="med"/>
+                      <a:tailEnd type="none" w="med" len="med"/>
+                    </a:lnB>
+                    <a:noFill/>
+                  </a:tcPr>
+                </a:tc>
+                <a:tc>
+                  <a:txBody>
+                    <a:bodyPr/>
+                    <a:lstStyle/>
+                    <a:p>
+                      <a:pPr algn="ctr">
+                        <a:buNone/>
+                      </a:pPr>
+                      <a:r>
+                        <a:rPr lang="pt-BR" sz="1500">
+                          <a:effectLst/>
+                          <a:latin typeface="Times New Roman" panose="02020603050405020304" pitchFamily="18" charset="0"/>
+                          <a:cs typeface="Times New Roman" panose="02020603050405020304" pitchFamily="18" charset="0"/>
+                        </a:rPr>
+                        <a:t>10 / 3</a:t>
+                      </a:r>
+                    </a:p>
+                  </a:txBody>
+                  <a:tcPr marL="76339" marR="76339" marT="38170" marB="38170" anchor="ctr">
+                    <a:lnL w="12700" cap="flat" cmpd="sng" algn="ctr">
+                      <a:solidFill>
+                        <a:schemeClr val="tx1"/>
+                      </a:solidFill>
+                      <a:prstDash val="solid"/>
+                      <a:round/>
+                      <a:headEnd type="none" w="med" len="med"/>
+                      <a:tailEnd type="none" w="med" len="med"/>
+                    </a:lnL>
+                    <a:lnR w="12700" cap="flat" cmpd="sng" algn="ctr">
+                      <a:solidFill>
+                        <a:schemeClr val="tx1"/>
+                      </a:solidFill>
+                      <a:prstDash val="solid"/>
+                      <a:round/>
+                      <a:headEnd type="none" w="med" len="med"/>
+                      <a:tailEnd type="none" w="med" len="med"/>
+                    </a:lnR>
+                    <a:lnT w="12700" cap="flat" cmpd="sng" algn="ctr">
+                      <a:solidFill>
+                        <a:schemeClr val="tx1"/>
+                      </a:solidFill>
+                      <a:prstDash val="solid"/>
+                      <a:round/>
+                      <a:headEnd type="none" w="med" len="med"/>
+                      <a:tailEnd type="none" w="med" len="med"/>
+                    </a:lnT>
+                    <a:lnB w="12700" cap="flat" cmpd="sng" algn="ctr">
+                      <a:solidFill>
+                        <a:schemeClr val="tx1"/>
+                      </a:solidFill>
+                      <a:prstDash val="solid"/>
+                      <a:round/>
+                      <a:headEnd type="none" w="med" len="med"/>
+                      <a:tailEnd type="none" w="med" len="med"/>
+                    </a:lnB>
+                    <a:noFill/>
+                  </a:tcPr>
+                </a:tc>
+                <a:tc>
+                  <a:txBody>
+                    <a:bodyPr/>
+                    <a:lstStyle/>
+                    <a:p>
+                      <a:pPr algn="ctr">
+                        <a:buNone/>
+                      </a:pPr>
+                      <a:r>
+                        <a:rPr lang="pt-BR" sz="1500" dirty="0">
+                          <a:effectLst/>
+                          <a:latin typeface="Times New Roman" panose="02020603050405020304" pitchFamily="18" charset="0"/>
+                          <a:cs typeface="Times New Roman" panose="02020603050405020304" pitchFamily="18" charset="0"/>
+                        </a:rPr>
+                        <a:t>3.333...</a:t>
+                      </a:r>
+                    </a:p>
+                  </a:txBody>
+                  <a:tcPr marL="76339" marR="76339" marT="38170" marB="38170" anchor="ctr">
+                    <a:lnL w="12700" cap="flat" cmpd="sng" algn="ctr">
+                      <a:solidFill>
+                        <a:schemeClr val="tx1"/>
+                      </a:solidFill>
+                      <a:prstDash val="solid"/>
+                      <a:round/>
+                      <a:headEnd type="none" w="med" len="med"/>
+                      <a:tailEnd type="none" w="med" len="med"/>
+                    </a:lnL>
+                    <a:lnR w="12700" cap="flat" cmpd="sng" algn="ctr">
+                      <a:solidFill>
+                        <a:schemeClr val="tx1"/>
+                      </a:solidFill>
+                      <a:prstDash val="solid"/>
+                      <a:round/>
+                      <a:headEnd type="none" w="med" len="med"/>
+                      <a:tailEnd type="none" w="med" len="med"/>
+                    </a:lnR>
+                    <a:lnT w="12700" cap="flat" cmpd="sng" algn="ctr">
+                      <a:solidFill>
+                        <a:schemeClr val="tx1"/>
+                      </a:solidFill>
+                      <a:prstDash val="solid"/>
+                      <a:round/>
+                      <a:headEnd type="none" w="med" len="med"/>
+                      <a:tailEnd type="none" w="med" len="med"/>
+                    </a:lnT>
+                    <a:lnB w="12700" cap="flat" cmpd="sng" algn="ctr">
+                      <a:solidFill>
+                        <a:schemeClr val="tx1"/>
+                      </a:solidFill>
+                      <a:prstDash val="solid"/>
+                      <a:round/>
+                      <a:headEnd type="none" w="med" len="med"/>
+                      <a:tailEnd type="none" w="med" len="med"/>
+                    </a:lnB>
+                    <a:noFill/>
+                  </a:tcPr>
+                </a:tc>
+                <a:extLst>
+                  <a:ext uri="{0D108BD9-81ED-4DB2-BD59-A6C34878D82A}">
+                    <a16:rowId xmlns:a16="http://schemas.microsoft.com/office/drawing/2014/main" val="845728738"/>
+                  </a:ext>
+                </a:extLst>
+              </a:tr>
+              <a:tr h="353684">
+                <a:tc>
+                  <a:txBody>
+                    <a:bodyPr/>
+                    <a:lstStyle/>
+                    <a:p>
+                      <a:pPr algn="ctr">
+                        <a:buNone/>
+                      </a:pPr>
+                      <a:r>
+                        <a:rPr lang="pt-BR" sz="1500">
+                          <a:effectLst/>
+                          <a:latin typeface="Times New Roman" panose="02020603050405020304" pitchFamily="18" charset="0"/>
+                          <a:cs typeface="Times New Roman" panose="02020603050405020304" pitchFamily="18" charset="0"/>
+                        </a:rPr>
+                        <a:t>~/</a:t>
+                      </a:r>
+                    </a:p>
+                  </a:txBody>
+                  <a:tcPr marL="76339" marR="76339" marT="38170" marB="38170" anchor="ctr">
+                    <a:lnL w="12700" cap="flat" cmpd="sng" algn="ctr">
+                      <a:solidFill>
+                        <a:schemeClr val="tx1"/>
+                      </a:solidFill>
+                      <a:prstDash val="solid"/>
+                      <a:round/>
+                      <a:headEnd type="none" w="med" len="med"/>
+                      <a:tailEnd type="none" w="med" len="med"/>
+                    </a:lnL>
+                    <a:lnR w="12700" cap="flat" cmpd="sng" algn="ctr">
+                      <a:solidFill>
+                        <a:schemeClr val="tx1"/>
+                      </a:solidFill>
+                      <a:prstDash val="solid"/>
+                      <a:round/>
+                      <a:headEnd type="none" w="med" len="med"/>
+                      <a:tailEnd type="none" w="med" len="med"/>
+                    </a:lnR>
+                    <a:lnT w="12700" cap="flat" cmpd="sng" algn="ctr">
+                      <a:solidFill>
+                        <a:schemeClr val="tx1"/>
+                      </a:solidFill>
+                      <a:prstDash val="solid"/>
+                      <a:round/>
+                      <a:headEnd type="none" w="med" len="med"/>
+                      <a:tailEnd type="none" w="med" len="med"/>
+                    </a:lnT>
+                    <a:lnB w="12700" cap="flat" cmpd="sng" algn="ctr">
+                      <a:solidFill>
+                        <a:schemeClr val="tx1"/>
+                      </a:solidFill>
+                      <a:prstDash val="solid"/>
+                      <a:round/>
+                      <a:headEnd type="none" w="med" len="med"/>
+                      <a:tailEnd type="none" w="med" len="med"/>
+                    </a:lnB>
+                    <a:noFill/>
+                  </a:tcPr>
+                </a:tc>
+                <a:tc>
+                  <a:txBody>
+                    <a:bodyPr/>
+                    <a:lstStyle/>
+                    <a:p>
+                      <a:pPr algn="ctr">
+                        <a:buNone/>
+                      </a:pPr>
+                      <a:r>
+                        <a:rPr lang="pt-BR" sz="1500">
+                          <a:effectLst/>
+                          <a:latin typeface="Times New Roman" panose="02020603050405020304" pitchFamily="18" charset="0"/>
+                          <a:cs typeface="Times New Roman" panose="02020603050405020304" pitchFamily="18" charset="0"/>
+                        </a:rPr>
+                        <a:t>Divisão inteira</a:t>
+                      </a:r>
+                    </a:p>
+                  </a:txBody>
+                  <a:tcPr marL="76339" marR="76339" marT="38170" marB="38170" anchor="ctr">
+                    <a:lnL w="12700" cap="flat" cmpd="sng" algn="ctr">
+                      <a:solidFill>
+                        <a:schemeClr val="tx1"/>
+                      </a:solidFill>
+                      <a:prstDash val="solid"/>
+                      <a:round/>
+                      <a:headEnd type="none" w="med" len="med"/>
+                      <a:tailEnd type="none" w="med" len="med"/>
+                    </a:lnL>
+                    <a:lnR w="12700" cap="flat" cmpd="sng" algn="ctr">
+                      <a:solidFill>
+                        <a:schemeClr val="tx1"/>
+                      </a:solidFill>
+                      <a:prstDash val="solid"/>
+                      <a:round/>
+                      <a:headEnd type="none" w="med" len="med"/>
+                      <a:tailEnd type="none" w="med" len="med"/>
+                    </a:lnR>
+                    <a:lnT w="12700" cap="flat" cmpd="sng" algn="ctr">
+                      <a:solidFill>
+                        <a:schemeClr val="tx1"/>
+                      </a:solidFill>
+                      <a:prstDash val="solid"/>
+                      <a:round/>
+                      <a:headEnd type="none" w="med" len="med"/>
+                      <a:tailEnd type="none" w="med" len="med"/>
+                    </a:lnT>
+                    <a:lnB w="12700" cap="flat" cmpd="sng" algn="ctr">
+                      <a:solidFill>
+                        <a:schemeClr val="tx1"/>
+                      </a:solidFill>
+                      <a:prstDash val="solid"/>
+                      <a:round/>
+                      <a:headEnd type="none" w="med" len="med"/>
+                      <a:tailEnd type="none" w="med" len="med"/>
+                    </a:lnB>
+                    <a:noFill/>
+                  </a:tcPr>
+                </a:tc>
+                <a:tc>
+                  <a:txBody>
+                    <a:bodyPr/>
+                    <a:lstStyle/>
+                    <a:p>
+                      <a:pPr algn="ctr">
+                        <a:buNone/>
+                      </a:pPr>
+                      <a:r>
+                        <a:rPr lang="pt-BR" sz="1500">
+                          <a:effectLst/>
+                          <a:latin typeface="Times New Roman" panose="02020603050405020304" pitchFamily="18" charset="0"/>
+                          <a:cs typeface="Times New Roman" panose="02020603050405020304" pitchFamily="18" charset="0"/>
+                        </a:rPr>
+                        <a:t>Divide e </a:t>
+                      </a:r>
+                      <a:r>
+                        <a:rPr lang="pt-BR" sz="1500" b="1">
+                          <a:effectLst/>
+                          <a:latin typeface="Times New Roman" panose="02020603050405020304" pitchFamily="18" charset="0"/>
+                          <a:cs typeface="Times New Roman" panose="02020603050405020304" pitchFamily="18" charset="0"/>
+                        </a:rPr>
+                        <a:t>descarta a parte decimal</a:t>
+                      </a:r>
+                      <a:endParaRPr lang="pt-BR" sz="1500">
+                        <a:effectLst/>
+                        <a:latin typeface="Times New Roman" panose="02020603050405020304" pitchFamily="18" charset="0"/>
+                        <a:cs typeface="Times New Roman" panose="02020603050405020304" pitchFamily="18" charset="0"/>
+                      </a:endParaRPr>
+                    </a:p>
+                  </a:txBody>
+                  <a:tcPr marL="76339" marR="76339" marT="38170" marB="38170" anchor="ctr">
+                    <a:lnL w="12700" cap="flat" cmpd="sng" algn="ctr">
+                      <a:solidFill>
+                        <a:schemeClr val="tx1"/>
+                      </a:solidFill>
+                      <a:prstDash val="solid"/>
+                      <a:round/>
+                      <a:headEnd type="none" w="med" len="med"/>
+                      <a:tailEnd type="none" w="med" len="med"/>
+                    </a:lnL>
+                    <a:lnR w="12700" cap="flat" cmpd="sng" algn="ctr">
+                      <a:solidFill>
+                        <a:schemeClr val="tx1"/>
+                      </a:solidFill>
+                      <a:prstDash val="solid"/>
+                      <a:round/>
+                      <a:headEnd type="none" w="med" len="med"/>
+                      <a:tailEnd type="none" w="med" len="med"/>
+                    </a:lnR>
+                    <a:lnT w="12700" cap="flat" cmpd="sng" algn="ctr">
+                      <a:solidFill>
+                        <a:schemeClr val="tx1"/>
+                      </a:solidFill>
+                      <a:prstDash val="solid"/>
+                      <a:round/>
+                      <a:headEnd type="none" w="med" len="med"/>
+                      <a:tailEnd type="none" w="med" len="med"/>
+                    </a:lnT>
+                    <a:lnB w="12700" cap="flat" cmpd="sng" algn="ctr">
+                      <a:solidFill>
+                        <a:schemeClr val="tx1"/>
+                      </a:solidFill>
+                      <a:prstDash val="solid"/>
+                      <a:round/>
+                      <a:headEnd type="none" w="med" len="med"/>
+                      <a:tailEnd type="none" w="med" len="med"/>
+                    </a:lnB>
+                    <a:noFill/>
+                  </a:tcPr>
+                </a:tc>
+                <a:tc>
+                  <a:txBody>
+                    <a:bodyPr/>
+                    <a:lstStyle/>
+                    <a:p>
+                      <a:pPr algn="ctr">
+                        <a:buNone/>
+                      </a:pPr>
+                      <a:r>
+                        <a:rPr lang="pt-BR" sz="1500">
+                          <a:effectLst/>
+                          <a:latin typeface="Times New Roman" panose="02020603050405020304" pitchFamily="18" charset="0"/>
+                          <a:cs typeface="Times New Roman" panose="02020603050405020304" pitchFamily="18" charset="0"/>
+                        </a:rPr>
+                        <a:t>10 ~/ 3</a:t>
+                      </a:r>
+                    </a:p>
+                  </a:txBody>
+                  <a:tcPr marL="76339" marR="76339" marT="38170" marB="38170" anchor="ctr">
+                    <a:lnL w="12700" cap="flat" cmpd="sng" algn="ctr">
+                      <a:solidFill>
+                        <a:schemeClr val="tx1"/>
+                      </a:solidFill>
+                      <a:prstDash val="solid"/>
+                      <a:round/>
+                      <a:headEnd type="none" w="med" len="med"/>
+                      <a:tailEnd type="none" w="med" len="med"/>
+                    </a:lnL>
+                    <a:lnR w="12700" cap="flat" cmpd="sng" algn="ctr">
+                      <a:solidFill>
+                        <a:schemeClr val="tx1"/>
+                      </a:solidFill>
+                      <a:prstDash val="solid"/>
+                      <a:round/>
+                      <a:headEnd type="none" w="med" len="med"/>
+                      <a:tailEnd type="none" w="med" len="med"/>
+                    </a:lnR>
+                    <a:lnT w="12700" cap="flat" cmpd="sng" algn="ctr">
+                      <a:solidFill>
+                        <a:schemeClr val="tx1"/>
+                      </a:solidFill>
+                      <a:prstDash val="solid"/>
+                      <a:round/>
+                      <a:headEnd type="none" w="med" len="med"/>
+                      <a:tailEnd type="none" w="med" len="med"/>
+                    </a:lnT>
+                    <a:lnB w="12700" cap="flat" cmpd="sng" algn="ctr">
+                      <a:solidFill>
+                        <a:schemeClr val="tx1"/>
+                      </a:solidFill>
+                      <a:prstDash val="solid"/>
+                      <a:round/>
+                      <a:headEnd type="none" w="med" len="med"/>
+                      <a:tailEnd type="none" w="med" len="med"/>
+                    </a:lnB>
+                    <a:noFill/>
+                  </a:tcPr>
+                </a:tc>
+                <a:tc>
+                  <a:txBody>
+                    <a:bodyPr/>
+                    <a:lstStyle/>
+                    <a:p>
+                      <a:pPr algn="ctr">
+                        <a:buNone/>
+                      </a:pPr>
+                      <a:r>
+                        <a:rPr lang="pt-BR" sz="1500" dirty="0">
+                          <a:effectLst/>
+                          <a:latin typeface="Times New Roman" panose="02020603050405020304" pitchFamily="18" charset="0"/>
+                          <a:cs typeface="Times New Roman" panose="02020603050405020304" pitchFamily="18" charset="0"/>
+                        </a:rPr>
+                        <a:t>3</a:t>
+                      </a:r>
+                    </a:p>
+                  </a:txBody>
+                  <a:tcPr marL="76339" marR="76339" marT="38170" marB="38170" anchor="ctr">
+                    <a:lnL w="12700" cap="flat" cmpd="sng" algn="ctr">
+                      <a:solidFill>
+                        <a:schemeClr val="tx1"/>
+                      </a:solidFill>
+                      <a:prstDash val="solid"/>
+                      <a:round/>
+                      <a:headEnd type="none" w="med" len="med"/>
+                      <a:tailEnd type="none" w="med" len="med"/>
+                    </a:lnL>
+                    <a:lnR w="12700" cap="flat" cmpd="sng" algn="ctr">
+                      <a:solidFill>
+                        <a:schemeClr val="tx1"/>
+                      </a:solidFill>
+                      <a:prstDash val="solid"/>
+                      <a:round/>
+                      <a:headEnd type="none" w="med" len="med"/>
+                      <a:tailEnd type="none" w="med" len="med"/>
+                    </a:lnR>
+                    <a:lnT w="12700" cap="flat" cmpd="sng" algn="ctr">
+                      <a:solidFill>
+                        <a:schemeClr val="tx1"/>
+                      </a:solidFill>
+                      <a:prstDash val="solid"/>
+                      <a:round/>
+                      <a:headEnd type="none" w="med" len="med"/>
+                      <a:tailEnd type="none" w="med" len="med"/>
+                    </a:lnT>
+                    <a:lnB w="12700" cap="flat" cmpd="sng" algn="ctr">
+                      <a:solidFill>
+                        <a:schemeClr val="tx1"/>
+                      </a:solidFill>
+                      <a:prstDash val="solid"/>
+                      <a:round/>
+                      <a:headEnd type="none" w="med" len="med"/>
+                      <a:tailEnd type="none" w="med" len="med"/>
+                    </a:lnB>
+                    <a:noFill/>
+                  </a:tcPr>
+                </a:tc>
+                <a:extLst>
+                  <a:ext uri="{0D108BD9-81ED-4DB2-BD59-A6C34878D82A}">
+                    <a16:rowId xmlns:a16="http://schemas.microsoft.com/office/drawing/2014/main" val="1679255396"/>
+                  </a:ext>
+                </a:extLst>
+              </a:tr>
+              <a:tr h="353684">
+                <a:tc>
+                  <a:txBody>
+                    <a:bodyPr/>
+                    <a:lstStyle/>
+                    <a:p>
+                      <a:pPr algn="ctr">
+                        <a:buNone/>
+                      </a:pPr>
+                      <a:r>
+                        <a:rPr lang="pt-BR" sz="1500">
+                          <a:effectLst/>
+                          <a:latin typeface="Times New Roman" panose="02020603050405020304" pitchFamily="18" charset="0"/>
+                          <a:cs typeface="Times New Roman" panose="02020603050405020304" pitchFamily="18" charset="0"/>
+                        </a:rPr>
+                        <a:t>%</a:t>
+                      </a:r>
+                    </a:p>
+                  </a:txBody>
+                  <a:tcPr marL="76339" marR="76339" marT="38170" marB="38170" anchor="ctr">
+                    <a:lnL w="12700" cap="flat" cmpd="sng" algn="ctr">
+                      <a:solidFill>
+                        <a:schemeClr val="tx1"/>
+                      </a:solidFill>
+                      <a:prstDash val="solid"/>
+                      <a:round/>
+                      <a:headEnd type="none" w="med" len="med"/>
+                      <a:tailEnd type="none" w="med" len="med"/>
+                    </a:lnL>
+                    <a:lnR w="12700" cap="flat" cmpd="sng" algn="ctr">
+                      <a:solidFill>
+                        <a:schemeClr val="tx1"/>
+                      </a:solidFill>
+                      <a:prstDash val="solid"/>
+                      <a:round/>
+                      <a:headEnd type="none" w="med" len="med"/>
+                      <a:tailEnd type="none" w="med" len="med"/>
+                    </a:lnR>
+                    <a:lnT w="12700" cap="flat" cmpd="sng" algn="ctr">
+                      <a:solidFill>
+                        <a:schemeClr val="tx1"/>
+                      </a:solidFill>
+                      <a:prstDash val="solid"/>
+                      <a:round/>
+                      <a:headEnd type="none" w="med" len="med"/>
+                      <a:tailEnd type="none" w="med" len="med"/>
+                    </a:lnT>
+                    <a:lnB w="12700" cap="flat" cmpd="sng" algn="ctr">
+                      <a:solidFill>
+                        <a:schemeClr val="tx1"/>
+                      </a:solidFill>
+                      <a:prstDash val="solid"/>
+                      <a:round/>
+                      <a:headEnd type="none" w="med" len="med"/>
+                      <a:tailEnd type="none" w="med" len="med"/>
+                    </a:lnB>
+                    <a:noFill/>
+                  </a:tcPr>
+                </a:tc>
+                <a:tc>
+                  <a:txBody>
+                    <a:bodyPr/>
+                    <a:lstStyle/>
+                    <a:p>
+                      <a:pPr algn="ctr">
+                        <a:buNone/>
+                      </a:pPr>
+                      <a:r>
+                        <a:rPr lang="pt-BR" sz="1500">
+                          <a:effectLst/>
+                          <a:latin typeface="Times New Roman" panose="02020603050405020304" pitchFamily="18" charset="0"/>
+                          <a:cs typeface="Times New Roman" panose="02020603050405020304" pitchFamily="18" charset="0"/>
+                        </a:rPr>
+                        <a:t>Módulo (resto)</a:t>
+                      </a:r>
+                    </a:p>
+                  </a:txBody>
+                  <a:tcPr marL="76339" marR="76339" marT="38170" marB="38170" anchor="ctr">
+                    <a:lnL w="12700" cap="flat" cmpd="sng" algn="ctr">
+                      <a:solidFill>
+                        <a:schemeClr val="tx1"/>
+                      </a:solidFill>
+                      <a:prstDash val="solid"/>
+                      <a:round/>
+                      <a:headEnd type="none" w="med" len="med"/>
+                      <a:tailEnd type="none" w="med" len="med"/>
+                    </a:lnL>
+                    <a:lnR w="12700" cap="flat" cmpd="sng" algn="ctr">
+                      <a:solidFill>
+                        <a:schemeClr val="tx1"/>
+                      </a:solidFill>
+                      <a:prstDash val="solid"/>
+                      <a:round/>
+                      <a:headEnd type="none" w="med" len="med"/>
+                      <a:tailEnd type="none" w="med" len="med"/>
+                    </a:lnR>
+                    <a:lnT w="12700" cap="flat" cmpd="sng" algn="ctr">
+                      <a:solidFill>
+                        <a:schemeClr val="tx1"/>
+                      </a:solidFill>
+                      <a:prstDash val="solid"/>
+                      <a:round/>
+                      <a:headEnd type="none" w="med" len="med"/>
+                      <a:tailEnd type="none" w="med" len="med"/>
+                    </a:lnT>
+                    <a:lnB w="12700" cap="flat" cmpd="sng" algn="ctr">
+                      <a:solidFill>
+                        <a:schemeClr val="tx1"/>
+                      </a:solidFill>
+                      <a:prstDash val="solid"/>
+                      <a:round/>
+                      <a:headEnd type="none" w="med" len="med"/>
+                      <a:tailEnd type="none" w="med" len="med"/>
+                    </a:lnB>
+                    <a:noFill/>
+                  </a:tcPr>
+                </a:tc>
+                <a:tc>
+                  <a:txBody>
+                    <a:bodyPr/>
+                    <a:lstStyle/>
+                    <a:p>
+                      <a:pPr algn="ctr">
+                        <a:buNone/>
+                      </a:pPr>
+                      <a:r>
+                        <a:rPr lang="pt-BR" sz="1500" dirty="0">
+                          <a:effectLst/>
+                          <a:latin typeface="Times New Roman" panose="02020603050405020304" pitchFamily="18" charset="0"/>
+                          <a:cs typeface="Times New Roman" panose="02020603050405020304" pitchFamily="18" charset="0"/>
+                        </a:rPr>
+                        <a:t>Retorna o </a:t>
+                      </a:r>
+                      <a:r>
+                        <a:rPr lang="pt-BR" sz="1500" b="1" dirty="0">
+                          <a:effectLst/>
+                          <a:latin typeface="Times New Roman" panose="02020603050405020304" pitchFamily="18" charset="0"/>
+                          <a:cs typeface="Times New Roman" panose="02020603050405020304" pitchFamily="18" charset="0"/>
+                        </a:rPr>
+                        <a:t>resto</a:t>
+                      </a:r>
+                      <a:r>
+                        <a:rPr lang="pt-BR" sz="1500" dirty="0">
+                          <a:effectLst/>
+                          <a:latin typeface="Times New Roman" panose="02020603050405020304" pitchFamily="18" charset="0"/>
+                          <a:cs typeface="Times New Roman" panose="02020603050405020304" pitchFamily="18" charset="0"/>
+                        </a:rPr>
+                        <a:t> da divisão</a:t>
+                      </a:r>
+                    </a:p>
+                  </a:txBody>
+                  <a:tcPr marL="76339" marR="76339" marT="38170" marB="38170" anchor="ctr">
+                    <a:lnL w="12700" cap="flat" cmpd="sng" algn="ctr">
+                      <a:solidFill>
+                        <a:schemeClr val="tx1"/>
+                      </a:solidFill>
+                      <a:prstDash val="solid"/>
+                      <a:round/>
+                      <a:headEnd type="none" w="med" len="med"/>
+                      <a:tailEnd type="none" w="med" len="med"/>
+                    </a:lnL>
+                    <a:lnR w="12700" cap="flat" cmpd="sng" algn="ctr">
+                      <a:solidFill>
+                        <a:schemeClr val="tx1"/>
+                      </a:solidFill>
+                      <a:prstDash val="solid"/>
+                      <a:round/>
+                      <a:headEnd type="none" w="med" len="med"/>
+                      <a:tailEnd type="none" w="med" len="med"/>
+                    </a:lnR>
+                    <a:lnT w="12700" cap="flat" cmpd="sng" algn="ctr">
+                      <a:solidFill>
+                        <a:schemeClr val="tx1"/>
+                      </a:solidFill>
+                      <a:prstDash val="solid"/>
+                      <a:round/>
+                      <a:headEnd type="none" w="med" len="med"/>
+                      <a:tailEnd type="none" w="med" len="med"/>
+                    </a:lnT>
+                    <a:lnB w="12700" cap="flat" cmpd="sng" algn="ctr">
+                      <a:solidFill>
+                        <a:schemeClr val="tx1"/>
+                      </a:solidFill>
+                      <a:prstDash val="solid"/>
+                      <a:round/>
+                      <a:headEnd type="none" w="med" len="med"/>
+                      <a:tailEnd type="none" w="med" len="med"/>
+                    </a:lnB>
+                    <a:noFill/>
+                  </a:tcPr>
+                </a:tc>
+                <a:tc>
+                  <a:txBody>
+                    <a:bodyPr/>
+                    <a:lstStyle/>
+                    <a:p>
+                      <a:pPr algn="ctr">
+                        <a:buNone/>
+                      </a:pPr>
+                      <a:r>
+                        <a:rPr lang="pt-BR" sz="1500">
+                          <a:effectLst/>
+                          <a:latin typeface="Times New Roman" panose="02020603050405020304" pitchFamily="18" charset="0"/>
+                          <a:cs typeface="Times New Roman" panose="02020603050405020304" pitchFamily="18" charset="0"/>
+                        </a:rPr>
+                        <a:t>10 % 3</a:t>
+                      </a:r>
+                    </a:p>
+                  </a:txBody>
+                  <a:tcPr marL="76339" marR="76339" marT="38170" marB="38170" anchor="ctr">
+                    <a:lnL w="12700" cap="flat" cmpd="sng" algn="ctr">
+                      <a:solidFill>
+                        <a:schemeClr val="tx1"/>
+                      </a:solidFill>
+                      <a:prstDash val="solid"/>
+                      <a:round/>
+                      <a:headEnd type="none" w="med" len="med"/>
+                      <a:tailEnd type="none" w="med" len="med"/>
+                    </a:lnL>
+                    <a:lnR w="12700" cap="flat" cmpd="sng" algn="ctr">
+                      <a:solidFill>
+                        <a:schemeClr val="tx1"/>
+                      </a:solidFill>
+                      <a:prstDash val="solid"/>
+                      <a:round/>
+                      <a:headEnd type="none" w="med" len="med"/>
+                      <a:tailEnd type="none" w="med" len="med"/>
+                    </a:lnR>
+                    <a:lnT w="12700" cap="flat" cmpd="sng" algn="ctr">
+                      <a:solidFill>
+                        <a:schemeClr val="tx1"/>
+                      </a:solidFill>
+                      <a:prstDash val="solid"/>
+                      <a:round/>
+                      <a:headEnd type="none" w="med" len="med"/>
+                      <a:tailEnd type="none" w="med" len="med"/>
+                    </a:lnT>
+                    <a:lnB w="12700" cap="flat" cmpd="sng" algn="ctr">
+                      <a:solidFill>
+                        <a:schemeClr val="tx1"/>
+                      </a:solidFill>
+                      <a:prstDash val="solid"/>
+                      <a:round/>
+                      <a:headEnd type="none" w="med" len="med"/>
+                      <a:tailEnd type="none" w="med" len="med"/>
+                    </a:lnB>
+                    <a:noFill/>
+                  </a:tcPr>
+                </a:tc>
+                <a:tc>
+                  <a:txBody>
+                    <a:bodyPr/>
+                    <a:lstStyle/>
+                    <a:p>
+                      <a:pPr algn="ctr">
+                        <a:buNone/>
+                      </a:pPr>
+                      <a:r>
+                        <a:rPr lang="pt-BR" sz="1500" dirty="0">
+                          <a:effectLst/>
+                          <a:latin typeface="Times New Roman" panose="02020603050405020304" pitchFamily="18" charset="0"/>
+                          <a:cs typeface="Times New Roman" panose="02020603050405020304" pitchFamily="18" charset="0"/>
+                        </a:rPr>
+                        <a:t>1</a:t>
+                      </a:r>
+                    </a:p>
+                  </a:txBody>
+                  <a:tcPr marL="76339" marR="76339" marT="38170" marB="38170" anchor="ctr">
+                    <a:lnL w="12700" cap="flat" cmpd="sng" algn="ctr">
+                      <a:solidFill>
+                        <a:schemeClr val="tx1"/>
+                      </a:solidFill>
+                      <a:prstDash val="solid"/>
+                      <a:round/>
+                      <a:headEnd type="none" w="med" len="med"/>
+                      <a:tailEnd type="none" w="med" len="med"/>
+                    </a:lnL>
+                    <a:lnR w="12700" cap="flat" cmpd="sng" algn="ctr">
+                      <a:solidFill>
+                        <a:schemeClr val="tx1"/>
+                      </a:solidFill>
+                      <a:prstDash val="solid"/>
+                      <a:round/>
+                      <a:headEnd type="none" w="med" len="med"/>
+                      <a:tailEnd type="none" w="med" len="med"/>
+                    </a:lnR>
+                    <a:lnT w="12700" cap="flat" cmpd="sng" algn="ctr">
+                      <a:solidFill>
+                        <a:schemeClr val="tx1"/>
+                      </a:solidFill>
+                      <a:prstDash val="solid"/>
+                      <a:round/>
+                      <a:headEnd type="none" w="med" len="med"/>
+                      <a:tailEnd type="none" w="med" len="med"/>
+                    </a:lnT>
+                    <a:lnB w="12700" cap="flat" cmpd="sng" algn="ctr">
+                      <a:solidFill>
+                        <a:schemeClr val="tx1"/>
+                      </a:solidFill>
+                      <a:prstDash val="solid"/>
+                      <a:round/>
+                      <a:headEnd type="none" w="med" len="med"/>
+                      <a:tailEnd type="none" w="med" len="med"/>
+                    </a:lnB>
+                    <a:noFill/>
+                  </a:tcPr>
+                </a:tc>
+                <a:extLst>
+                  <a:ext uri="{0D108BD9-81ED-4DB2-BD59-A6C34878D82A}">
+                    <a16:rowId xmlns:a16="http://schemas.microsoft.com/office/drawing/2014/main" val="1961285342"/>
+                  </a:ext>
+                </a:extLst>
+              </a:tr>
+              <a:tr h="353684">
+                <a:tc>
+                  <a:txBody>
+                    <a:bodyPr/>
+                    <a:lstStyle/>
+                    <a:p>
+                      <a:pPr algn="ctr">
+                        <a:buNone/>
+                      </a:pPr>
+                      <a:r>
+                        <a:rPr lang="pt-BR" sz="1500">
+                          <a:effectLst/>
+                          <a:latin typeface="Times New Roman" panose="02020603050405020304" pitchFamily="18" charset="0"/>
+                          <a:cs typeface="Times New Roman" panose="02020603050405020304" pitchFamily="18" charset="0"/>
+                        </a:rPr>
+                        <a:t>++</a:t>
+                      </a:r>
+                    </a:p>
+                  </a:txBody>
+                  <a:tcPr marL="76339" marR="76339" marT="38170" marB="38170" anchor="ctr">
+                    <a:lnL w="12700" cap="flat" cmpd="sng" algn="ctr">
+                      <a:solidFill>
+                        <a:schemeClr val="tx1"/>
+                      </a:solidFill>
+                      <a:prstDash val="solid"/>
+                      <a:round/>
+                      <a:headEnd type="none" w="med" len="med"/>
+                      <a:tailEnd type="none" w="med" len="med"/>
+                    </a:lnL>
+                    <a:lnR w="12700" cap="flat" cmpd="sng" algn="ctr">
+                      <a:solidFill>
+                        <a:schemeClr val="tx1"/>
+                      </a:solidFill>
+                      <a:prstDash val="solid"/>
+                      <a:round/>
+                      <a:headEnd type="none" w="med" len="med"/>
+                      <a:tailEnd type="none" w="med" len="med"/>
+                    </a:lnR>
+                    <a:lnT w="12700" cap="flat" cmpd="sng" algn="ctr">
+                      <a:solidFill>
+                        <a:schemeClr val="tx1"/>
+                      </a:solidFill>
+                      <a:prstDash val="solid"/>
+                      <a:round/>
+                      <a:headEnd type="none" w="med" len="med"/>
+                      <a:tailEnd type="none" w="med" len="med"/>
+                    </a:lnT>
+                    <a:lnB w="12700" cap="flat" cmpd="sng" algn="ctr">
+                      <a:solidFill>
+                        <a:schemeClr val="tx1"/>
+                      </a:solidFill>
+                      <a:prstDash val="solid"/>
+                      <a:round/>
+                      <a:headEnd type="none" w="med" len="med"/>
+                      <a:tailEnd type="none" w="med" len="med"/>
+                    </a:lnB>
+                    <a:noFill/>
+                  </a:tcPr>
+                </a:tc>
+                <a:tc>
+                  <a:txBody>
+                    <a:bodyPr/>
+                    <a:lstStyle/>
+                    <a:p>
+                      <a:pPr algn="ctr">
+                        <a:buNone/>
+                      </a:pPr>
+                      <a:r>
+                        <a:rPr lang="pt-BR" sz="1500">
+                          <a:effectLst/>
+                          <a:latin typeface="Times New Roman" panose="02020603050405020304" pitchFamily="18" charset="0"/>
+                          <a:cs typeface="Times New Roman" panose="02020603050405020304" pitchFamily="18" charset="0"/>
+                        </a:rPr>
+                        <a:t>Incremento</a:t>
+                      </a:r>
+                    </a:p>
+                  </a:txBody>
+                  <a:tcPr marL="76339" marR="76339" marT="38170" marB="38170" anchor="ctr">
+                    <a:lnL w="12700" cap="flat" cmpd="sng" algn="ctr">
+                      <a:solidFill>
+                        <a:schemeClr val="tx1"/>
+                      </a:solidFill>
+                      <a:prstDash val="solid"/>
+                      <a:round/>
+                      <a:headEnd type="none" w="med" len="med"/>
+                      <a:tailEnd type="none" w="med" len="med"/>
+                    </a:lnL>
+                    <a:lnR w="12700" cap="flat" cmpd="sng" algn="ctr">
+                      <a:solidFill>
+                        <a:schemeClr val="tx1"/>
+                      </a:solidFill>
+                      <a:prstDash val="solid"/>
+                      <a:round/>
+                      <a:headEnd type="none" w="med" len="med"/>
+                      <a:tailEnd type="none" w="med" len="med"/>
+                    </a:lnR>
+                    <a:lnT w="12700" cap="flat" cmpd="sng" algn="ctr">
+                      <a:solidFill>
+                        <a:schemeClr val="tx1"/>
+                      </a:solidFill>
+                      <a:prstDash val="solid"/>
+                      <a:round/>
+                      <a:headEnd type="none" w="med" len="med"/>
+                      <a:tailEnd type="none" w="med" len="med"/>
+                    </a:lnT>
+                    <a:lnB w="12700" cap="flat" cmpd="sng" algn="ctr">
+                      <a:solidFill>
+                        <a:schemeClr val="tx1"/>
+                      </a:solidFill>
+                      <a:prstDash val="solid"/>
+                      <a:round/>
+                      <a:headEnd type="none" w="med" len="med"/>
+                      <a:tailEnd type="none" w="med" len="med"/>
+                    </a:lnB>
+                    <a:noFill/>
+                  </a:tcPr>
+                </a:tc>
+                <a:tc>
+                  <a:txBody>
+                    <a:bodyPr/>
+                    <a:lstStyle/>
+                    <a:p>
+                      <a:pPr algn="ctr">
+                        <a:buNone/>
+                      </a:pPr>
+                      <a:r>
+                        <a:rPr lang="pt-BR" sz="1500">
+                          <a:effectLst/>
+                          <a:latin typeface="Times New Roman" panose="02020603050405020304" pitchFamily="18" charset="0"/>
+                          <a:cs typeface="Times New Roman" panose="02020603050405020304" pitchFamily="18" charset="0"/>
+                        </a:rPr>
+                        <a:t>Soma 1 ao valor atual</a:t>
+                      </a:r>
+                    </a:p>
+                  </a:txBody>
+                  <a:tcPr marL="76339" marR="76339" marT="38170" marB="38170" anchor="ctr">
+                    <a:lnL w="12700" cap="flat" cmpd="sng" algn="ctr">
+                      <a:solidFill>
+                        <a:schemeClr val="tx1"/>
+                      </a:solidFill>
+                      <a:prstDash val="solid"/>
+                      <a:round/>
+                      <a:headEnd type="none" w="med" len="med"/>
+                      <a:tailEnd type="none" w="med" len="med"/>
+                    </a:lnL>
+                    <a:lnR w="12700" cap="flat" cmpd="sng" algn="ctr">
+                      <a:solidFill>
+                        <a:schemeClr val="tx1"/>
+                      </a:solidFill>
+                      <a:prstDash val="solid"/>
+                      <a:round/>
+                      <a:headEnd type="none" w="med" len="med"/>
+                      <a:tailEnd type="none" w="med" len="med"/>
+                    </a:lnR>
+                    <a:lnT w="12700" cap="flat" cmpd="sng" algn="ctr">
+                      <a:solidFill>
+                        <a:schemeClr val="tx1"/>
+                      </a:solidFill>
+                      <a:prstDash val="solid"/>
+                      <a:round/>
+                      <a:headEnd type="none" w="med" len="med"/>
+                      <a:tailEnd type="none" w="med" len="med"/>
+                    </a:lnT>
+                    <a:lnB w="12700" cap="flat" cmpd="sng" algn="ctr">
+                      <a:solidFill>
+                        <a:schemeClr val="tx1"/>
+                      </a:solidFill>
+                      <a:prstDash val="solid"/>
+                      <a:round/>
+                      <a:headEnd type="none" w="med" len="med"/>
+                      <a:tailEnd type="none" w="med" len="med"/>
+                    </a:lnB>
+                    <a:noFill/>
+                  </a:tcPr>
+                </a:tc>
+                <a:tc>
+                  <a:txBody>
+                    <a:bodyPr/>
+                    <a:lstStyle/>
+                    <a:p>
+                      <a:pPr algn="ctr">
+                        <a:buNone/>
+                      </a:pPr>
+                      <a:r>
+                        <a:rPr lang="pt-BR" sz="1500" dirty="0">
+                          <a:effectLst/>
+                          <a:latin typeface="Times New Roman" panose="02020603050405020304" pitchFamily="18" charset="0"/>
+                          <a:cs typeface="Times New Roman" panose="02020603050405020304" pitchFamily="18" charset="0"/>
+                        </a:rPr>
+                        <a:t>contador++</a:t>
+                      </a:r>
+                    </a:p>
+                  </a:txBody>
+                  <a:tcPr marL="76339" marR="76339" marT="38170" marB="38170" anchor="ctr">
+                    <a:lnL w="12700" cap="flat" cmpd="sng" algn="ctr">
+                      <a:solidFill>
+                        <a:schemeClr val="tx1"/>
+                      </a:solidFill>
+                      <a:prstDash val="solid"/>
+                      <a:round/>
+                      <a:headEnd type="none" w="med" len="med"/>
+                      <a:tailEnd type="none" w="med" len="med"/>
+                    </a:lnL>
+                    <a:lnR w="12700" cap="flat" cmpd="sng" algn="ctr">
+                      <a:solidFill>
+                        <a:schemeClr val="tx1"/>
+                      </a:solidFill>
+                      <a:prstDash val="solid"/>
+                      <a:round/>
+                      <a:headEnd type="none" w="med" len="med"/>
+                      <a:tailEnd type="none" w="med" len="med"/>
+                    </a:lnR>
+                    <a:lnT w="12700" cap="flat" cmpd="sng" algn="ctr">
+                      <a:solidFill>
+                        <a:schemeClr val="tx1"/>
+                      </a:solidFill>
+                      <a:prstDash val="solid"/>
+                      <a:round/>
+                      <a:headEnd type="none" w="med" len="med"/>
+                      <a:tailEnd type="none" w="med" len="med"/>
+                    </a:lnT>
+                    <a:lnB w="12700" cap="flat" cmpd="sng" algn="ctr">
+                      <a:solidFill>
+                        <a:schemeClr val="tx1"/>
+                      </a:solidFill>
+                      <a:prstDash val="solid"/>
+                      <a:round/>
+                      <a:headEnd type="none" w="med" len="med"/>
+                      <a:tailEnd type="none" w="med" len="med"/>
+                    </a:lnB>
+                    <a:noFill/>
+                  </a:tcPr>
+                </a:tc>
+                <a:tc>
+                  <a:txBody>
+                    <a:bodyPr/>
+                    <a:lstStyle/>
+                    <a:p>
+                      <a:pPr algn="ctr">
+                        <a:buNone/>
+                      </a:pPr>
+                      <a:r>
+                        <a:rPr lang="pt-BR" sz="1500" dirty="0">
+                          <a:effectLst/>
+                          <a:latin typeface="Times New Roman" panose="02020603050405020304" pitchFamily="18" charset="0"/>
+                          <a:cs typeface="Times New Roman" panose="02020603050405020304" pitchFamily="18" charset="0"/>
+                        </a:rPr>
+                        <a:t>contador + 1</a:t>
+                      </a:r>
+                    </a:p>
+                  </a:txBody>
+                  <a:tcPr marL="76339" marR="76339" marT="38170" marB="38170" anchor="ctr">
+                    <a:lnL w="12700" cap="flat" cmpd="sng" algn="ctr">
+                      <a:solidFill>
+                        <a:schemeClr val="tx1"/>
+                      </a:solidFill>
+                      <a:prstDash val="solid"/>
+                      <a:round/>
+                      <a:headEnd type="none" w="med" len="med"/>
+                      <a:tailEnd type="none" w="med" len="med"/>
+                    </a:lnL>
+                    <a:lnR w="12700" cap="flat" cmpd="sng" algn="ctr">
+                      <a:solidFill>
+                        <a:schemeClr val="tx1"/>
+                      </a:solidFill>
+                      <a:prstDash val="solid"/>
+                      <a:round/>
+                      <a:headEnd type="none" w="med" len="med"/>
+                      <a:tailEnd type="none" w="med" len="med"/>
+                    </a:lnR>
+                    <a:lnT w="12700" cap="flat" cmpd="sng" algn="ctr">
+                      <a:solidFill>
+                        <a:schemeClr val="tx1"/>
+                      </a:solidFill>
+                      <a:prstDash val="solid"/>
+                      <a:round/>
+                      <a:headEnd type="none" w="med" len="med"/>
+                      <a:tailEnd type="none" w="med" len="med"/>
+                    </a:lnT>
+                    <a:lnB w="12700" cap="flat" cmpd="sng" algn="ctr">
+                      <a:solidFill>
+                        <a:schemeClr val="tx1"/>
+                      </a:solidFill>
+                      <a:prstDash val="solid"/>
+                      <a:round/>
+                      <a:headEnd type="none" w="med" len="med"/>
+                      <a:tailEnd type="none" w="med" len="med"/>
+                    </a:lnB>
+                    <a:noFill/>
+                  </a:tcPr>
+                </a:tc>
+                <a:extLst>
+                  <a:ext uri="{0D108BD9-81ED-4DB2-BD59-A6C34878D82A}">
+                    <a16:rowId xmlns:a16="http://schemas.microsoft.com/office/drawing/2014/main" val="164022018"/>
+                  </a:ext>
+                </a:extLst>
+              </a:tr>
+              <a:tr h="353684">
+                <a:tc>
+                  <a:txBody>
+                    <a:bodyPr/>
+                    <a:lstStyle/>
+                    <a:p>
+                      <a:pPr algn="ctr">
+                        <a:buNone/>
+                      </a:pPr>
+                      <a:r>
+                        <a:rPr lang="pt-BR" sz="1500">
+                          <a:effectLst/>
+                          <a:latin typeface="Times New Roman" panose="02020603050405020304" pitchFamily="18" charset="0"/>
+                          <a:cs typeface="Times New Roman" panose="02020603050405020304" pitchFamily="18" charset="0"/>
+                        </a:rPr>
+                        <a:t>--</a:t>
+                      </a:r>
+                    </a:p>
+                  </a:txBody>
+                  <a:tcPr marL="76339" marR="76339" marT="38170" marB="38170" anchor="ctr">
+                    <a:lnL w="12700" cap="flat" cmpd="sng" algn="ctr">
+                      <a:solidFill>
+                        <a:schemeClr val="tx1"/>
+                      </a:solidFill>
+                      <a:prstDash val="solid"/>
+                      <a:round/>
+                      <a:headEnd type="none" w="med" len="med"/>
+                      <a:tailEnd type="none" w="med" len="med"/>
+                    </a:lnL>
+                    <a:lnR w="12700" cap="flat" cmpd="sng" algn="ctr">
+                      <a:solidFill>
+                        <a:schemeClr val="tx1"/>
+                      </a:solidFill>
+                      <a:prstDash val="solid"/>
+                      <a:round/>
+                      <a:headEnd type="none" w="med" len="med"/>
+                      <a:tailEnd type="none" w="med" len="med"/>
+                    </a:lnR>
+                    <a:lnT w="12700" cap="flat" cmpd="sng" algn="ctr">
+                      <a:solidFill>
+                        <a:schemeClr val="tx1"/>
+                      </a:solidFill>
+                      <a:prstDash val="solid"/>
+                      <a:round/>
+                      <a:headEnd type="none" w="med" len="med"/>
+                      <a:tailEnd type="none" w="med" len="med"/>
+                    </a:lnT>
+                    <a:lnB w="12700" cap="flat" cmpd="sng" algn="ctr">
+                      <a:solidFill>
+                        <a:schemeClr val="tx1"/>
+                      </a:solidFill>
+                      <a:prstDash val="solid"/>
+                      <a:round/>
+                      <a:headEnd type="none" w="med" len="med"/>
+                      <a:tailEnd type="none" w="med" len="med"/>
+                    </a:lnB>
+                    <a:noFill/>
+                  </a:tcPr>
+                </a:tc>
+                <a:tc>
+                  <a:txBody>
+                    <a:bodyPr/>
+                    <a:lstStyle/>
+                    <a:p>
+                      <a:pPr algn="ctr">
+                        <a:buNone/>
+                      </a:pPr>
+                      <a:r>
+                        <a:rPr lang="pt-BR" sz="1500">
+                          <a:effectLst/>
+                          <a:latin typeface="Times New Roman" panose="02020603050405020304" pitchFamily="18" charset="0"/>
+                          <a:cs typeface="Times New Roman" panose="02020603050405020304" pitchFamily="18" charset="0"/>
+                        </a:rPr>
+                        <a:t>Decremento</a:t>
+                      </a:r>
+                    </a:p>
+                  </a:txBody>
+                  <a:tcPr marL="76339" marR="76339" marT="38170" marB="38170" anchor="ctr">
+                    <a:lnL w="12700" cap="flat" cmpd="sng" algn="ctr">
+                      <a:solidFill>
+                        <a:schemeClr val="tx1"/>
+                      </a:solidFill>
+                      <a:prstDash val="solid"/>
+                      <a:round/>
+                      <a:headEnd type="none" w="med" len="med"/>
+                      <a:tailEnd type="none" w="med" len="med"/>
+                    </a:lnL>
+                    <a:lnR w="12700" cap="flat" cmpd="sng" algn="ctr">
+                      <a:solidFill>
+                        <a:schemeClr val="tx1"/>
+                      </a:solidFill>
+                      <a:prstDash val="solid"/>
+                      <a:round/>
+                      <a:headEnd type="none" w="med" len="med"/>
+                      <a:tailEnd type="none" w="med" len="med"/>
+                    </a:lnR>
+                    <a:lnT w="12700" cap="flat" cmpd="sng" algn="ctr">
+                      <a:solidFill>
+                        <a:schemeClr val="tx1"/>
+                      </a:solidFill>
+                      <a:prstDash val="solid"/>
+                      <a:round/>
+                      <a:headEnd type="none" w="med" len="med"/>
+                      <a:tailEnd type="none" w="med" len="med"/>
+                    </a:lnT>
+                    <a:lnB w="12700" cap="flat" cmpd="sng" algn="ctr">
+                      <a:solidFill>
+                        <a:schemeClr val="tx1"/>
+                      </a:solidFill>
+                      <a:prstDash val="solid"/>
+                      <a:round/>
+                      <a:headEnd type="none" w="med" len="med"/>
+                      <a:tailEnd type="none" w="med" len="med"/>
+                    </a:lnB>
+                    <a:noFill/>
+                  </a:tcPr>
+                </a:tc>
+                <a:tc>
+                  <a:txBody>
+                    <a:bodyPr/>
+                    <a:lstStyle/>
+                    <a:p>
+                      <a:pPr algn="ctr">
+                        <a:buNone/>
+                      </a:pPr>
+                      <a:r>
+                        <a:rPr lang="pt-BR" sz="1500">
+                          <a:effectLst/>
+                          <a:latin typeface="Times New Roman" panose="02020603050405020304" pitchFamily="18" charset="0"/>
+                          <a:cs typeface="Times New Roman" panose="02020603050405020304" pitchFamily="18" charset="0"/>
+                        </a:rPr>
+                        <a:t>Subtrai 1 do valor atual</a:t>
+                      </a:r>
+                    </a:p>
+                  </a:txBody>
+                  <a:tcPr marL="76339" marR="76339" marT="38170" marB="38170" anchor="ctr">
+                    <a:lnL w="12700" cap="flat" cmpd="sng" algn="ctr">
+                      <a:solidFill>
+                        <a:schemeClr val="tx1"/>
+                      </a:solidFill>
+                      <a:prstDash val="solid"/>
+                      <a:round/>
+                      <a:headEnd type="none" w="med" len="med"/>
+                      <a:tailEnd type="none" w="med" len="med"/>
+                    </a:lnL>
+                    <a:lnR w="12700" cap="flat" cmpd="sng" algn="ctr">
+                      <a:solidFill>
+                        <a:schemeClr val="tx1"/>
+                      </a:solidFill>
+                      <a:prstDash val="solid"/>
+                      <a:round/>
+                      <a:headEnd type="none" w="med" len="med"/>
+                      <a:tailEnd type="none" w="med" len="med"/>
+                    </a:lnR>
+                    <a:lnT w="12700" cap="flat" cmpd="sng" algn="ctr">
+                      <a:solidFill>
+                        <a:schemeClr val="tx1"/>
+                      </a:solidFill>
+                      <a:prstDash val="solid"/>
+                      <a:round/>
+                      <a:headEnd type="none" w="med" len="med"/>
+                      <a:tailEnd type="none" w="med" len="med"/>
+                    </a:lnT>
+                    <a:lnB w="12700" cap="flat" cmpd="sng" algn="ctr">
+                      <a:solidFill>
+                        <a:schemeClr val="tx1"/>
+                      </a:solidFill>
+                      <a:prstDash val="solid"/>
+                      <a:round/>
+                      <a:headEnd type="none" w="med" len="med"/>
+                      <a:tailEnd type="none" w="med" len="med"/>
+                    </a:lnB>
+                    <a:noFill/>
+                  </a:tcPr>
+                </a:tc>
+                <a:tc>
+                  <a:txBody>
+                    <a:bodyPr/>
+                    <a:lstStyle/>
+                    <a:p>
+                      <a:pPr algn="ctr">
+                        <a:buNone/>
+                      </a:pPr>
+                      <a:r>
+                        <a:rPr lang="pt-BR" sz="1500" dirty="0">
+                          <a:effectLst/>
+                          <a:latin typeface="Times New Roman" panose="02020603050405020304" pitchFamily="18" charset="0"/>
+                          <a:cs typeface="Times New Roman" panose="02020603050405020304" pitchFamily="18" charset="0"/>
+                        </a:rPr>
+                        <a:t>contador--</a:t>
+                      </a:r>
+                    </a:p>
+                  </a:txBody>
+                  <a:tcPr marL="76339" marR="76339" marT="38170" marB="38170" anchor="ctr">
+                    <a:lnL w="12700" cap="flat" cmpd="sng" algn="ctr">
+                      <a:solidFill>
+                        <a:schemeClr val="tx1"/>
+                      </a:solidFill>
+                      <a:prstDash val="solid"/>
+                      <a:round/>
+                      <a:headEnd type="none" w="med" len="med"/>
+                      <a:tailEnd type="none" w="med" len="med"/>
+                    </a:lnL>
+                    <a:lnR w="12700" cap="flat" cmpd="sng" algn="ctr">
+                      <a:solidFill>
+                        <a:schemeClr val="tx1"/>
+                      </a:solidFill>
+                      <a:prstDash val="solid"/>
+                      <a:round/>
+                      <a:headEnd type="none" w="med" len="med"/>
+                      <a:tailEnd type="none" w="med" len="med"/>
+                    </a:lnR>
+                    <a:lnT w="12700" cap="flat" cmpd="sng" algn="ctr">
+                      <a:solidFill>
+                        <a:schemeClr val="tx1"/>
+                      </a:solidFill>
+                      <a:prstDash val="solid"/>
+                      <a:round/>
+                      <a:headEnd type="none" w="med" len="med"/>
+                      <a:tailEnd type="none" w="med" len="med"/>
+                    </a:lnT>
+                    <a:lnB w="12700" cap="flat" cmpd="sng" algn="ctr">
+                      <a:solidFill>
+                        <a:schemeClr val="tx1"/>
+                      </a:solidFill>
+                      <a:prstDash val="solid"/>
+                      <a:round/>
+                      <a:headEnd type="none" w="med" len="med"/>
+                      <a:tailEnd type="none" w="med" len="med"/>
+                    </a:lnB>
+                    <a:noFill/>
+                  </a:tcPr>
+                </a:tc>
+                <a:tc>
+                  <a:txBody>
+                    <a:bodyPr/>
+                    <a:lstStyle/>
+                    <a:p>
+                      <a:pPr algn="ctr">
+                        <a:buNone/>
+                      </a:pPr>
+                      <a:r>
+                        <a:rPr lang="pt-BR" sz="1500" dirty="0">
+                          <a:effectLst/>
+                          <a:latin typeface="Times New Roman" panose="02020603050405020304" pitchFamily="18" charset="0"/>
+                          <a:cs typeface="Times New Roman" panose="02020603050405020304" pitchFamily="18" charset="0"/>
+                        </a:rPr>
+                        <a:t>contador - 1</a:t>
+                      </a:r>
+                    </a:p>
+                  </a:txBody>
+                  <a:tcPr marL="76339" marR="76339" marT="38170" marB="38170" anchor="ctr">
+                    <a:lnL w="12700" cap="flat" cmpd="sng" algn="ctr">
+                      <a:solidFill>
+                        <a:schemeClr val="tx1"/>
+                      </a:solidFill>
+                      <a:prstDash val="solid"/>
+                      <a:round/>
+                      <a:headEnd type="none" w="med" len="med"/>
+                      <a:tailEnd type="none" w="med" len="med"/>
+                    </a:lnL>
+                    <a:lnR w="12700" cap="flat" cmpd="sng" algn="ctr">
+                      <a:solidFill>
+                        <a:schemeClr val="tx1"/>
+                      </a:solidFill>
+                      <a:prstDash val="solid"/>
+                      <a:round/>
+                      <a:headEnd type="none" w="med" len="med"/>
+                      <a:tailEnd type="none" w="med" len="med"/>
+                    </a:lnR>
+                    <a:lnT w="12700" cap="flat" cmpd="sng" algn="ctr">
+                      <a:solidFill>
+                        <a:schemeClr val="tx1"/>
+                      </a:solidFill>
+                      <a:prstDash val="solid"/>
+                      <a:round/>
+                      <a:headEnd type="none" w="med" len="med"/>
+                      <a:tailEnd type="none" w="med" len="med"/>
+                    </a:lnT>
+                    <a:lnB w="12700" cap="flat" cmpd="sng" algn="ctr">
+                      <a:solidFill>
+                        <a:schemeClr val="tx1"/>
+                      </a:solidFill>
+                      <a:prstDash val="solid"/>
+                      <a:round/>
+                      <a:headEnd type="none" w="med" len="med"/>
+                      <a:tailEnd type="none" w="med" len="med"/>
+                    </a:lnB>
+                    <a:noFill/>
+                  </a:tcPr>
+                </a:tc>
+                <a:extLst>
+                  <a:ext uri="{0D108BD9-81ED-4DB2-BD59-A6C34878D82A}">
+                    <a16:rowId xmlns:a16="http://schemas.microsoft.com/office/drawing/2014/main" val="3578153059"/>
+                  </a:ext>
+                </a:extLst>
+              </a:tr>
+            </a:tbl>
+          </a:graphicData>
+        </a:graphic>
+      </p:graphicFrame>
+    </p:spTree>
+    <p:extLst>
+      <p:ext uri="{BB962C8B-B14F-4D97-AF65-F5344CB8AC3E}">
+        <p14:creationId xmlns:p14="http://schemas.microsoft.com/office/powerpoint/2010/main" val="2423316997"/>
+      </p:ext>
+    </p:extLst>
+  </p:cSld>
+  <p:clrMapOvr>
+    <a:masterClrMapping/>
+  </p:clrMapOvr>
+</p:sld>
+</file>
+
+<file path=ppt/slides/slide3.xml><?xml version="1.0" encoding="utf-8"?>
+<p:sld xmlns:a="http://schemas.openxmlformats.org/drawingml/2006/main" xmlns:r="http://schemas.openxmlformats.org/officeDocument/2006/relationships" xmlns:p="http://schemas.openxmlformats.org/presentationml/2006/main">
+  <p:cSld>
+    <p:spTree>
+      <p:nvGrpSpPr>
+        <p:cNvPr id="1" name=""/>
+        <p:cNvGrpSpPr/>
+        <p:nvPr/>
+      </p:nvGrpSpPr>
+      <p:grpSpPr>
+        <a:xfrm>
+          <a:off x="0" y="0"/>
+          <a:ext cx="0" cy="0"/>
+          <a:chOff x="0" y="0"/>
+          <a:chExt cx="0" cy="0"/>
+        </a:xfrm>
+      </p:grpSpPr>
+      <p:sp>
+        <p:nvSpPr>
+          <p:cNvPr id="2" name="Título 1">
+            <a:extLst>
+              <a:ext uri="{FF2B5EF4-FFF2-40B4-BE49-F238E27FC236}">
+                <a16:creationId xmlns:a16="http://schemas.microsoft.com/office/drawing/2014/main" id="{A575A38A-69F1-F342-FD8F-1FD929760CFB}"/>
+              </a:ext>
+            </a:extLst>
+          </p:cNvPr>
+          <p:cNvSpPr>
+            <a:spLocks noGrp="1"/>
+          </p:cNvSpPr>
+          <p:nvPr>
+            <p:ph type="title"/>
+          </p:nvPr>
+        </p:nvSpPr>
+        <p:spPr/>
+        <p:txBody>
+          <a:bodyPr/>
+          <a:lstStyle/>
+          <a:p>
+            <a:r>
+              <a:rPr lang="pt-BR" dirty="0"/>
+              <a:t>O que é Dart?</a:t>
+            </a:r>
+          </a:p>
+        </p:txBody>
+      </p:sp>
+      <p:sp>
+        <p:nvSpPr>
+          <p:cNvPr id="3" name="Espaço Reservado para Conteúdo 2">
+            <a:extLst>
+              <a:ext uri="{FF2B5EF4-FFF2-40B4-BE49-F238E27FC236}">
+                <a16:creationId xmlns:a16="http://schemas.microsoft.com/office/drawing/2014/main" id="{F212DE70-4D3D-E743-91E1-C4CC947D1E12}"/>
+              </a:ext>
+            </a:extLst>
+          </p:cNvPr>
+          <p:cNvSpPr>
+            <a:spLocks noGrp="1"/>
+          </p:cNvSpPr>
+          <p:nvPr>
+            <p:ph idx="1"/>
+          </p:nvPr>
+        </p:nvSpPr>
+        <p:spPr>
+          <a:xfrm>
+            <a:off x="592347" y="1914806"/>
+            <a:ext cx="11007306" cy="3016083"/>
+          </a:xfrm>
+        </p:spPr>
+        <p:txBody>
+          <a:bodyPr/>
+          <a:lstStyle/>
+          <a:p>
+            <a:r>
+              <a:rPr lang="pt-BR" b="1" dirty="0"/>
+              <a:t>Dart</a:t>
+            </a:r>
+            <a:r>
+              <a:rPr lang="pt-BR" dirty="0"/>
+              <a:t> é uma linguagem de programação de código aberto criada pelo </a:t>
+            </a:r>
+            <a:r>
+              <a:rPr lang="pt-BR" b="1" dirty="0"/>
+              <a:t>Google</a:t>
+            </a:r>
+            <a:r>
+              <a:rPr lang="pt-BR" dirty="0"/>
+              <a:t> em 2011. Embora o plano inicial fosse substituir o </a:t>
+            </a:r>
+            <a:r>
+              <a:rPr lang="pt-BR" dirty="0" err="1"/>
+              <a:t>JavaScript</a:t>
+            </a:r>
+            <a:r>
+              <a:rPr lang="pt-BR" dirty="0"/>
+              <a:t> na web, ela ganhou enorme popularidade usado para criar aplicativos móveis.</a:t>
+            </a:r>
+          </a:p>
+          <a:p>
+            <a:pPr marL="1028700" lvl="1" indent="-342900"/>
+            <a:r>
+              <a:rPr lang="pt-BR" dirty="0"/>
+              <a:t>Linguagem de programação criada pelo Google, orientada a objetos</a:t>
+            </a:r>
+          </a:p>
+          <a:p>
+            <a:pPr marL="1028700" lvl="1" indent="-342900"/>
+            <a:r>
+              <a:rPr lang="pt-BR" dirty="0"/>
+              <a:t>Compilada tanto para código nativo (mobile/desktop) quanto para </a:t>
+            </a:r>
+            <a:r>
+              <a:rPr lang="pt-BR" dirty="0" err="1"/>
+              <a:t>JavaScript</a:t>
+            </a:r>
+            <a:r>
+              <a:rPr lang="pt-BR" dirty="0"/>
+              <a:t> (web)</a:t>
+            </a:r>
+          </a:p>
+          <a:p>
+            <a:pPr marL="1028700" lvl="1" indent="-342900"/>
+            <a:r>
+              <a:rPr lang="pt-BR" dirty="0"/>
+              <a:t>Sintaxe similar a Java/</a:t>
+            </a:r>
+            <a:r>
+              <a:rPr lang="pt-BR" dirty="0" err="1"/>
+              <a:t>JavaScript</a:t>
+            </a:r>
+            <a:r>
+              <a:rPr lang="pt-BR" dirty="0"/>
+              <a:t> — facilita o aprendizado</a:t>
+            </a:r>
+          </a:p>
+          <a:p>
+            <a:endParaRPr lang="pt-BR" dirty="0"/>
+          </a:p>
+          <a:p>
+            <a:endParaRPr lang="pt-BR" dirty="0"/>
+          </a:p>
+        </p:txBody>
+      </p:sp>
+      <p:pic>
+        <p:nvPicPr>
+          <p:cNvPr id="1026" name="Picture 2" descr="Dart: a Linguagem de Programação que quer substituir o Java">
+            <a:extLst>
+              <a:ext uri="{FF2B5EF4-FFF2-40B4-BE49-F238E27FC236}">
+                <a16:creationId xmlns:a16="http://schemas.microsoft.com/office/drawing/2014/main" id="{24976A3F-420A-E993-511B-5DD3F3F07E7A}"/>
+              </a:ext>
+            </a:extLst>
+          </p:cNvPr>
+          <p:cNvPicPr>
+            <a:picLocks noChangeAspect="1" noChangeArrowheads="1"/>
+          </p:cNvPicPr>
+          <p:nvPr/>
+        </p:nvPicPr>
+        <p:blipFill>
+          <a:blip r:embed="rId2">
+            <a:extLst>
+              <a:ext uri="{28A0092B-C50C-407E-A947-70E740481C1C}">
+                <a14:useLocalDpi xmlns:a14="http://schemas.microsoft.com/office/drawing/2010/main" val="0"/>
+              </a:ext>
+            </a:extLst>
+          </a:blip>
+          <a:srcRect/>
+          <a:stretch>
+            <a:fillRect/>
+          </a:stretch>
+        </p:blipFill>
+        <p:spPr bwMode="auto">
+          <a:xfrm>
+            <a:off x="7467599" y="4943194"/>
+            <a:ext cx="3917114" cy="1304169"/>
+          </a:xfrm>
+          <a:prstGeom prst="rect">
+            <a:avLst/>
+          </a:prstGeom>
+          <a:noFill/>
+          <a:extLst>
+            <a:ext uri="{909E8E84-426E-40DD-AFC4-6F175D3DCCD1}">
+              <a14:hiddenFill xmlns:a14="http://schemas.microsoft.com/office/drawing/2010/main">
+                <a:solidFill>
+                  <a:srgbClr val="FFFFFF"/>
+                </a:solidFill>
+              </a14:hiddenFill>
+            </a:ext>
+          </a:extLst>
+        </p:spPr>
+      </p:pic>
+    </p:spTree>
+    <p:extLst>
+      <p:ext uri="{BB962C8B-B14F-4D97-AF65-F5344CB8AC3E}">
+        <p14:creationId xmlns:p14="http://schemas.microsoft.com/office/powerpoint/2010/main" val="3899577155"/>
+      </p:ext>
+    </p:extLst>
+  </p:cSld>
+  <p:clrMapOvr>
+    <a:masterClrMapping/>
+  </p:clrMapOvr>
+</p:sld>
+</file>
+
+<file path=ppt/slides/slide30.xml><?xml version="1.0" encoding="utf-8"?>
 <p:sld xmlns:a="http://schemas.openxmlformats.org/drawingml/2006/main" xmlns:r="http://schemas.openxmlformats.org/officeDocument/2006/relationships" xmlns:p="http://schemas.openxmlformats.org/presentationml/2006/main">
   <p:cSld>
     <p:spTree>
@@ -10271,7 +15598,7 @@
 </p:sld>
 </file>
 
-<file path=ppt/slides/slide25.xml><?xml version="1.0" encoding="utf-8"?>
+<file path=ppt/slides/slide31.xml><?xml version="1.0" encoding="utf-8"?>
 <p:sld xmlns:a="http://schemas.openxmlformats.org/drawingml/2006/main" xmlns:r="http://schemas.openxmlformats.org/officeDocument/2006/relationships" xmlns:p="http://schemas.openxmlformats.org/presentationml/2006/main">
   <p:cSld>
     <p:spTree>
@@ -10650,7 +15977,7 @@
 </p:sld>
 </file>
 
-<file path=ppt/slides/slide26.xml><?xml version="1.0" encoding="utf-8"?>
+<file path=ppt/slides/slide32.xml><?xml version="1.0" encoding="utf-8"?>
 <p:sld xmlns:a="http://schemas.openxmlformats.org/drawingml/2006/main" xmlns:r="http://schemas.openxmlformats.org/officeDocument/2006/relationships" xmlns:p="http://schemas.openxmlformats.org/presentationml/2006/main">
   <p:cSld>
     <p:spTree>
@@ -10838,207 +16165,6 @@
     <p:extLst>
       <p:ext uri="{BB962C8B-B14F-4D97-AF65-F5344CB8AC3E}">
         <p14:creationId xmlns:p14="http://schemas.microsoft.com/office/powerpoint/2010/main" val="2756181208"/>
-      </p:ext>
-    </p:extLst>
-  </p:cSld>
-  <p:clrMapOvr>
-    <a:masterClrMapping/>
-  </p:clrMapOvr>
-</p:sld>
-</file>
-
-<file path=ppt/slides/slide3.xml><?xml version="1.0" encoding="utf-8"?>
-<p:sld xmlns:a="http://schemas.openxmlformats.org/drawingml/2006/main" xmlns:r="http://schemas.openxmlformats.org/officeDocument/2006/relationships" xmlns:p="http://schemas.openxmlformats.org/presentationml/2006/main">
-  <p:cSld>
-    <p:spTree>
-      <p:nvGrpSpPr>
-        <p:cNvPr id="1" name=""/>
-        <p:cNvGrpSpPr/>
-        <p:nvPr/>
-      </p:nvGrpSpPr>
-      <p:grpSpPr>
-        <a:xfrm>
-          <a:off x="0" y="0"/>
-          <a:ext cx="0" cy="0"/>
-          <a:chOff x="0" y="0"/>
-          <a:chExt cx="0" cy="0"/>
-        </a:xfrm>
-      </p:grpSpPr>
-      <p:sp>
-        <p:nvSpPr>
-          <p:cNvPr id="2" name="Título 1">
-            <a:extLst>
-              <a:ext uri="{FF2B5EF4-FFF2-40B4-BE49-F238E27FC236}">
-                <a16:creationId xmlns:a16="http://schemas.microsoft.com/office/drawing/2014/main" id="{A575A38A-69F1-F342-FD8F-1FD929760CFB}"/>
-              </a:ext>
-            </a:extLst>
-          </p:cNvPr>
-          <p:cNvSpPr>
-            <a:spLocks noGrp="1"/>
-          </p:cNvSpPr>
-          <p:nvPr>
-            <p:ph type="title"/>
-          </p:nvPr>
-        </p:nvSpPr>
-        <p:spPr/>
-        <p:txBody>
-          <a:bodyPr/>
-          <a:lstStyle/>
-          <a:p>
-            <a:r>
-              <a:rPr lang="pt-BR" dirty="0"/>
-              <a:t>O que é Dart?</a:t>
-            </a:r>
-          </a:p>
-        </p:txBody>
-      </p:sp>
-      <p:sp>
-        <p:nvSpPr>
-          <p:cNvPr id="3" name="Espaço Reservado para Conteúdo 2">
-            <a:extLst>
-              <a:ext uri="{FF2B5EF4-FFF2-40B4-BE49-F238E27FC236}">
-                <a16:creationId xmlns:a16="http://schemas.microsoft.com/office/drawing/2014/main" id="{F212DE70-4D3D-E743-91E1-C4CC947D1E12}"/>
-              </a:ext>
-            </a:extLst>
-          </p:cNvPr>
-          <p:cNvSpPr>
-            <a:spLocks noGrp="1"/>
-          </p:cNvSpPr>
-          <p:nvPr>
-            <p:ph idx="1"/>
-          </p:nvPr>
-        </p:nvSpPr>
-        <p:spPr>
-          <a:xfrm>
-            <a:off x="592347" y="1914806"/>
-            <a:ext cx="11007306" cy="3016083"/>
-          </a:xfrm>
-        </p:spPr>
-        <p:txBody>
-          <a:bodyPr/>
-          <a:lstStyle/>
-          <a:p>
-            <a:r>
-              <a:rPr lang="pt-BR" b="1" dirty="0"/>
-              <a:t>Dart</a:t>
-            </a:r>
-            <a:r>
-              <a:rPr lang="pt-BR" dirty="0"/>
-              <a:t> é uma linguagem de programação de código aberto criada pelo </a:t>
-            </a:r>
-            <a:r>
-              <a:rPr lang="pt-BR" b="1" dirty="0"/>
-              <a:t>Google</a:t>
-            </a:r>
-            <a:r>
-              <a:rPr lang="pt-BR" dirty="0"/>
-              <a:t> em 2011. Embora o plano inicial fosse substituir o </a:t>
-            </a:r>
-            <a:r>
-              <a:rPr lang="pt-BR" dirty="0" err="1"/>
-              <a:t>JavaScript</a:t>
-            </a:r>
-            <a:r>
-              <a:rPr lang="pt-BR" dirty="0"/>
-              <a:t> na web, ela ganhou enorme popularidade usado para criar aplicativos móveis.</a:t>
-            </a:r>
-          </a:p>
-          <a:p>
-            <a:pPr marL="1028700" lvl="1" indent="-342900"/>
-            <a:r>
-              <a:rPr lang="pt-BR" dirty="0"/>
-              <a:t>Linguagem de programação criada pelo Google, orientada a objetos</a:t>
-            </a:r>
-          </a:p>
-          <a:p>
-            <a:pPr marL="1028700" lvl="1" indent="-342900"/>
-            <a:r>
-              <a:rPr lang="pt-BR" dirty="0"/>
-              <a:t>Compilada tanto para código nativo (mobile/desktop) quanto para </a:t>
-            </a:r>
-            <a:r>
-              <a:rPr lang="pt-BR" dirty="0" err="1"/>
-              <a:t>JavaScript</a:t>
-            </a:r>
-            <a:r>
-              <a:rPr lang="pt-BR" dirty="0"/>
-              <a:t> (web)</a:t>
-            </a:r>
-          </a:p>
-          <a:p>
-            <a:pPr marL="1028700" lvl="1" indent="-342900"/>
-            <a:r>
-              <a:rPr lang="pt-BR" dirty="0"/>
-              <a:t>Sintaxe similar a Java/</a:t>
-            </a:r>
-            <a:r>
-              <a:rPr lang="pt-BR" dirty="0" err="1"/>
-              <a:t>JavaScript</a:t>
-            </a:r>
-            <a:r>
-              <a:rPr lang="pt-BR" dirty="0"/>
-              <a:t> — facilita o aprendizado</a:t>
-            </a:r>
-          </a:p>
-          <a:p>
-            <a:endParaRPr lang="pt-BR" dirty="0"/>
-          </a:p>
-          <a:p>
-            <a:endParaRPr lang="pt-BR" dirty="0"/>
-          </a:p>
-        </p:txBody>
-      </p:sp>
-      <p:pic>
-        <p:nvPicPr>
-          <p:cNvPr id="1026" name="Picture 2" descr="Dart: a Linguagem de Programação que quer substituir o Java">
-            <a:extLst>
-              <a:ext uri="{FF2B5EF4-FFF2-40B4-BE49-F238E27FC236}">
-                <a16:creationId xmlns:a16="http://schemas.microsoft.com/office/drawing/2014/main" id="{24976A3F-420A-E993-511B-5DD3F3F07E7A}"/>
-              </a:ext>
-            </a:extLst>
-          </p:cNvPr>
-          <p:cNvPicPr>
-            <a:picLocks noChangeAspect="1" noChangeArrowheads="1"/>
-          </p:cNvPicPr>
-          <p:nvPr/>
-        </p:nvPicPr>
-        <p:blipFill>
-          <a:blip r:embed="rId2">
-            <a:extLst>
-              <a:ext uri="{28A0092B-C50C-407E-A947-70E740481C1C}">
-                <a14:useLocalDpi xmlns:a14="http://schemas.microsoft.com/office/drawing/2010/main" val="0"/>
-              </a:ext>
-            </a:extLst>
-          </a:blip>
-          <a:srcRect/>
-          <a:stretch>
-            <a:fillRect/>
-          </a:stretch>
-        </p:blipFill>
-        <p:spPr bwMode="auto">
-          <a:xfrm>
-            <a:off x="7467599" y="4943194"/>
-            <a:ext cx="3917114" cy="1304169"/>
-          </a:xfrm>
-          <a:prstGeom prst="rect">
-            <a:avLst/>
-          </a:prstGeom>
-          <a:noFill/>
-          <a:extLst>
-            <a:ext uri="{909E8E84-426E-40DD-AFC4-6F175D3DCCD1}">
-              <a14:hiddenFill xmlns:a14="http://schemas.microsoft.com/office/drawing/2010/main">
-                <a:solidFill>
-                  <a:srgbClr val="FFFFFF"/>
-                </a:solidFill>
-              </a14:hiddenFill>
-            </a:ext>
-          </a:extLst>
-        </p:spPr>
-      </p:pic>
-    </p:spTree>
-    <p:extLst>
-      <p:ext uri="{BB962C8B-B14F-4D97-AF65-F5344CB8AC3E}">
-        <p14:creationId xmlns:p14="http://schemas.microsoft.com/office/powerpoint/2010/main" val="3899577155"/>
       </p:ext>
     </p:extLst>
   </p:cSld>
